--- a/report/slides.pptx
+++ b/report/slides.pptx
@@ -3102,84 +3102,14 @@
       <p:grpSpPr/>
       <p:sp>
         <p:nvSpPr>
-          <p:cNvPr id="2" name="TextBox 1"/>
-          <p:cNvSpPr txBox="1"/>
-          <p:nvPr/>
-        </p:nvSpPr>
-        <p:spPr>
-          <a:xfrm>
-            <a:off x="914400" y="2103120"/>
-            <a:ext cx="10332720" cy="1280160"/>
-          </a:xfrm>
-          <a:prstGeom prst="rect">
-            <a:avLst/>
-          </a:prstGeom>
-          <a:noFill/>
-        </p:spPr>
-        <p:txBody>
-          <a:bodyPr wrap="square" lIns="45720" rIns="45720" tIns="18288" bIns="18288">
-            <a:spAutoFit/>
-          </a:bodyPr>
-          <a:lstStyle/>
-          <a:p>
-            <a:pPr algn="ctr"/>
-            <a:r>
-              <a:rPr sz="3600" b="1" i="0">
-                <a:solidFill>
-                  <a:srgbClr val="1F4E79"/>
-                </a:solidFill>
-                <a:latin typeface="Calibri"/>
-              </a:rPr>
-              <a:t>DQN-Enhanced Adaptive Artificial-Noise Power Allocation</a:t>
-            </a:r>
-          </a:p>
-        </p:txBody>
-      </p:sp>
-      <p:sp>
-        <p:nvSpPr>
-          <p:cNvPr id="3" name="TextBox 2"/>
-          <p:cNvSpPr txBox="1"/>
-          <p:nvPr/>
-        </p:nvSpPr>
-        <p:spPr>
-          <a:xfrm>
-            <a:off x="914400" y="3200400"/>
-            <a:ext cx="10332720" cy="822960"/>
-          </a:xfrm>
-          <a:prstGeom prst="rect">
-            <a:avLst/>
-          </a:prstGeom>
-          <a:noFill/>
-        </p:spPr>
-        <p:txBody>
-          <a:bodyPr wrap="square" lIns="45720" rIns="45720" tIns="18288" bIns="18288">
-            <a:spAutoFit/>
-          </a:bodyPr>
-          <a:lstStyle/>
-          <a:p>
-            <a:pPr algn="ctr"/>
-            <a:r>
-              <a:rPr sz="2600" b="0" i="1">
-                <a:solidFill>
-                  <a:srgbClr val="1A1A1A"/>
-                </a:solidFill>
-                <a:latin typeface="Calibri"/>
-              </a:rPr>
-              <a:t>for the MISO Wiretap Channel under Imperfect CSI</a:t>
-            </a:r>
-          </a:p>
-        </p:txBody>
-      </p:sp>
-      <p:sp>
-        <p:nvSpPr>
-          <p:cNvPr id="4" name="Rectangle 3"/>
+          <p:cNvPr id="2" name="Rectangle 1"/>
           <p:cNvSpPr/>
           <p:nvPr/>
         </p:nvSpPr>
         <p:spPr>
           <a:xfrm>
-            <a:off x="4572000" y="4297680"/>
-            <a:ext cx="3047695" cy="45720"/>
+            <a:off x="0" y="0"/>
+            <a:ext cx="365760" cy="6858000"/>
           </a:xfrm>
           <a:prstGeom prst="rect">
             <a:avLst/>
@@ -3215,35 +3145,105 @@
       </p:sp>
       <p:sp>
         <p:nvSpPr>
+          <p:cNvPr id="3" name="TextBox 2"/>
+          <p:cNvSpPr txBox="1"/>
+          <p:nvPr/>
+        </p:nvSpPr>
+        <p:spPr>
+          <a:xfrm>
+            <a:off x="1097280" y="1554480"/>
+            <a:ext cx="10058400" cy="457200"/>
+          </a:xfrm>
+          <a:prstGeom prst="rect">
+            <a:avLst/>
+          </a:prstGeom>
+          <a:noFill/>
+        </p:spPr>
+        <p:txBody>
+          <a:bodyPr wrap="square" anchor="t" lIns="45720" rIns="45720" tIns="18288" bIns="18288">
+            <a:spAutoFit/>
+          </a:bodyPr>
+          <a:lstStyle/>
+          <a:p>
+            <a:pPr algn="l"/>
+            <a:r>
+              <a:rPr sz="1400" b="0" i="1">
+                <a:solidFill>
+                  <a:srgbClr val="7F7F7F"/>
+                </a:solidFill>
+                <a:latin typeface="Calibri"/>
+              </a:rPr>
+              <a:t>CY315  ·  Wireless and Mobile Security</a:t>
+            </a:r>
+          </a:p>
+        </p:txBody>
+      </p:sp>
+      <p:sp>
+        <p:nvSpPr>
+          <p:cNvPr id="4" name="TextBox 3"/>
+          <p:cNvSpPr txBox="1"/>
+          <p:nvPr/>
+        </p:nvSpPr>
+        <p:spPr>
+          <a:xfrm>
+            <a:off x="1097280" y="2103120"/>
+            <a:ext cx="10058400" cy="1280160"/>
+          </a:xfrm>
+          <a:prstGeom prst="rect">
+            <a:avLst/>
+          </a:prstGeom>
+          <a:noFill/>
+        </p:spPr>
+        <p:txBody>
+          <a:bodyPr wrap="square" anchor="t" lIns="45720" rIns="45720" tIns="18288" bIns="18288">
+            <a:spAutoFit/>
+          </a:bodyPr>
+          <a:lstStyle/>
+          <a:p>
+            <a:pPr algn="l"/>
+            <a:r>
+              <a:rPr sz="4400" b="1" i="0">
+                <a:solidFill>
+                  <a:srgbClr val="1F4E79"/>
+                </a:solidFill>
+                <a:latin typeface="Calibri"/>
+              </a:rPr>
+              <a:t>Defending the Wiretap Channel</a:t>
+            </a:r>
+          </a:p>
+        </p:txBody>
+      </p:sp>
+      <p:sp>
+        <p:nvSpPr>
           <p:cNvPr id="5" name="TextBox 4"/>
           <p:cNvSpPr txBox="1"/>
           <p:nvPr/>
         </p:nvSpPr>
         <p:spPr>
           <a:xfrm>
-            <a:off x="914400" y="4572000"/>
-            <a:ext cx="10332720" cy="457200"/>
-          </a:xfrm>
-          <a:prstGeom prst="rect">
-            <a:avLst/>
-          </a:prstGeom>
-          <a:noFill/>
-        </p:spPr>
-        <p:txBody>
-          <a:bodyPr wrap="square" lIns="45720" rIns="45720" tIns="18288" bIns="18288">
-            <a:spAutoFit/>
-          </a:bodyPr>
-          <a:lstStyle/>
-          <a:p>
-            <a:pPr algn="ctr"/>
-            <a:r>
-              <a:rPr sz="1600" b="0" i="0">
+            <a:off x="1097280" y="3291840"/>
+            <a:ext cx="10058400" cy="914400"/>
+          </a:xfrm>
+          <a:prstGeom prst="rect">
+            <a:avLst/>
+          </a:prstGeom>
+          <a:noFill/>
+        </p:spPr>
+        <p:txBody>
+          <a:bodyPr wrap="square" anchor="t" lIns="45720" rIns="45720" tIns="18288" bIns="18288">
+            <a:spAutoFit/>
+          </a:bodyPr>
+          <a:lstStyle/>
+          <a:p>
+            <a:pPr algn="l"/>
+            <a:r>
+              <a:rPr sz="2200" b="0" i="1">
                 <a:solidFill>
                   <a:srgbClr val="1A1A1A"/>
                 </a:solidFill>
                 <a:latin typeface="Calibri"/>
               </a:rPr>
-              <a:t>Muhammad Ismail (2023453)   ·   Abubakar Butt (2023352)   ·   Usman Ali (2023581)</a:t>
+              <a:t>A deep-RL approach to artificial-noise power allocation  —  when Alice's intel on Eve is noisy</a:t>
             </a:r>
           </a:p>
         </p:txBody>
@@ -3256,21 +3256,56 @@
         </p:nvSpPr>
         <p:spPr>
           <a:xfrm>
-            <a:off x="914400" y="5029200"/>
-            <a:ext cx="10332720" cy="365760"/>
-          </a:xfrm>
-          <a:prstGeom prst="rect">
-            <a:avLst/>
-          </a:prstGeom>
-          <a:noFill/>
-        </p:spPr>
-        <p:txBody>
-          <a:bodyPr wrap="square" lIns="45720" rIns="45720" tIns="18288" bIns="18288">
-            <a:spAutoFit/>
-          </a:bodyPr>
-          <a:lstStyle/>
-          <a:p>
-            <a:pPr algn="ctr"/>
+            <a:off x="1097280" y="4937760"/>
+            <a:ext cx="10058400" cy="457200"/>
+          </a:xfrm>
+          <a:prstGeom prst="rect">
+            <a:avLst/>
+          </a:prstGeom>
+          <a:noFill/>
+        </p:spPr>
+        <p:txBody>
+          <a:bodyPr wrap="square" anchor="t" lIns="45720" rIns="45720" tIns="18288" bIns="18288">
+            <a:spAutoFit/>
+          </a:bodyPr>
+          <a:lstStyle/>
+          <a:p>
+            <a:pPr algn="l"/>
+            <a:r>
+              <a:rPr sz="1800" b="0" i="0">
+                <a:solidFill>
+                  <a:srgbClr val="1A1A1A"/>
+                </a:solidFill>
+                <a:latin typeface="Calibri"/>
+              </a:rPr>
+              <a:t>Muhammad Ismail   ·   Abubakar Butt   ·   Usman Ali</a:t>
+            </a:r>
+          </a:p>
+        </p:txBody>
+      </p:sp>
+      <p:sp>
+        <p:nvSpPr>
+          <p:cNvPr id="7" name="TextBox 6"/>
+          <p:cNvSpPr txBox="1"/>
+          <p:nvPr/>
+        </p:nvSpPr>
+        <p:spPr>
+          <a:xfrm>
+            <a:off x="1097280" y="5440680"/>
+            <a:ext cx="10058400" cy="365760"/>
+          </a:xfrm>
+          <a:prstGeom prst="rect">
+            <a:avLst/>
+          </a:prstGeom>
+          <a:noFill/>
+        </p:spPr>
+        <p:txBody>
+          <a:bodyPr wrap="square" anchor="t" lIns="45720" rIns="45720" tIns="18288" bIns="18288">
+            <a:spAutoFit/>
+          </a:bodyPr>
+          <a:lstStyle/>
+          <a:p>
+            <a:pPr algn="l"/>
             <a:r>
               <a:rPr sz="1300" b="0" i="1">
                 <a:solidFill>
@@ -3278,7 +3313,7 @@
                 </a:solidFill>
                 <a:latin typeface="Calibri"/>
               </a:rPr>
-              <a:t>CY315 — Wireless and Mobile Security</a:t>
+              <a:t>2023453   ·   2023352   ·   2023581</a:t>
             </a:r>
           </a:p>
         </p:txBody>
@@ -3368,24 +3403,13 @@
           <a:lstStyle/>
           <a:p>
             <a:r>
-              <a:rPr sz="2800" b="1">
+              <a:rPr sz="3000" b="1">
                 <a:solidFill>
                   <a:srgbClr val="FFFFFF"/>
                 </a:solidFill>
                 <a:latin typeface="Calibri"/>
               </a:rPr>
-              <a:t>Results — κ sweep  (THE plot)</a:t>
-            </a:r>
-          </a:p>
-          <a:p>
-            <a:r>
-              <a:rPr sz="1300" i="1">
-                <a:solidFill>
-                  <a:srgbClr val="E0E5EC"/>
-                </a:solidFill>
-                <a:latin typeface="Calibri"/>
-              </a:rPr>
-              <a:t>What happens as Alice's intel on Eve degrades</a:t>
+              <a:t>Robustness  —  the κ sweep and the outage curve</a:t>
             </a:r>
           </a:p>
         </p:txBody>
@@ -3406,8 +3430,8 @@
         </p:blipFill>
         <p:spPr>
           <a:xfrm>
-            <a:off x="457200" y="1097280"/>
-            <a:ext cx="6217920" cy="3803904"/>
+            <a:off x="365760" y="1097280"/>
+            <a:ext cx="6035040" cy="3692024"/>
           </a:xfrm>
           <a:prstGeom prst="rect">
             <a:avLst/>
@@ -3430,8 +3454,8 @@
         </p:blipFill>
         <p:spPr>
           <a:xfrm>
-            <a:off x="6949440" y="1097280"/>
-            <a:ext cx="5029200" cy="3076687"/>
+            <a:off x="6675120" y="1097280"/>
+            <a:ext cx="5212080" cy="3188567"/>
           </a:xfrm>
           <a:prstGeom prst="rect">
             <a:avLst/>
@@ -3446,29 +3470,29 @@
         </p:nvSpPr>
         <p:spPr>
           <a:xfrm>
-            <a:off x="457200" y="5989320"/>
-            <a:ext cx="6217920" cy="640080"/>
-          </a:xfrm>
-          <a:prstGeom prst="rect">
-            <a:avLst/>
-          </a:prstGeom>
-          <a:noFill/>
-        </p:spPr>
-        <p:txBody>
-          <a:bodyPr wrap="square" lIns="45720" rIns="45720" tIns="18288" bIns="18288">
+            <a:off x="365760" y="5943600"/>
+            <a:ext cx="6035040" cy="640080"/>
+          </a:xfrm>
+          <a:prstGeom prst="rect">
+            <a:avLst/>
+          </a:prstGeom>
+          <a:noFill/>
+        </p:spPr>
+        <p:txBody>
+          <a:bodyPr wrap="square" anchor="t" lIns="45720" rIns="45720" tIns="18288" bIns="18288">
             <a:spAutoFit/>
           </a:bodyPr>
           <a:lstStyle/>
           <a:p>
             <a:pPr algn="ctr"/>
             <a:r>
-              <a:rPr sz="1200" b="0" i="1">
+              <a:rPr sz="1300" b="0" i="1">
                 <a:solidFill>
                   <a:srgbClr val="1A1A1A"/>
                 </a:solidFill>
                 <a:latin typeface="Calibri"/>
               </a:rPr>
-              <a:t>Left:  Traditional collapses below Fixed at κ ≈ 0.6. DQN stays at or above Fixed across the entire κ range.</a:t>
+              <a:t>Drag κ from 1 → 0.  Traditional collapses below Fixed near κ = 0.6.  DQN never does.</a:t>
             </a:r>
           </a:p>
         </p:txBody>
@@ -3481,29 +3505,29 @@
         </p:nvSpPr>
         <p:spPr>
           <a:xfrm>
-            <a:off x="6949440" y="5989320"/>
-            <a:ext cx="5029200" cy="640080"/>
-          </a:xfrm>
-          <a:prstGeom prst="rect">
-            <a:avLst/>
-          </a:prstGeom>
-          <a:noFill/>
-        </p:spPr>
-        <p:txBody>
-          <a:bodyPr wrap="square" lIns="45720" rIns="45720" tIns="18288" bIns="18288">
+            <a:off x="6675120" y="5943600"/>
+            <a:ext cx="5212080" cy="640080"/>
+          </a:xfrm>
+          <a:prstGeom prst="rect">
+            <a:avLst/>
+          </a:prstGeom>
+          <a:noFill/>
+        </p:spPr>
+        <p:txBody>
+          <a:bodyPr wrap="square" anchor="t" lIns="45720" rIns="45720" tIns="18288" bIns="18288">
             <a:spAutoFit/>
           </a:bodyPr>
           <a:lstStyle/>
           <a:p>
             <a:pPr algn="ctr"/>
             <a:r>
-              <a:rPr sz="1200" b="0" i="1">
+              <a:rPr sz="1300" b="0" i="1">
                 <a:solidFill>
                   <a:srgbClr val="1A1A1A"/>
                 </a:solidFill>
                 <a:latin typeface="Calibri"/>
               </a:rPr>
-              <a:t>Right:  Empirical secrecy outage. At R₀ = 4 bits/s/Hz DQN's outage ≈ 18%, Traditional's ≈ 26%.</a:t>
+              <a:t>Outage at the same scenario.  At R₀ = 4 bits/s/Hz, DQN's outage ≈ 18% vs Traditional's ≈ 26%.</a:t>
             </a:r>
           </a:p>
         </p:txBody>
@@ -3516,7 +3540,7 @@
         </p:nvSpPr>
         <p:spPr>
           <a:xfrm>
-            <a:off x="10058400" y="6446520"/>
+            <a:off x="10058400" y="6492240"/>
             <a:ext cx="2011680" cy="274320"/>
           </a:xfrm>
           <a:prstGeom prst="rect">
@@ -3525,7 +3549,7 @@
           <a:noFill/>
         </p:spPr>
         <p:txBody>
-          <a:bodyPr wrap="square" lIns="45720" rIns="45720" tIns="18288" bIns="18288">
+          <a:bodyPr wrap="square" anchor="t" lIns="45720" rIns="45720" tIns="18288" bIns="18288">
             <a:spAutoFit/>
           </a:bodyPr>
           <a:lstStyle/>
@@ -3628,7 +3652,7 @@
           <a:lstStyle/>
           <a:p>
             <a:r>
-              <a:rPr sz="2800" b="1">
+              <a:rPr sz="3000" b="1">
                 <a:solidFill>
                   <a:srgbClr val="FFFFFF"/>
                 </a:solidFill>
@@ -3637,17 +3661,6 @@
               <a:t>Live demo  —  Streamlit GUI</a:t>
             </a:r>
           </a:p>
-          <a:p>
-            <a:r>
-              <a:rPr sz="1300" i="1">
-                <a:solidFill>
-                  <a:srgbClr val="E0E5EC"/>
-                </a:solidFill>
-                <a:latin typeface="Calibri"/>
-              </a:rPr>
-              <a:t>Switch to browser; same model, you drag the sliders</a:t>
-            </a:r>
-          </a:p>
         </p:txBody>
       </p:sp>
       <p:sp>
@@ -3659,160 +3672,831 @@
         <p:spPr>
           <a:xfrm>
             <a:off x="1371600" y="1280160"/>
-            <a:ext cx="9418320" cy="5120640"/>
-          </a:xfrm>
-          <a:prstGeom prst="rect">
-            <a:avLst/>
-          </a:prstGeom>
-          <a:noFill/>
-        </p:spPr>
-        <p:txBody>
-          <a:bodyPr wrap="square">
-            <a:spAutoFit/>
-          </a:bodyPr>
-          <a:lstStyle/>
-          <a:p>
-            <a:pPr algn="l">
-              <a:spcAft>
-                <a:spcPts val="800"/>
-              </a:spcAft>
-            </a:pPr>
-            <a:r>
-              <a:rPr sz="1800">
+            <a:ext cx="9418320" cy="457200"/>
+          </a:xfrm>
+          <a:prstGeom prst="rect">
+            <a:avLst/>
+          </a:prstGeom>
+          <a:noFill/>
+        </p:spPr>
+        <p:txBody>
+          <a:bodyPr wrap="square" anchor="t" lIns="45720" rIns="45720" tIns="18288" bIns="18288">
+            <a:spAutoFit/>
+          </a:bodyPr>
+          <a:lstStyle/>
+          <a:p>
+            <a:pPr algn="ctr"/>
+            <a:r>
+              <a:rPr sz="2000" b="0" i="1">
+                <a:solidFill>
+                  <a:srgbClr val="1F4E79"/>
+                </a:solidFill>
+                <a:latin typeface="Calibri"/>
+              </a:rPr>
+              <a:t>Switching to the browser  —  same model, you drag the sliders.</a:t>
+            </a:r>
+          </a:p>
+        </p:txBody>
+      </p:sp>
+      <p:sp>
+        <p:nvSpPr>
+          <p:cNvPr id="5" name="Rounded Rectangle 4"/>
+          <p:cNvSpPr/>
+          <p:nvPr/>
+        </p:nvSpPr>
+        <p:spPr>
+          <a:xfrm>
+            <a:off x="457200" y="2103120"/>
+            <a:ext cx="2240280" cy="4023360"/>
+          </a:xfrm>
+          <a:prstGeom prst="roundRect">
+            <a:avLst/>
+          </a:prstGeom>
+          <a:solidFill>
+            <a:srgbClr val="E5ECF3"/>
+          </a:solidFill>
+          <a:ln w="15875">
+            <a:solidFill>
+              <a:srgbClr val="1F4E79"/>
+            </a:solidFill>
+          </a:ln>
+          <a:effectLst/>
+        </p:spPr>
+        <p:style>
+          <a:lnRef idx="1">
+            <a:schemeClr val="accent1"/>
+          </a:lnRef>
+          <a:fillRef idx="3">
+            <a:schemeClr val="accent1"/>
+          </a:fillRef>
+          <a:effectRef idx="2">
+            <a:schemeClr val="accent1"/>
+          </a:effectRef>
+          <a:fontRef idx="minor">
+            <a:schemeClr val="lt1"/>
+          </a:fontRef>
+        </p:style>
+        <p:txBody>
+          <a:bodyPr rtlCol="0" anchor="ctr"/>
+          <a:lstStyle/>
+          <a:p>
+            <a:pPr algn="ctr"/>
+          </a:p>
+        </p:txBody>
+      </p:sp>
+      <p:sp>
+        <p:nvSpPr>
+          <p:cNvPr id="6" name="TextBox 5"/>
+          <p:cNvSpPr txBox="1"/>
+          <p:nvPr/>
+        </p:nvSpPr>
+        <p:spPr>
+          <a:xfrm>
+            <a:off x="457200" y="2240280"/>
+            <a:ext cx="2240280" cy="457200"/>
+          </a:xfrm>
+          <a:prstGeom prst="rect">
+            <a:avLst/>
+          </a:prstGeom>
+          <a:noFill/>
+        </p:spPr>
+        <p:txBody>
+          <a:bodyPr wrap="square" anchor="t" lIns="45720" rIns="45720" tIns="18288" bIns="18288">
+            <a:spAutoFit/>
+          </a:bodyPr>
+          <a:lstStyle/>
+          <a:p>
+            <a:pPr algn="ctr"/>
+            <a:r>
+              <a:rPr sz="2400" b="1" i="0">
+                <a:solidFill>
+                  <a:srgbClr val="E5C107"/>
+                </a:solidFill>
+                <a:latin typeface="Calibri"/>
+              </a:rPr>
+              <a:t>1.</a:t>
+            </a:r>
+          </a:p>
+        </p:txBody>
+      </p:sp>
+      <p:sp>
+        <p:nvSpPr>
+          <p:cNvPr id="7" name="TextBox 6"/>
+          <p:cNvSpPr txBox="1"/>
+          <p:nvPr/>
+        </p:nvSpPr>
+        <p:spPr>
+          <a:xfrm>
+            <a:off x="457200" y="2697480"/>
+            <a:ext cx="2240280" cy="457200"/>
+          </a:xfrm>
+          <a:prstGeom prst="rect">
+            <a:avLst/>
+          </a:prstGeom>
+          <a:noFill/>
+        </p:spPr>
+        <p:txBody>
+          <a:bodyPr wrap="square" anchor="t" lIns="45720" rIns="45720" tIns="18288" bIns="18288">
+            <a:spAutoFit/>
+          </a:bodyPr>
+          <a:lstStyle/>
+          <a:p>
+            <a:pPr algn="ctr"/>
+            <a:r>
+              <a:rPr sz="1800" b="1" i="0">
+                <a:solidFill>
+                  <a:srgbClr val="1F4E79"/>
+                </a:solidFill>
+                <a:latin typeface="Calibri"/>
+              </a:rPr>
+              <a:t>Live test</a:t>
+            </a:r>
+          </a:p>
+        </p:txBody>
+      </p:sp>
+      <p:sp>
+        <p:nvSpPr>
+          <p:cNvPr id="8" name="TextBox 7"/>
+          <p:cNvSpPr txBox="1"/>
+          <p:nvPr/>
+        </p:nvSpPr>
+        <p:spPr>
+          <a:xfrm>
+            <a:off x="594360" y="3246120"/>
+            <a:ext cx="1965960" cy="2743200"/>
+          </a:xfrm>
+          <a:prstGeom prst="rect">
+            <a:avLst/>
+          </a:prstGeom>
+          <a:noFill/>
+        </p:spPr>
+        <p:txBody>
+          <a:bodyPr wrap="square" anchor="t" lIns="45720" rIns="45720" tIns="18288" bIns="18288">
+            <a:spAutoFit/>
+          </a:bodyPr>
+          <a:lstStyle/>
+          <a:p>
+            <a:pPr algn="ctr"/>
+            <a:r>
+              <a:rPr sz="1200" b="0" i="0">
                 <a:solidFill>
                   <a:srgbClr val="1A1A1A"/>
                 </a:solidFill>
                 <a:latin typeface="Calibri"/>
               </a:rPr>
-              <a:t>•  Live test  —  pick any (Nt, SNR, κ); we evaluate all three schemes on the same Monte Carlo channel batch.</a:t>
-            </a:r>
-          </a:p>
-          <a:p>
-            <a:pPr algn="l">
-              <a:spcAft>
-                <a:spcPts val="800"/>
-              </a:spcAft>
-            </a:pPr>
-            <a:r>
-              <a:rPr sz="1800">
+              <a:t>Pick (Nt, SNR, κ).  See three schemes compete side-by-side.</a:t>
+            </a:r>
+          </a:p>
+        </p:txBody>
+      </p:sp>
+      <p:sp>
+        <p:nvSpPr>
+          <p:cNvPr id="9" name="Rounded Rectangle 8"/>
+          <p:cNvSpPr/>
+          <p:nvPr/>
+        </p:nvSpPr>
+        <p:spPr>
+          <a:xfrm>
+            <a:off x="2788920" y="2103120"/>
+            <a:ext cx="2240280" cy="4023360"/>
+          </a:xfrm>
+          <a:prstGeom prst="roundRect">
+            <a:avLst/>
+          </a:prstGeom>
+          <a:solidFill>
+            <a:srgbClr val="E5ECF3"/>
+          </a:solidFill>
+          <a:ln w="15875">
+            <a:solidFill>
+              <a:srgbClr val="1F4E79"/>
+            </a:solidFill>
+          </a:ln>
+          <a:effectLst/>
+        </p:spPr>
+        <p:style>
+          <a:lnRef idx="1">
+            <a:schemeClr val="accent1"/>
+          </a:lnRef>
+          <a:fillRef idx="3">
+            <a:schemeClr val="accent1"/>
+          </a:fillRef>
+          <a:effectRef idx="2">
+            <a:schemeClr val="accent1"/>
+          </a:effectRef>
+          <a:fontRef idx="minor">
+            <a:schemeClr val="lt1"/>
+          </a:fontRef>
+        </p:style>
+        <p:txBody>
+          <a:bodyPr rtlCol="0" anchor="ctr"/>
+          <a:lstStyle/>
+          <a:p>
+            <a:pPr algn="ctr"/>
+          </a:p>
+        </p:txBody>
+      </p:sp>
+      <p:sp>
+        <p:nvSpPr>
+          <p:cNvPr id="10" name="TextBox 9"/>
+          <p:cNvSpPr txBox="1"/>
+          <p:nvPr/>
+        </p:nvSpPr>
+        <p:spPr>
+          <a:xfrm>
+            <a:off x="2788920" y="2240280"/>
+            <a:ext cx="2240280" cy="457200"/>
+          </a:xfrm>
+          <a:prstGeom prst="rect">
+            <a:avLst/>
+          </a:prstGeom>
+          <a:noFill/>
+        </p:spPr>
+        <p:txBody>
+          <a:bodyPr wrap="square" anchor="t" lIns="45720" rIns="45720" tIns="18288" bIns="18288">
+            <a:spAutoFit/>
+          </a:bodyPr>
+          <a:lstStyle/>
+          <a:p>
+            <a:pPr algn="ctr"/>
+            <a:r>
+              <a:rPr sz="2400" b="1" i="0">
+                <a:solidFill>
+                  <a:srgbClr val="E5C107"/>
+                </a:solidFill>
+                <a:latin typeface="Calibri"/>
+              </a:rPr>
+              <a:t>2.</a:t>
+            </a:r>
+          </a:p>
+        </p:txBody>
+      </p:sp>
+      <p:sp>
+        <p:nvSpPr>
+          <p:cNvPr id="11" name="TextBox 10"/>
+          <p:cNvSpPr txBox="1"/>
+          <p:nvPr/>
+        </p:nvSpPr>
+        <p:spPr>
+          <a:xfrm>
+            <a:off x="2788920" y="2697480"/>
+            <a:ext cx="2240280" cy="457200"/>
+          </a:xfrm>
+          <a:prstGeom prst="rect">
+            <a:avLst/>
+          </a:prstGeom>
+          <a:noFill/>
+        </p:spPr>
+        <p:txBody>
+          <a:bodyPr wrap="square" anchor="t" lIns="45720" rIns="45720" tIns="18288" bIns="18288">
+            <a:spAutoFit/>
+          </a:bodyPr>
+          <a:lstStyle/>
+          <a:p>
+            <a:pPr algn="ctr"/>
+            <a:r>
+              <a:rPr sz="1800" b="1" i="0">
+                <a:solidFill>
+                  <a:srgbClr val="1F4E79"/>
+                </a:solidFill>
+                <a:latin typeface="Calibri"/>
+              </a:rPr>
+              <a:t>SNR sweep</a:t>
+            </a:r>
+          </a:p>
+        </p:txBody>
+      </p:sp>
+      <p:sp>
+        <p:nvSpPr>
+          <p:cNvPr id="12" name="TextBox 11"/>
+          <p:cNvSpPr txBox="1"/>
+          <p:nvPr/>
+        </p:nvSpPr>
+        <p:spPr>
+          <a:xfrm>
+            <a:off x="2926079" y="3246120"/>
+            <a:ext cx="1965960" cy="2743200"/>
+          </a:xfrm>
+          <a:prstGeom prst="rect">
+            <a:avLst/>
+          </a:prstGeom>
+          <a:noFill/>
+        </p:spPr>
+        <p:txBody>
+          <a:bodyPr wrap="square" anchor="t" lIns="45720" rIns="45720" tIns="18288" bIns="18288">
+            <a:spAutoFit/>
+          </a:bodyPr>
+          <a:lstStyle/>
+          <a:p>
+            <a:pPr algn="ctr"/>
+            <a:r>
+              <a:rPr sz="1200" b="0" i="0">
                 <a:solidFill>
                   <a:srgbClr val="1A1A1A"/>
                 </a:solidFill>
                 <a:latin typeface="Calibri"/>
               </a:rPr>
-              <a:t>•  SNR sweep  —  hold κ, vary SNR. Watch the spacing between Fixed / Traditional / DQN at each power.</a:t>
-            </a:r>
-          </a:p>
-          <a:p>
-            <a:pPr algn="l">
-              <a:spcAft>
-                <a:spcPts val="800"/>
-              </a:spcAft>
-            </a:pPr>
-            <a:r>
-              <a:rPr sz="1800">
+              <a:t>Hold κ, vary SNR.  Watch the curves spread or converge.</a:t>
+            </a:r>
+          </a:p>
+        </p:txBody>
+      </p:sp>
+      <p:sp>
+        <p:nvSpPr>
+          <p:cNvPr id="13" name="Rounded Rectangle 12"/>
+          <p:cNvSpPr/>
+          <p:nvPr/>
+        </p:nvSpPr>
+        <p:spPr>
+          <a:xfrm>
+            <a:off x="5120640" y="2103120"/>
+            <a:ext cx="2240280" cy="4023360"/>
+          </a:xfrm>
+          <a:prstGeom prst="roundRect">
+            <a:avLst/>
+          </a:prstGeom>
+          <a:solidFill>
+            <a:srgbClr val="E5ECF3"/>
+          </a:solidFill>
+          <a:ln w="15875">
+            <a:solidFill>
+              <a:srgbClr val="1F4E79"/>
+            </a:solidFill>
+          </a:ln>
+          <a:effectLst/>
+        </p:spPr>
+        <p:style>
+          <a:lnRef idx="1">
+            <a:schemeClr val="accent1"/>
+          </a:lnRef>
+          <a:fillRef idx="3">
+            <a:schemeClr val="accent1"/>
+          </a:fillRef>
+          <a:effectRef idx="2">
+            <a:schemeClr val="accent1"/>
+          </a:effectRef>
+          <a:fontRef idx="minor">
+            <a:schemeClr val="lt1"/>
+          </a:fontRef>
+        </p:style>
+        <p:txBody>
+          <a:bodyPr rtlCol="0" anchor="ctr"/>
+          <a:lstStyle/>
+          <a:p>
+            <a:pPr algn="ctr"/>
+          </a:p>
+        </p:txBody>
+      </p:sp>
+      <p:sp>
+        <p:nvSpPr>
+          <p:cNvPr id="14" name="TextBox 13"/>
+          <p:cNvSpPr txBox="1"/>
+          <p:nvPr/>
+        </p:nvSpPr>
+        <p:spPr>
+          <a:xfrm>
+            <a:off x="5120640" y="2240280"/>
+            <a:ext cx="2240280" cy="457200"/>
+          </a:xfrm>
+          <a:prstGeom prst="rect">
+            <a:avLst/>
+          </a:prstGeom>
+          <a:noFill/>
+        </p:spPr>
+        <p:txBody>
+          <a:bodyPr wrap="square" anchor="t" lIns="45720" rIns="45720" tIns="18288" bIns="18288">
+            <a:spAutoFit/>
+          </a:bodyPr>
+          <a:lstStyle/>
+          <a:p>
+            <a:pPr algn="ctr"/>
+            <a:r>
+              <a:rPr sz="2400" b="1" i="0">
+                <a:solidFill>
+                  <a:srgbClr val="E5C107"/>
+                </a:solidFill>
+                <a:latin typeface="Calibri"/>
+              </a:rPr>
+              <a:t>3.</a:t>
+            </a:r>
+          </a:p>
+        </p:txBody>
+      </p:sp>
+      <p:sp>
+        <p:nvSpPr>
+          <p:cNvPr id="15" name="TextBox 14"/>
+          <p:cNvSpPr txBox="1"/>
+          <p:nvPr/>
+        </p:nvSpPr>
+        <p:spPr>
+          <a:xfrm>
+            <a:off x="5120640" y="2697480"/>
+            <a:ext cx="2240280" cy="457200"/>
+          </a:xfrm>
+          <a:prstGeom prst="rect">
+            <a:avLst/>
+          </a:prstGeom>
+          <a:noFill/>
+        </p:spPr>
+        <p:txBody>
+          <a:bodyPr wrap="square" anchor="t" lIns="45720" rIns="45720" tIns="18288" bIns="18288">
+            <a:spAutoFit/>
+          </a:bodyPr>
+          <a:lstStyle/>
+          <a:p>
+            <a:pPr algn="ctr"/>
+            <a:r>
+              <a:rPr sz="1800" b="1" i="0">
+                <a:solidFill>
+                  <a:srgbClr val="1F4E79"/>
+                </a:solidFill>
+                <a:latin typeface="Calibri"/>
+              </a:rPr>
+              <a:t>κ sweep</a:t>
+            </a:r>
+          </a:p>
+        </p:txBody>
+      </p:sp>
+      <p:sp>
+        <p:nvSpPr>
+          <p:cNvPr id="16" name="TextBox 15"/>
+          <p:cNvSpPr txBox="1"/>
+          <p:nvPr/>
+        </p:nvSpPr>
+        <p:spPr>
+          <a:xfrm>
+            <a:off x="5257800" y="3246120"/>
+            <a:ext cx="1965960" cy="2743200"/>
+          </a:xfrm>
+          <a:prstGeom prst="rect">
+            <a:avLst/>
+          </a:prstGeom>
+          <a:noFill/>
+        </p:spPr>
+        <p:txBody>
+          <a:bodyPr wrap="square" anchor="t" lIns="45720" rIns="45720" tIns="18288" bIns="18288">
+            <a:spAutoFit/>
+          </a:bodyPr>
+          <a:lstStyle/>
+          <a:p>
+            <a:pPr algn="ctr"/>
+            <a:r>
+              <a:rPr sz="1200" b="0" i="0">
                 <a:solidFill>
                   <a:srgbClr val="1A1A1A"/>
                 </a:solidFill>
                 <a:latin typeface="Calibri"/>
               </a:rPr>
-              <a:t>•  κ sweep (the headline)  —  hold SNR, drag κ from 1 to 0. The Traditional curve crosses below Fixed; DQN never does.</a:t>
-            </a:r>
-          </a:p>
-          <a:p>
-            <a:pPr algn="l">
-              <a:spcAft>
-                <a:spcPts val="800"/>
-              </a:spcAft>
-            </a:pPr>
-            <a:r>
-              <a:rPr sz="1800">
+              <a:t>Hold SNR, slide κ from 1 → 0.  The headline story, live.</a:t>
+            </a:r>
+          </a:p>
+        </p:txBody>
+      </p:sp>
+      <p:sp>
+        <p:nvSpPr>
+          <p:cNvPr id="17" name="Rounded Rectangle 16"/>
+          <p:cNvSpPr/>
+          <p:nvPr/>
+        </p:nvSpPr>
+        <p:spPr>
+          <a:xfrm>
+            <a:off x="7452359" y="2103120"/>
+            <a:ext cx="2240280" cy="4023360"/>
+          </a:xfrm>
+          <a:prstGeom prst="roundRect">
+            <a:avLst/>
+          </a:prstGeom>
+          <a:solidFill>
+            <a:srgbClr val="E5ECF3"/>
+          </a:solidFill>
+          <a:ln w="15875">
+            <a:solidFill>
+              <a:srgbClr val="1F4E79"/>
+            </a:solidFill>
+          </a:ln>
+          <a:effectLst/>
+        </p:spPr>
+        <p:style>
+          <a:lnRef idx="1">
+            <a:schemeClr val="accent1"/>
+          </a:lnRef>
+          <a:fillRef idx="3">
+            <a:schemeClr val="accent1"/>
+          </a:fillRef>
+          <a:effectRef idx="2">
+            <a:schemeClr val="accent1"/>
+          </a:effectRef>
+          <a:fontRef idx="minor">
+            <a:schemeClr val="lt1"/>
+          </a:fontRef>
+        </p:style>
+        <p:txBody>
+          <a:bodyPr rtlCol="0" anchor="ctr"/>
+          <a:lstStyle/>
+          <a:p>
+            <a:pPr algn="ctr"/>
+          </a:p>
+        </p:txBody>
+      </p:sp>
+      <p:sp>
+        <p:nvSpPr>
+          <p:cNvPr id="18" name="TextBox 17"/>
+          <p:cNvSpPr txBox="1"/>
+          <p:nvPr/>
+        </p:nvSpPr>
+        <p:spPr>
+          <a:xfrm>
+            <a:off x="7452359" y="2240280"/>
+            <a:ext cx="2240280" cy="457200"/>
+          </a:xfrm>
+          <a:prstGeom prst="rect">
+            <a:avLst/>
+          </a:prstGeom>
+          <a:noFill/>
+        </p:spPr>
+        <p:txBody>
+          <a:bodyPr wrap="square" anchor="t" lIns="45720" rIns="45720" tIns="18288" bIns="18288">
+            <a:spAutoFit/>
+          </a:bodyPr>
+          <a:lstStyle/>
+          <a:p>
+            <a:pPr algn="ctr"/>
+            <a:r>
+              <a:rPr sz="2400" b="1" i="0">
+                <a:solidFill>
+                  <a:srgbClr val="E5C107"/>
+                </a:solidFill>
+                <a:latin typeface="Calibri"/>
+              </a:rPr>
+              <a:t>4.</a:t>
+            </a:r>
+          </a:p>
+        </p:txBody>
+      </p:sp>
+      <p:sp>
+        <p:nvSpPr>
+          <p:cNvPr id="19" name="TextBox 18"/>
+          <p:cNvSpPr txBox="1"/>
+          <p:nvPr/>
+        </p:nvSpPr>
+        <p:spPr>
+          <a:xfrm>
+            <a:off x="7452359" y="2697480"/>
+            <a:ext cx="2240280" cy="457200"/>
+          </a:xfrm>
+          <a:prstGeom prst="rect">
+            <a:avLst/>
+          </a:prstGeom>
+          <a:noFill/>
+        </p:spPr>
+        <p:txBody>
+          <a:bodyPr wrap="square" anchor="t" lIns="45720" rIns="45720" tIns="18288" bIns="18288">
+            <a:spAutoFit/>
+          </a:bodyPr>
+          <a:lstStyle/>
+          <a:p>
+            <a:pPr algn="ctr"/>
+            <a:r>
+              <a:rPr sz="1800" b="1" i="0">
+                <a:solidFill>
+                  <a:srgbClr val="1F4E79"/>
+                </a:solidFill>
+                <a:latin typeface="Calibri"/>
+              </a:rPr>
+              <a:t>Outage</a:t>
+            </a:r>
+          </a:p>
+        </p:txBody>
+      </p:sp>
+      <p:sp>
+        <p:nvSpPr>
+          <p:cNvPr id="20" name="TextBox 19"/>
+          <p:cNvSpPr txBox="1"/>
+          <p:nvPr/>
+        </p:nvSpPr>
+        <p:spPr>
+          <a:xfrm>
+            <a:off x="7589519" y="3246120"/>
+            <a:ext cx="1965960" cy="2743200"/>
+          </a:xfrm>
+          <a:prstGeom prst="rect">
+            <a:avLst/>
+          </a:prstGeom>
+          <a:noFill/>
+        </p:spPr>
+        <p:txBody>
+          <a:bodyPr wrap="square" anchor="t" lIns="45720" rIns="45720" tIns="18288" bIns="18288">
+            <a:spAutoFit/>
+          </a:bodyPr>
+          <a:lstStyle/>
+          <a:p>
+            <a:pPr algn="ctr"/>
+            <a:r>
+              <a:rPr sz="1200" b="0" i="0">
                 <a:solidFill>
                   <a:srgbClr val="1A1A1A"/>
                 </a:solidFill>
                 <a:latin typeface="Calibri"/>
               </a:rPr>
-              <a:t>•  Outage probability  —  empirical CDF of Rs across the channel batch. Lower curve = more reliable scheme.</a:t>
-            </a:r>
-          </a:p>
-          <a:p>
-            <a:pPr algn="l">
-              <a:spcAft>
-                <a:spcPts val="800"/>
-              </a:spcAft>
-            </a:pPr>
-            <a:r>
-              <a:rPr sz="1800">
+              <a:t>Empirical CDF.  How often each scheme misses the target rate.</a:t>
+            </a:r>
+          </a:p>
+        </p:txBody>
+      </p:sp>
+      <p:sp>
+        <p:nvSpPr>
+          <p:cNvPr id="21" name="Rounded Rectangle 20"/>
+          <p:cNvSpPr/>
+          <p:nvPr/>
+        </p:nvSpPr>
+        <p:spPr>
+          <a:xfrm>
+            <a:off x="9784080" y="2103120"/>
+            <a:ext cx="2240280" cy="4023360"/>
+          </a:xfrm>
+          <a:prstGeom prst="roundRect">
+            <a:avLst/>
+          </a:prstGeom>
+          <a:solidFill>
+            <a:srgbClr val="E5ECF3"/>
+          </a:solidFill>
+          <a:ln w="15875">
+            <a:solidFill>
+              <a:srgbClr val="1F4E79"/>
+            </a:solidFill>
+          </a:ln>
+          <a:effectLst/>
+        </p:spPr>
+        <p:style>
+          <a:lnRef idx="1">
+            <a:schemeClr val="accent1"/>
+          </a:lnRef>
+          <a:fillRef idx="3">
+            <a:schemeClr val="accent1"/>
+          </a:fillRef>
+          <a:effectRef idx="2">
+            <a:schemeClr val="accent1"/>
+          </a:effectRef>
+          <a:fontRef idx="minor">
+            <a:schemeClr val="lt1"/>
+          </a:fontRef>
+        </p:style>
+        <p:txBody>
+          <a:bodyPr rtlCol="0" anchor="ctr"/>
+          <a:lstStyle/>
+          <a:p>
+            <a:pPr algn="ctr"/>
+          </a:p>
+        </p:txBody>
+      </p:sp>
+      <p:sp>
+        <p:nvSpPr>
+          <p:cNvPr id="22" name="TextBox 21"/>
+          <p:cNvSpPr txBox="1"/>
+          <p:nvPr/>
+        </p:nvSpPr>
+        <p:spPr>
+          <a:xfrm>
+            <a:off x="9784080" y="2240280"/>
+            <a:ext cx="2240280" cy="457200"/>
+          </a:xfrm>
+          <a:prstGeom prst="rect">
+            <a:avLst/>
+          </a:prstGeom>
+          <a:noFill/>
+        </p:spPr>
+        <p:txBody>
+          <a:bodyPr wrap="square" anchor="t" lIns="45720" rIns="45720" tIns="18288" bIns="18288">
+            <a:spAutoFit/>
+          </a:bodyPr>
+          <a:lstStyle/>
+          <a:p>
+            <a:pPr algn="ctr"/>
+            <a:r>
+              <a:rPr sz="2400" b="1" i="0">
+                <a:solidFill>
+                  <a:srgbClr val="E5C107"/>
+                </a:solidFill>
+                <a:latin typeface="Calibri"/>
+              </a:rPr>
+              <a:t>5.</a:t>
+            </a:r>
+          </a:p>
+        </p:txBody>
+      </p:sp>
+      <p:sp>
+        <p:nvSpPr>
+          <p:cNvPr id="23" name="TextBox 22"/>
+          <p:cNvSpPr txBox="1"/>
+          <p:nvPr/>
+        </p:nvSpPr>
+        <p:spPr>
+          <a:xfrm>
+            <a:off x="9784080" y="2697480"/>
+            <a:ext cx="2240280" cy="457200"/>
+          </a:xfrm>
+          <a:prstGeom prst="rect">
+            <a:avLst/>
+          </a:prstGeom>
+          <a:noFill/>
+        </p:spPr>
+        <p:txBody>
+          <a:bodyPr wrap="square" anchor="t" lIns="45720" rIns="45720" tIns="18288" bIns="18288">
+            <a:spAutoFit/>
+          </a:bodyPr>
+          <a:lstStyle/>
+          <a:p>
+            <a:pPr algn="ctr"/>
+            <a:r>
+              <a:rPr sz="1800" b="1" i="0">
+                <a:solidFill>
+                  <a:srgbClr val="1F4E79"/>
+                </a:solidFill>
+                <a:latin typeface="Calibri"/>
+              </a:rPr>
+              <a:t>Geometry</a:t>
+            </a:r>
+          </a:p>
+        </p:txBody>
+      </p:sp>
+      <p:sp>
+        <p:nvSpPr>
+          <p:cNvPr id="24" name="TextBox 23"/>
+          <p:cNvSpPr txBox="1"/>
+          <p:nvPr/>
+        </p:nvSpPr>
+        <p:spPr>
+          <a:xfrm>
+            <a:off x="9921240" y="3246120"/>
+            <a:ext cx="1965960" cy="2743200"/>
+          </a:xfrm>
+          <a:prstGeom prst="rect">
+            <a:avLst/>
+          </a:prstGeom>
+          <a:noFill/>
+        </p:spPr>
+        <p:txBody>
+          <a:bodyPr wrap="square" anchor="t" lIns="45720" rIns="45720" tIns="18288" bIns="18288">
+            <a:spAutoFit/>
+          </a:bodyPr>
+          <a:lstStyle/>
+          <a:p>
+            <a:pPr algn="ctr"/>
+            <a:r>
+              <a:rPr sz="1200" b="0" i="0">
                 <a:solidFill>
                   <a:srgbClr val="1A1A1A"/>
                 </a:solidFill>
                 <a:latin typeface="Calibri"/>
               </a:rPr>
-              <a:t>•  Geometry sketch  —  conceptual picture of Alice's beam, AN leakage, Bob, Eve.</a:t>
-            </a:r>
-          </a:p>
-          <a:p>
-            <a:pPr algn="l">
-              <a:spcAft>
-                <a:spcPts val="800"/>
-              </a:spcAft>
-            </a:pPr>
-            <a:r>
-              <a:rPr sz="1800">
-                <a:solidFill>
-                  <a:srgbClr val="1A1A1A"/>
-                </a:solidFill>
-                <a:latin typeface="Calibri"/>
-              </a:rPr>
-              <a:t>•  Cached evaluations: dragging a slider back-and-forth is instant after the first compute.</a:t>
-            </a:r>
-          </a:p>
-        </p:txBody>
-      </p:sp>
-      <p:sp>
-        <p:nvSpPr>
-          <p:cNvPr id="5" name="TextBox 4"/>
-          <p:cNvSpPr txBox="1"/>
-          <p:nvPr/>
-        </p:nvSpPr>
-        <p:spPr>
-          <a:xfrm>
-            <a:off x="1371600" y="6126480"/>
-            <a:ext cx="9418320" cy="365760"/>
-          </a:xfrm>
-          <a:prstGeom prst="rect">
-            <a:avLst/>
-          </a:prstGeom>
-          <a:noFill/>
-        </p:spPr>
-        <p:txBody>
-          <a:bodyPr wrap="square" lIns="45720" rIns="45720" tIns="18288" bIns="18288">
+              <a:t>Conceptual sketch  —  Alice's beam, AN, Bob, Eve.</a:t>
+            </a:r>
+          </a:p>
+        </p:txBody>
+      </p:sp>
+      <p:sp>
+        <p:nvSpPr>
+          <p:cNvPr id="25" name="TextBox 24"/>
+          <p:cNvSpPr txBox="1"/>
+          <p:nvPr/>
+        </p:nvSpPr>
+        <p:spPr>
+          <a:xfrm>
+            <a:off x="548640" y="6355080"/>
+            <a:ext cx="11247120" cy="365760"/>
+          </a:xfrm>
+          <a:prstGeom prst="rect">
+            <a:avLst/>
+          </a:prstGeom>
+          <a:noFill/>
+        </p:spPr>
+        <p:txBody>
+          <a:bodyPr wrap="square" anchor="t" lIns="45720" rIns="45720" tIns="18288" bIns="18288">
             <a:spAutoFit/>
           </a:bodyPr>
           <a:lstStyle/>
           <a:p>
             <a:pPr algn="ctr"/>
             <a:r>
-              <a:rPr sz="1400" b="0" i="1">
-                <a:solidFill>
-                  <a:srgbClr val="1F4E79"/>
-                </a:solidFill>
-                <a:latin typeface="Calibri"/>
-              </a:rPr>
-              <a:t>▶  streamlit run app/streamlit_app.py     (defaults to Nt = 8 where the DQN's edge is biggest)</a:t>
-            </a:r>
-          </a:p>
-        </p:txBody>
-      </p:sp>
-      <p:sp>
-        <p:nvSpPr>
-          <p:cNvPr id="6" name="TextBox 5"/>
-          <p:cNvSpPr txBox="1"/>
-          <p:nvPr/>
-        </p:nvSpPr>
-        <p:spPr>
-          <a:xfrm>
-            <a:off x="10058400" y="6446520"/>
+              <a:rPr sz="1300" b="0" i="1">
+                <a:solidFill>
+                  <a:srgbClr val="7F7F7F"/>
+                </a:solidFill>
+                <a:latin typeface="Calibri"/>
+              </a:rPr>
+              <a:t>▶  streamlit run app/streamlit_app.py     (default Nt = 8 — where the win is biggest)</a:t>
+            </a:r>
+          </a:p>
+        </p:txBody>
+      </p:sp>
+      <p:sp>
+        <p:nvSpPr>
+          <p:cNvPr id="26" name="TextBox 25"/>
+          <p:cNvSpPr txBox="1"/>
+          <p:nvPr/>
+        </p:nvSpPr>
+        <p:spPr>
+          <a:xfrm>
+            <a:off x="10058400" y="6492240"/>
             <a:ext cx="2011680" cy="274320"/>
           </a:xfrm>
           <a:prstGeom prst="rect">
@@ -3821,7 +4505,7 @@
           <a:noFill/>
         </p:spPr>
         <p:txBody>
-          <a:bodyPr wrap="square" lIns="45720" rIns="45720" tIns="18288" bIns="18288">
+          <a:bodyPr wrap="square" anchor="t" lIns="45720" rIns="45720" tIns="18288" bIns="18288">
             <a:spAutoFit/>
           </a:bodyPr>
           <a:lstStyle/>
@@ -3924,129 +4608,378 @@
           <a:lstStyle/>
           <a:p>
             <a:r>
-              <a:rPr sz="2800" b="1">
+              <a:rPr sz="3000" b="1">
                 <a:solidFill>
                   <a:srgbClr val="FFFFFF"/>
                 </a:solidFill>
                 <a:latin typeface="Calibri"/>
               </a:rPr>
-              <a:t>Conclusion + future work</a:t>
-            </a:r>
-          </a:p>
-        </p:txBody>
-      </p:sp>
-      <p:sp>
-        <p:nvSpPr>
-          <p:cNvPr id="4" name="TextBox 3"/>
-          <p:cNvSpPr txBox="1"/>
-          <p:nvPr/>
-        </p:nvSpPr>
-        <p:spPr>
-          <a:xfrm>
-            <a:off x="548640" y="1188720"/>
-            <a:ext cx="11247120" cy="5303520"/>
-          </a:xfrm>
-          <a:prstGeom prst="rect">
-            <a:avLst/>
-          </a:prstGeom>
-          <a:noFill/>
-        </p:spPr>
-        <p:txBody>
-          <a:bodyPr wrap="square">
-            <a:spAutoFit/>
-          </a:bodyPr>
-          <a:lstStyle/>
-          <a:p>
-            <a:pPr algn="l">
-              <a:spcAft>
-                <a:spcPts val="800"/>
-              </a:spcAft>
-            </a:pPr>
-            <a:r>
-              <a:rPr sz="1800">
+              <a:t>Takeaways</a:t>
+            </a:r>
+          </a:p>
+        </p:txBody>
+      </p:sp>
+      <p:sp>
+        <p:nvSpPr>
+          <p:cNvPr id="4" name="Rounded Rectangle 3"/>
+          <p:cNvSpPr/>
+          <p:nvPr/>
+        </p:nvSpPr>
+        <p:spPr>
+          <a:xfrm>
+            <a:off x="548640" y="1280160"/>
+            <a:ext cx="3657600" cy="5029200"/>
+          </a:xfrm>
+          <a:prstGeom prst="roundRect">
+            <a:avLst/>
+          </a:prstGeom>
+          <a:solidFill>
+            <a:srgbClr val="FAE7E6"/>
+          </a:solidFill>
+          <a:ln w="15875">
+            <a:solidFill>
+              <a:srgbClr val="C0504D"/>
+            </a:solidFill>
+          </a:ln>
+          <a:effectLst/>
+        </p:spPr>
+        <p:style>
+          <a:lnRef idx="1">
+            <a:schemeClr val="accent1"/>
+          </a:lnRef>
+          <a:fillRef idx="3">
+            <a:schemeClr val="accent1"/>
+          </a:fillRef>
+          <a:effectRef idx="2">
+            <a:schemeClr val="accent1"/>
+          </a:effectRef>
+          <a:fontRef idx="minor">
+            <a:schemeClr val="lt1"/>
+          </a:fontRef>
+        </p:style>
+        <p:txBody>
+          <a:bodyPr rtlCol="0" anchor="ctr"/>
+          <a:lstStyle/>
+          <a:p>
+            <a:pPr algn="ctr"/>
+          </a:p>
+        </p:txBody>
+      </p:sp>
+      <p:sp>
+        <p:nvSpPr>
+          <p:cNvPr id="5" name="TextBox 4"/>
+          <p:cNvSpPr txBox="1"/>
+          <p:nvPr/>
+        </p:nvSpPr>
+        <p:spPr>
+          <a:xfrm>
+            <a:off x="548640" y="1417320"/>
+            <a:ext cx="3657600" cy="457200"/>
+          </a:xfrm>
+          <a:prstGeom prst="rect">
+            <a:avLst/>
+          </a:prstGeom>
+          <a:noFill/>
+        </p:spPr>
+        <p:txBody>
+          <a:bodyPr wrap="square" anchor="t" lIns="45720" rIns="45720" tIns="18288" bIns="18288">
+            <a:spAutoFit/>
+          </a:bodyPr>
+          <a:lstStyle/>
+          <a:p>
+            <a:pPr algn="ctr"/>
+            <a:r>
+              <a:rPr sz="2200" b="1" i="0">
+                <a:solidFill>
+                  <a:srgbClr val="C0504D"/>
+                </a:solidFill>
+                <a:latin typeface="Calibri"/>
+              </a:rPr>
+              <a:t>1.  Problem</a:t>
+            </a:r>
+          </a:p>
+        </p:txBody>
+      </p:sp>
+      <p:sp>
+        <p:nvSpPr>
+          <p:cNvPr id="6" name="TextBox 5"/>
+          <p:cNvSpPr txBox="1"/>
+          <p:nvPr/>
+        </p:nvSpPr>
+        <p:spPr>
+          <a:xfrm>
+            <a:off x="731520" y="2011680"/>
+            <a:ext cx="3291840" cy="4114800"/>
+          </a:xfrm>
+          <a:prstGeom prst="rect">
+            <a:avLst/>
+          </a:prstGeom>
+          <a:noFill/>
+        </p:spPr>
+        <p:txBody>
+          <a:bodyPr wrap="square" anchor="t" lIns="45720" rIns="45720" tIns="18288" bIns="18288">
+            <a:spAutoFit/>
+          </a:bodyPr>
+          <a:lstStyle/>
+          <a:p>
+            <a:pPr algn="l"/>
+            <a:r>
+              <a:rPr sz="1500" b="0" i="0">
                 <a:solidFill>
                   <a:srgbClr val="1A1A1A"/>
                 </a:solidFill>
                 <a:latin typeface="Calibri"/>
               </a:rPr>
-              <a:t>•  The textbook fix (plug ĥE into the optimiser) is actively harmful at moderate κ — it drops below the do-nothing baseline.</a:t>
-            </a:r>
-          </a:p>
-          <a:p>
-            <a:pPr algn="l">
-              <a:spcAft>
-                <a:spcPts val="800"/>
-              </a:spcAft>
-            </a:pPr>
-            <a:r>
-              <a:rPr sz="1800">
+              <a:t>Plugging noisy intel into the textbook AN-allocation optimiser produces a confidently-wrong split.
+It actively underperforms the do-nothing baseline once intel quality drops below ~ 0.6.</a:t>
+            </a:r>
+          </a:p>
+        </p:txBody>
+      </p:sp>
+      <p:sp>
+        <p:nvSpPr>
+          <p:cNvPr id="7" name="Rounded Rectangle 6"/>
+          <p:cNvSpPr/>
+          <p:nvPr/>
+        </p:nvSpPr>
+        <p:spPr>
+          <a:xfrm>
+            <a:off x="4297680" y="1280160"/>
+            <a:ext cx="3657600" cy="5029200"/>
+          </a:xfrm>
+          <a:prstGeom prst="roundRect">
+            <a:avLst/>
+          </a:prstGeom>
+          <a:solidFill>
+            <a:srgbClr val="E5ECF3"/>
+          </a:solidFill>
+          <a:ln w="15875">
+            <a:solidFill>
+              <a:srgbClr val="1F4E79"/>
+            </a:solidFill>
+          </a:ln>
+          <a:effectLst/>
+        </p:spPr>
+        <p:style>
+          <a:lnRef idx="1">
+            <a:schemeClr val="accent1"/>
+          </a:lnRef>
+          <a:fillRef idx="3">
+            <a:schemeClr val="accent1"/>
+          </a:fillRef>
+          <a:effectRef idx="2">
+            <a:schemeClr val="accent1"/>
+          </a:effectRef>
+          <a:fontRef idx="minor">
+            <a:schemeClr val="lt1"/>
+          </a:fontRef>
+        </p:style>
+        <p:txBody>
+          <a:bodyPr rtlCol="0" anchor="ctr"/>
+          <a:lstStyle/>
+          <a:p>
+            <a:pPr algn="ctr"/>
+          </a:p>
+        </p:txBody>
+      </p:sp>
+      <p:sp>
+        <p:nvSpPr>
+          <p:cNvPr id="8" name="TextBox 7"/>
+          <p:cNvSpPr txBox="1"/>
+          <p:nvPr/>
+        </p:nvSpPr>
+        <p:spPr>
+          <a:xfrm>
+            <a:off x="4297680" y="1417320"/>
+            <a:ext cx="3657600" cy="457200"/>
+          </a:xfrm>
+          <a:prstGeom prst="rect">
+            <a:avLst/>
+          </a:prstGeom>
+          <a:noFill/>
+        </p:spPr>
+        <p:txBody>
+          <a:bodyPr wrap="square" anchor="t" lIns="45720" rIns="45720" tIns="18288" bIns="18288">
+            <a:spAutoFit/>
+          </a:bodyPr>
+          <a:lstStyle/>
+          <a:p>
+            <a:pPr algn="ctr"/>
+            <a:r>
+              <a:rPr sz="2200" b="1" i="0">
+                <a:solidFill>
+                  <a:srgbClr val="1F4E79"/>
+                </a:solidFill>
+                <a:latin typeface="Calibri"/>
+              </a:rPr>
+              <a:t>2.  Fix</a:t>
+            </a:r>
+          </a:p>
+        </p:txBody>
+      </p:sp>
+      <p:sp>
+        <p:nvSpPr>
+          <p:cNvPr id="9" name="TextBox 8"/>
+          <p:cNvSpPr txBox="1"/>
+          <p:nvPr/>
+        </p:nvSpPr>
+        <p:spPr>
+          <a:xfrm>
+            <a:off x="4480560" y="2011680"/>
+            <a:ext cx="3291840" cy="4114800"/>
+          </a:xfrm>
+          <a:prstGeom prst="rect">
+            <a:avLst/>
+          </a:prstGeom>
+          <a:noFill/>
+        </p:spPr>
+        <p:txBody>
+          <a:bodyPr wrap="square" anchor="t" lIns="45720" rIns="45720" tIns="18288" bIns="18288">
+            <a:spAutoFit/>
+          </a:bodyPr>
+          <a:lstStyle/>
+          <a:p>
+            <a:pPr algn="l"/>
+            <a:r>
+              <a:rPr sz="1500" b="0" i="0">
                 <a:solidFill>
                   <a:srgbClr val="1A1A1A"/>
                 </a:solidFill>
                 <a:latin typeface="Calibri"/>
               </a:rPr>
-              <a:t>•  Our DQN, trained over random κ, sidesteps this failure mode by conditioning on κ and on a hB / ĥE alignment cue.</a:t>
-            </a:r>
-          </a:p>
-          <a:p>
-            <a:pPr algn="l">
-              <a:spcAft>
-                <a:spcPts val="800"/>
-              </a:spcAft>
-            </a:pPr>
-            <a:r>
-              <a:rPr sz="1800">
+              <a:t>Train a small DQN over random intel-quality scenarios.
+Feed the agent its own intel quality and a beam-alignment cue, so it knows when to trust the estimate and when to retreat to a safe default.</a:t>
+            </a:r>
+          </a:p>
+        </p:txBody>
+      </p:sp>
+      <p:sp>
+        <p:nvSpPr>
+          <p:cNvPr id="10" name="Rounded Rectangle 9"/>
+          <p:cNvSpPr/>
+          <p:nvPr/>
+        </p:nvSpPr>
+        <p:spPr>
+          <a:xfrm>
+            <a:off x="8046720" y="1280160"/>
+            <a:ext cx="3657600" cy="5029200"/>
+          </a:xfrm>
+          <a:prstGeom prst="roundRect">
+            <a:avLst/>
+          </a:prstGeom>
+          <a:solidFill>
+            <a:srgbClr val="E0F1E0"/>
+          </a:solidFill>
+          <a:ln w="15875">
+            <a:solidFill>
+              <a:srgbClr val="2CA02C"/>
+            </a:solidFill>
+          </a:ln>
+          <a:effectLst/>
+        </p:spPr>
+        <p:style>
+          <a:lnRef idx="1">
+            <a:schemeClr val="accent1"/>
+          </a:lnRef>
+          <a:fillRef idx="3">
+            <a:schemeClr val="accent1"/>
+          </a:fillRef>
+          <a:effectRef idx="2">
+            <a:schemeClr val="accent1"/>
+          </a:effectRef>
+          <a:fontRef idx="minor">
+            <a:schemeClr val="lt1"/>
+          </a:fontRef>
+        </p:style>
+        <p:txBody>
+          <a:bodyPr rtlCol="0" anchor="ctr"/>
+          <a:lstStyle/>
+          <a:p>
+            <a:pPr algn="ctr"/>
+          </a:p>
+        </p:txBody>
+      </p:sp>
+      <p:sp>
+        <p:nvSpPr>
+          <p:cNvPr id="11" name="TextBox 10"/>
+          <p:cNvSpPr txBox="1"/>
+          <p:nvPr/>
+        </p:nvSpPr>
+        <p:spPr>
+          <a:xfrm>
+            <a:off x="8046720" y="1417320"/>
+            <a:ext cx="3657600" cy="457200"/>
+          </a:xfrm>
+          <a:prstGeom prst="rect">
+            <a:avLst/>
+          </a:prstGeom>
+          <a:noFill/>
+        </p:spPr>
+        <p:txBody>
+          <a:bodyPr wrap="square" anchor="t" lIns="45720" rIns="45720" tIns="18288" bIns="18288">
+            <a:spAutoFit/>
+          </a:bodyPr>
+          <a:lstStyle/>
+          <a:p>
+            <a:pPr algn="ctr"/>
+            <a:r>
+              <a:rPr sz="2200" b="1" i="0">
+                <a:solidFill>
+                  <a:srgbClr val="2CA02C"/>
+                </a:solidFill>
+                <a:latin typeface="Calibri"/>
+              </a:rPr>
+              <a:t>3.  Outcome</a:t>
+            </a:r>
+          </a:p>
+        </p:txBody>
+      </p:sp>
+      <p:sp>
+        <p:nvSpPr>
+          <p:cNvPr id="12" name="TextBox 11"/>
+          <p:cNvSpPr txBox="1"/>
+          <p:nvPr/>
+        </p:nvSpPr>
+        <p:spPr>
+          <a:xfrm>
+            <a:off x="8229600" y="2011680"/>
+            <a:ext cx="3291840" cy="4114800"/>
+          </a:xfrm>
+          <a:prstGeom prst="rect">
+            <a:avLst/>
+          </a:prstGeom>
+          <a:noFill/>
+        </p:spPr>
+        <p:txBody>
+          <a:bodyPr wrap="square" anchor="t" lIns="45720" rIns="45720" tIns="18288" bIns="18288">
+            <a:spAutoFit/>
+          </a:bodyPr>
+          <a:lstStyle/>
+          <a:p>
+            <a:pPr algn="l"/>
+            <a:r>
+              <a:rPr sz="1500" b="0" i="0">
                 <a:solidFill>
                   <a:srgbClr val="1A1A1A"/>
                 </a:solidFill>
                 <a:latin typeface="Calibri"/>
               </a:rPr>
-              <a:t>•  Same trained policy beats the noisy-CSI optimiser across all of Nt ∈ {2, 4, 8}, all κ in the test range, and the secrecy outage metric.</a:t>
-            </a:r>
-          </a:p>
-          <a:p>
-            <a:pPr algn="l">
-              <a:spcAft>
-                <a:spcPts val="800"/>
-              </a:spcAft>
-            </a:pPr>
-            <a:r>
-              <a:rPr sz="1800">
-                <a:solidFill>
-                  <a:srgbClr val="1A1A1A"/>
-                </a:solidFill>
-                <a:latin typeface="Calibri"/>
-              </a:rPr>
-              <a:t>•  Per-channel oracle comparison: the DQN's Rs gap to the unbeatable upper bound is the smallest of the three schemes.</a:t>
-            </a:r>
-          </a:p>
-          <a:p>
-            <a:pPr algn="l">
-              <a:spcAft>
-                <a:spcPts val="800"/>
-              </a:spcAft>
-            </a:pPr>
-            <a:r>
-              <a:rPr sz="1800">
-                <a:solidFill>
-                  <a:srgbClr val="1A1A1A"/>
-                </a:solidFill>
-                <a:latin typeface="Calibri"/>
-              </a:rPr>
-              <a:t>•  Future work: correlated / path-loss channels, multi-step block fading (γ &gt; 0), adaptive Eve (zero-sum game → multi-agent RL), normalised-gain features for extreme β.</a:t>
-            </a:r>
-          </a:p>
-        </p:txBody>
-      </p:sp>
-      <p:sp>
-        <p:nvSpPr>
-          <p:cNvPr id="5" name="TextBox 4"/>
-          <p:cNvSpPr txBox="1"/>
-          <p:nvPr/>
-        </p:nvSpPr>
-        <p:spPr>
-          <a:xfrm>
-            <a:off x="10058400" y="6446520"/>
+              <a:t>ONE trained policy beats the noisy-CSI optimiser at every Nt and every κ in the test set.
+Lower outage at the same target rate.
+≈ 38 s training cost.  Single-pass inference.</a:t>
+            </a:r>
+          </a:p>
+        </p:txBody>
+      </p:sp>
+      <p:sp>
+        <p:nvSpPr>
+          <p:cNvPr id="13" name="TextBox 12"/>
+          <p:cNvSpPr txBox="1"/>
+          <p:nvPr/>
+        </p:nvSpPr>
+        <p:spPr>
+          <a:xfrm>
+            <a:off x="10058400" y="6492240"/>
             <a:ext cx="2011680" cy="274320"/>
           </a:xfrm>
           <a:prstGeom prst="rect">
@@ -4055,7 +4988,7 @@
           <a:noFill/>
         </p:spPr>
         <p:txBody>
-          <a:bodyPr wrap="square" lIns="45720" rIns="45720" tIns="18288" bIns="18288">
+          <a:bodyPr wrap="square" anchor="t" lIns="45720" rIns="45720" tIns="18288" bIns="18288">
             <a:spAutoFit/>
           </a:bodyPr>
           <a:lstStyle/>
@@ -4142,7 +5075,7 @@
         </p:nvSpPr>
         <p:spPr>
           <a:xfrm>
-            <a:off x="914400" y="2377440"/>
+            <a:off x="914400" y="2286000"/>
             <a:ext cx="10332720" cy="1280160"/>
           </a:xfrm>
           <a:prstGeom prst="rect">
@@ -4151,14 +5084,14 @@
           <a:noFill/>
         </p:spPr>
         <p:txBody>
-          <a:bodyPr wrap="square" lIns="45720" rIns="45720" tIns="18288" bIns="18288">
+          <a:bodyPr wrap="square" anchor="t" lIns="45720" rIns="45720" tIns="18288" bIns="18288">
             <a:spAutoFit/>
           </a:bodyPr>
           <a:lstStyle/>
           <a:p>
             <a:pPr algn="ctr"/>
             <a:r>
-              <a:rPr sz="5400" b="1" i="0">
+              <a:rPr sz="5600" b="1" i="0">
                 <a:solidFill>
                   <a:srgbClr val="FFFFFF"/>
                 </a:solidFill>
@@ -4186,14 +5119,14 @@
           <a:noFill/>
         </p:spPr>
         <p:txBody>
-          <a:bodyPr wrap="square" lIns="45720" rIns="45720" tIns="18288" bIns="18288">
+          <a:bodyPr wrap="square" anchor="t" lIns="45720" rIns="45720" tIns="18288" bIns="18288">
             <a:spAutoFit/>
           </a:bodyPr>
           <a:lstStyle/>
           <a:p>
             <a:pPr algn="ctr"/>
             <a:r>
-              <a:rPr sz="1800" b="0" i="1">
+              <a:rPr sz="2000" b="0" i="1">
                 <a:solidFill>
                   <a:srgbClr val="E5C107"/>
                 </a:solidFill>
@@ -4212,7 +5145,7 @@
         </p:nvSpPr>
         <p:spPr>
           <a:xfrm>
-            <a:off x="914400" y="4480560"/>
+            <a:off x="914400" y="4526280"/>
             <a:ext cx="10332720" cy="457200"/>
           </a:xfrm>
           <a:prstGeom prst="rect">
@@ -4221,20 +5154,20 @@
           <a:noFill/>
         </p:spPr>
         <p:txBody>
-          <a:bodyPr wrap="square" lIns="45720" rIns="45720" tIns="18288" bIns="18288">
+          <a:bodyPr wrap="square" anchor="t" lIns="45720" rIns="45720" tIns="18288" bIns="18288">
             <a:spAutoFit/>
           </a:bodyPr>
           <a:lstStyle/>
           <a:p>
             <a:pPr algn="ctr"/>
             <a:r>
-              <a:rPr sz="1400" b="0" i="0">
+              <a:rPr sz="1500" b="0" i="0">
                 <a:solidFill>
                   <a:srgbClr val="E0E5EC"/>
                 </a:solidFill>
                 <a:latin typeface="Calibri"/>
               </a:rPr>
-              <a:t>Muhammad Ismail · Abubakar Butt · Usman Ali</a:t>
+              <a:t>Muhammad Ismail   ·   Abubakar Butt   ·   Usman Ali</a:t>
             </a:r>
           </a:p>
         </p:txBody>
@@ -4324,24 +5257,13 @@
           <a:lstStyle/>
           <a:p>
             <a:r>
-              <a:rPr sz="2800" b="1">
+              <a:rPr sz="3000" b="1">
                 <a:solidFill>
                   <a:srgbClr val="FFFFFF"/>
                 </a:solidFill>
                 <a:latin typeface="Calibri"/>
               </a:rPr>
-              <a:t>The problem we are solving</a:t>
-            </a:r>
-          </a:p>
-          <a:p>
-            <a:r>
-              <a:rPr sz="1300" i="1">
-                <a:solidFill>
-                  <a:srgbClr val="E0E5EC"/>
-                </a:solidFill>
-                <a:latin typeface="Calibri"/>
-              </a:rPr>
-              <a:t>Why we cannot just plug a noisy ĥE into the textbook optimiser</a:t>
+              <a:t>The problem we're solving</a:t>
             </a:r>
           </a:p>
         </p:txBody>
@@ -4354,8 +5276,43 @@
         </p:nvSpPr>
         <p:spPr>
           <a:xfrm>
-            <a:off x="548640" y="1188720"/>
-            <a:ext cx="11247120" cy="5029200"/>
+            <a:off x="548640" y="1097280"/>
+            <a:ext cx="11247120" cy="548640"/>
+          </a:xfrm>
+          <a:prstGeom prst="rect">
+            <a:avLst/>
+          </a:prstGeom>
+          <a:noFill/>
+        </p:spPr>
+        <p:txBody>
+          <a:bodyPr wrap="square" anchor="t" lIns="45720" rIns="45720" tIns="18288" bIns="18288">
+            <a:spAutoFit/>
+          </a:bodyPr>
+          <a:lstStyle/>
+          <a:p>
+            <a:pPr algn="l"/>
+            <a:r>
+              <a:rPr sz="2200" b="0" i="1">
+                <a:solidFill>
+                  <a:srgbClr val="1F4E79"/>
+                </a:solidFill>
+                <a:latin typeface="Calibri"/>
+              </a:rPr>
+              <a:t>Wireless is broadcast.  Anything Alice transmits, Eve picks up too.</a:t>
+            </a:r>
+          </a:p>
+        </p:txBody>
+      </p:sp>
+      <p:sp>
+        <p:nvSpPr>
+          <p:cNvPr id="5" name="TextBox 4"/>
+          <p:cNvSpPr txBox="1"/>
+          <p:nvPr/>
+        </p:nvSpPr>
+        <p:spPr>
+          <a:xfrm>
+            <a:off x="548640" y="1828800"/>
+            <a:ext cx="11247120" cy="4572000"/>
           </a:xfrm>
           <a:prstGeom prst="rect">
             <a:avLst/>
@@ -4369,127 +5326,110 @@
           <a:lstStyle/>
           <a:p>
             <a:pPr algn="l">
+              <a:lnSpc>
+                <a:spcPct val="115000"/>
+              </a:lnSpc>
               <a:spcAft>
-                <a:spcPts val="800"/>
+                <a:spcPts val="1200"/>
               </a:spcAft>
             </a:pPr>
             <a:r>
-              <a:rPr sz="1800">
+              <a:rPr sz="2000">
                 <a:solidFill>
                   <a:srgbClr val="1A1A1A"/>
                 </a:solidFill>
                 <a:latin typeface="Calibri"/>
               </a:rPr>
-              <a:t>•  Wireless is a broadcast medium. Anything Alice transmits, a passive Eve in radio range receives.</a:t>
+              <a:t>•  Standard fix: artificial noise (AN) sprayed into Bob's null space  —  Bob hears clean signal, Eve hears signal + jam.</a:t>
             </a:r>
           </a:p>
           <a:p>
             <a:pPr algn="l">
+              <a:lnSpc>
+                <a:spcPct val="115000"/>
+              </a:lnSpc>
               <a:spcAft>
-                <a:spcPts val="800"/>
+                <a:spcPts val="1200"/>
               </a:spcAft>
             </a:pPr>
             <a:r>
-              <a:rPr sz="1800">
+              <a:rPr sz="2000">
                 <a:solidFill>
                   <a:srgbClr val="1A1A1A"/>
                 </a:solidFill>
                 <a:latin typeface="Calibri"/>
               </a:rPr>
-              <a:t>•  Goel &amp; Negi (2008): inject artificial noise (AN) in the null space of Bob's channel — Bob hears clean signal, Eve hears signal + jam.</a:t>
+              <a:t>•  The knob: how much power to put on the message vs the jamming.</a:t>
             </a:r>
           </a:p>
           <a:p>
             <a:pPr algn="l">
+              <a:lnSpc>
+                <a:spcPct val="115000"/>
+              </a:lnSpc>
               <a:spcAft>
-                <a:spcPts val="800"/>
+                <a:spcPts val="1200"/>
               </a:spcAft>
             </a:pPr>
             <a:r>
-              <a:rPr sz="1800">
+              <a:rPr sz="2000">
                 <a:solidFill>
                   <a:srgbClr val="1A1A1A"/>
                 </a:solidFill>
                 <a:latin typeface="Calibri"/>
               </a:rPr>
-              <a:t>•  The knob: ρ ∈ (0, 1) — fraction of total power on the message; (1 − ρ) goes into AN.</a:t>
+              <a:t>•  The classic answer (Goel &amp; Negi, 2008): split it 50/50.  Safe but leaves performance on the table.</a:t>
             </a:r>
           </a:p>
           <a:p>
             <a:pPr algn="l">
+              <a:lnSpc>
+                <a:spcPct val="115000"/>
+              </a:lnSpc>
               <a:spcAft>
-                <a:spcPts val="800"/>
+                <a:spcPts val="1200"/>
               </a:spcAft>
             </a:pPr>
             <a:r>
-              <a:rPr sz="1800">
+              <a:rPr sz="2000">
                 <a:solidFill>
                   <a:srgbClr val="1A1A1A"/>
                 </a:solidFill>
                 <a:latin typeface="Calibri"/>
               </a:rPr>
-              <a:t>•  Goel &amp; Negi fixes ρ = 0.5. Sub-optimal in general, but never catastrophically wrong.</a:t>
+              <a:t>•  The textbook upgrade: optimise the split per channel.  Works great  —  IF Alice has perfect information about Eve.  She usually doesn't.</a:t>
             </a:r>
           </a:p>
           <a:p>
             <a:pPr algn="l">
+              <a:lnSpc>
+                <a:spcPct val="115000"/>
+              </a:lnSpc>
               <a:spcAft>
-                <a:spcPts val="800"/>
+                <a:spcPts val="1200"/>
               </a:spcAft>
             </a:pPr>
             <a:r>
-              <a:rPr sz="1800">
+              <a:rPr sz="2000">
                 <a:solidFill>
                   <a:srgbClr val="1A1A1A"/>
                 </a:solidFill>
                 <a:latin typeface="Calibri"/>
               </a:rPr>
-              <a:t>•  Modern follow-ups optimise ρ — but they assume Alice has perfect knowledge of Eve's channel hE. She does not.</a:t>
-            </a:r>
-          </a:p>
-          <a:p>
-            <a:pPr algn="l">
-              <a:spcAft>
-                <a:spcPts val="800"/>
-              </a:spcAft>
-            </a:pPr>
-            <a:r>
-              <a:rPr sz="1800">
-                <a:solidFill>
-                  <a:srgbClr val="1A1A1A"/>
-                </a:solidFill>
-                <a:latin typeface="Calibri"/>
-              </a:rPr>
-              <a:t>•  If you plug a NOISY ĥE into the textbook optimiser, you get a confidently-wrong ρ. We will see this scheme drop BELOW the do-nothing baseline.</a:t>
-            </a:r>
-          </a:p>
-          <a:p>
-            <a:pPr algn="l">
-              <a:spcAft>
-                <a:spcPts val="800"/>
-              </a:spcAft>
-            </a:pPr>
-            <a:r>
-              <a:rPr sz="1800">
-                <a:solidFill>
-                  <a:srgbClr val="1A1A1A"/>
-                </a:solidFill>
-                <a:latin typeface="Calibri"/>
-              </a:rPr>
-              <a:t>•  Question: can a single deployment-ready policy do better than both — without being retuned for each (SNR, κ)?</a:t>
-            </a:r>
-          </a:p>
-        </p:txBody>
-      </p:sp>
-      <p:sp>
-        <p:nvSpPr>
-          <p:cNvPr id="5" name="TextBox 4"/>
-          <p:cNvSpPr txBox="1"/>
-          <p:nvPr/>
-        </p:nvSpPr>
-        <p:spPr>
-          <a:xfrm>
-            <a:off x="10058400" y="6446520"/>
+              <a:t>•  Plug noisy intel into the textbook optimiser  →  a confidently-wrong answer that performs WORSE than doing nothing.  We'll see this on the next plot.</a:t>
+            </a:r>
+          </a:p>
+        </p:txBody>
+      </p:sp>
+      <p:sp>
+        <p:nvSpPr>
+          <p:cNvPr id="6" name="TextBox 5"/>
+          <p:cNvSpPr txBox="1"/>
+          <p:nvPr/>
+        </p:nvSpPr>
+        <p:spPr>
+          <a:xfrm>
+            <a:off x="10058400" y="6492240"/>
             <a:ext cx="2011680" cy="274320"/>
           </a:xfrm>
           <a:prstGeom prst="rect">
@@ -4498,7 +5438,7 @@
           <a:noFill/>
         </p:spPr>
         <p:txBody>
-          <a:bodyPr wrap="square" lIns="45720" rIns="45720" tIns="18288" bIns="18288">
+          <a:bodyPr wrap="square" anchor="t" lIns="45720" rIns="45720" tIns="18288" bIns="18288">
             <a:spAutoFit/>
           </a:bodyPr>
           <a:lstStyle/>
@@ -4601,171 +5541,406 @@
           <a:lstStyle/>
           <a:p>
             <a:r>
-              <a:rPr sz="2800" b="1">
+              <a:rPr sz="3000" b="1">
                 <a:solidFill>
                   <a:srgbClr val="FFFFFF"/>
                 </a:solidFill>
                 <a:latin typeface="Calibri"/>
               </a:rPr>
-              <a:t>System model — MISO wiretap + null-space AN</a:t>
-            </a:r>
-          </a:p>
-        </p:txBody>
-      </p:sp>
-      <p:sp>
-        <p:nvSpPr>
-          <p:cNvPr id="4" name="TextBox 3"/>
-          <p:cNvSpPr txBox="1"/>
-          <p:nvPr/>
-        </p:nvSpPr>
-        <p:spPr>
-          <a:xfrm>
-            <a:off x="548640" y="1188720"/>
-            <a:ext cx="6400800" cy="5486400"/>
-          </a:xfrm>
-          <a:prstGeom prst="rect">
-            <a:avLst/>
-          </a:prstGeom>
-          <a:noFill/>
-        </p:spPr>
-        <p:txBody>
-          <a:bodyPr wrap="square">
-            <a:spAutoFit/>
-          </a:bodyPr>
-          <a:lstStyle/>
-          <a:p>
-            <a:pPr algn="l">
-              <a:spcAft>
-                <a:spcPts val="800"/>
-              </a:spcAft>
-            </a:pPr>
-            <a:r>
-              <a:rPr sz="1700">
+              <a:t>The setting  —  MISO wiretap channel</a:t>
+            </a:r>
+          </a:p>
+        </p:txBody>
+      </p:sp>
+      <p:sp>
+        <p:nvSpPr>
+          <p:cNvPr id="4" name="Rounded Rectangle 3"/>
+          <p:cNvSpPr/>
+          <p:nvPr/>
+        </p:nvSpPr>
+        <p:spPr>
+          <a:xfrm>
+            <a:off x="548640" y="1280160"/>
+            <a:ext cx="3657600" cy="2011680"/>
+          </a:xfrm>
+          <a:prstGeom prst="roundRect">
+            <a:avLst/>
+          </a:prstGeom>
+          <a:solidFill>
+            <a:srgbClr val="E5ECF3"/>
+          </a:solidFill>
+          <a:ln w="15875">
+            <a:solidFill>
+              <a:srgbClr val="1F4E79"/>
+            </a:solidFill>
+          </a:ln>
+          <a:effectLst/>
+        </p:spPr>
+        <p:style>
+          <a:lnRef idx="1">
+            <a:schemeClr val="accent1"/>
+          </a:lnRef>
+          <a:fillRef idx="3">
+            <a:schemeClr val="accent1"/>
+          </a:fillRef>
+          <a:effectRef idx="2">
+            <a:schemeClr val="accent1"/>
+          </a:effectRef>
+          <a:fontRef idx="minor">
+            <a:schemeClr val="lt1"/>
+          </a:fontRef>
+        </p:style>
+        <p:txBody>
+          <a:bodyPr rtlCol="0" anchor="ctr"/>
+          <a:lstStyle/>
+          <a:p>
+            <a:pPr algn="ctr"/>
+          </a:p>
+        </p:txBody>
+      </p:sp>
+      <p:sp>
+        <p:nvSpPr>
+          <p:cNvPr id="5" name="TextBox 4"/>
+          <p:cNvSpPr txBox="1"/>
+          <p:nvPr/>
+        </p:nvSpPr>
+        <p:spPr>
+          <a:xfrm>
+            <a:off x="548640" y="1417320"/>
+            <a:ext cx="3657600" cy="457200"/>
+          </a:xfrm>
+          <a:prstGeom prst="rect">
+            <a:avLst/>
+          </a:prstGeom>
+          <a:noFill/>
+        </p:spPr>
+        <p:txBody>
+          <a:bodyPr wrap="square" anchor="t" lIns="45720" rIns="45720" tIns="18288" bIns="18288">
+            <a:spAutoFit/>
+          </a:bodyPr>
+          <a:lstStyle/>
+          <a:p>
+            <a:pPr algn="ctr"/>
+            <a:r>
+              <a:rPr sz="2400" b="1" i="0">
+                <a:solidFill>
+                  <a:srgbClr val="1F4E79"/>
+                </a:solidFill>
+                <a:latin typeface="Calibri"/>
+              </a:rPr>
+              <a:t>Alice</a:t>
+            </a:r>
+          </a:p>
+        </p:txBody>
+      </p:sp>
+      <p:sp>
+        <p:nvSpPr>
+          <p:cNvPr id="6" name="TextBox 5"/>
+          <p:cNvSpPr txBox="1"/>
+          <p:nvPr/>
+        </p:nvSpPr>
+        <p:spPr>
+          <a:xfrm>
+            <a:off x="640080" y="1920240"/>
+            <a:ext cx="3474720" cy="1371600"/>
+          </a:xfrm>
+          <a:prstGeom prst="rect">
+            <a:avLst/>
+          </a:prstGeom>
+          <a:noFill/>
+        </p:spPr>
+        <p:txBody>
+          <a:bodyPr wrap="square" anchor="t" lIns="45720" rIns="45720" tIns="18288" bIns="18288">
+            <a:spAutoFit/>
+          </a:bodyPr>
+          <a:lstStyle/>
+          <a:p>
+            <a:pPr algn="ctr"/>
+            <a:r>
+              <a:rPr sz="1400" b="0" i="0">
                 <a:solidFill>
                   <a:srgbClr val="1A1A1A"/>
                 </a:solidFill>
                 <a:latin typeface="Calibri"/>
               </a:rPr>
-              <a:t>•  Alice: Nt transmit antennas. Bob, Eve: 1 antenna each.</a:t>
-            </a:r>
-          </a:p>
-          <a:p>
-            <a:pPr algn="l">
-              <a:spcAft>
-                <a:spcPts val="800"/>
-              </a:spcAft>
-            </a:pPr>
-            <a:r>
-              <a:rPr sz="1700">
+              <a:t>Multi-antenna transmitter  (Nt antennas).
+Beams data toward Bob, sprays AN elsewhere.</a:t>
+            </a:r>
+          </a:p>
+        </p:txBody>
+      </p:sp>
+      <p:sp>
+        <p:nvSpPr>
+          <p:cNvPr id="7" name="Rounded Rectangle 6"/>
+          <p:cNvSpPr/>
+          <p:nvPr/>
+        </p:nvSpPr>
+        <p:spPr>
+          <a:xfrm>
+            <a:off x="4572000" y="1280160"/>
+            <a:ext cx="3657600" cy="2011680"/>
+          </a:xfrm>
+          <a:prstGeom prst="roundRect">
+            <a:avLst/>
+          </a:prstGeom>
+          <a:solidFill>
+            <a:srgbClr val="E0F1E0"/>
+          </a:solidFill>
+          <a:ln w="15875">
+            <a:solidFill>
+              <a:srgbClr val="2CA02C"/>
+            </a:solidFill>
+          </a:ln>
+          <a:effectLst/>
+        </p:spPr>
+        <p:style>
+          <a:lnRef idx="1">
+            <a:schemeClr val="accent1"/>
+          </a:lnRef>
+          <a:fillRef idx="3">
+            <a:schemeClr val="accent1"/>
+          </a:fillRef>
+          <a:effectRef idx="2">
+            <a:schemeClr val="accent1"/>
+          </a:effectRef>
+          <a:fontRef idx="minor">
+            <a:schemeClr val="lt1"/>
+          </a:fontRef>
+        </p:style>
+        <p:txBody>
+          <a:bodyPr rtlCol="0" anchor="ctr"/>
+          <a:lstStyle/>
+          <a:p>
+            <a:pPr algn="ctr"/>
+          </a:p>
+        </p:txBody>
+      </p:sp>
+      <p:sp>
+        <p:nvSpPr>
+          <p:cNvPr id="8" name="TextBox 7"/>
+          <p:cNvSpPr txBox="1"/>
+          <p:nvPr/>
+        </p:nvSpPr>
+        <p:spPr>
+          <a:xfrm>
+            <a:off x="4572000" y="1417320"/>
+            <a:ext cx="3657600" cy="457200"/>
+          </a:xfrm>
+          <a:prstGeom prst="rect">
+            <a:avLst/>
+          </a:prstGeom>
+          <a:noFill/>
+        </p:spPr>
+        <p:txBody>
+          <a:bodyPr wrap="square" anchor="t" lIns="45720" rIns="45720" tIns="18288" bIns="18288">
+            <a:spAutoFit/>
+          </a:bodyPr>
+          <a:lstStyle/>
+          <a:p>
+            <a:pPr algn="ctr"/>
+            <a:r>
+              <a:rPr sz="2400" b="1" i="0">
+                <a:solidFill>
+                  <a:srgbClr val="2CA02C"/>
+                </a:solidFill>
+                <a:latin typeface="Calibri"/>
+              </a:rPr>
+              <a:t>Bob</a:t>
+            </a:r>
+          </a:p>
+        </p:txBody>
+      </p:sp>
+      <p:sp>
+        <p:nvSpPr>
+          <p:cNvPr id="9" name="TextBox 8"/>
+          <p:cNvSpPr txBox="1"/>
+          <p:nvPr/>
+        </p:nvSpPr>
+        <p:spPr>
+          <a:xfrm>
+            <a:off x="4663440" y="1920240"/>
+            <a:ext cx="3474720" cy="1371600"/>
+          </a:xfrm>
+          <a:prstGeom prst="rect">
+            <a:avLst/>
+          </a:prstGeom>
+          <a:noFill/>
+        </p:spPr>
+        <p:txBody>
+          <a:bodyPr wrap="square" anchor="t" lIns="45720" rIns="45720" tIns="18288" bIns="18288">
+            <a:spAutoFit/>
+          </a:bodyPr>
+          <a:lstStyle/>
+          <a:p>
+            <a:pPr algn="ctr"/>
+            <a:r>
+              <a:rPr sz="1400" b="0" i="0">
                 <a:solidFill>
                   <a:srgbClr val="1A1A1A"/>
                 </a:solidFill>
                 <a:latin typeface="Calibri"/>
               </a:rPr>
-              <a:t>•  Channels: hB, hE ~ CN(0, I). Quasi-static per block.</a:t>
-            </a:r>
-          </a:p>
-          <a:p>
-            <a:pPr algn="l">
-              <a:spcAft>
-                <a:spcPts val="800"/>
-              </a:spcAft>
-            </a:pPr>
-            <a:r>
-              <a:rPr sz="1700">
+              <a:t>Legitimate receiver, single antenna.
+Hears the signal cleanly  —  AN cancels at his location.</a:t>
+            </a:r>
+          </a:p>
+        </p:txBody>
+      </p:sp>
+      <p:sp>
+        <p:nvSpPr>
+          <p:cNvPr id="10" name="Rounded Rectangle 9"/>
+          <p:cNvSpPr/>
+          <p:nvPr/>
+        </p:nvSpPr>
+        <p:spPr>
+          <a:xfrm>
+            <a:off x="8595360" y="1280160"/>
+            <a:ext cx="3108960" cy="2011680"/>
+          </a:xfrm>
+          <a:prstGeom prst="roundRect">
+            <a:avLst/>
+          </a:prstGeom>
+          <a:solidFill>
+            <a:srgbClr val="FAE7E6"/>
+          </a:solidFill>
+          <a:ln w="15875">
+            <a:solidFill>
+              <a:srgbClr val="C0504D"/>
+            </a:solidFill>
+          </a:ln>
+          <a:effectLst/>
+        </p:spPr>
+        <p:style>
+          <a:lnRef idx="1">
+            <a:schemeClr val="accent1"/>
+          </a:lnRef>
+          <a:fillRef idx="3">
+            <a:schemeClr val="accent1"/>
+          </a:fillRef>
+          <a:effectRef idx="2">
+            <a:schemeClr val="accent1"/>
+          </a:effectRef>
+          <a:fontRef idx="minor">
+            <a:schemeClr val="lt1"/>
+          </a:fontRef>
+        </p:style>
+        <p:txBody>
+          <a:bodyPr rtlCol="0" anchor="ctr"/>
+          <a:lstStyle/>
+          <a:p>
+            <a:pPr algn="ctr"/>
+          </a:p>
+        </p:txBody>
+      </p:sp>
+      <p:sp>
+        <p:nvSpPr>
+          <p:cNvPr id="11" name="TextBox 10"/>
+          <p:cNvSpPr txBox="1"/>
+          <p:nvPr/>
+        </p:nvSpPr>
+        <p:spPr>
+          <a:xfrm>
+            <a:off x="8595360" y="1417320"/>
+            <a:ext cx="3108960" cy="457200"/>
+          </a:xfrm>
+          <a:prstGeom prst="rect">
+            <a:avLst/>
+          </a:prstGeom>
+          <a:noFill/>
+        </p:spPr>
+        <p:txBody>
+          <a:bodyPr wrap="square" anchor="t" lIns="45720" rIns="45720" tIns="18288" bIns="18288">
+            <a:spAutoFit/>
+          </a:bodyPr>
+          <a:lstStyle/>
+          <a:p>
+            <a:pPr algn="ctr"/>
+            <a:r>
+              <a:rPr sz="2400" b="1" i="0">
+                <a:solidFill>
+                  <a:srgbClr val="C0504D"/>
+                </a:solidFill>
+                <a:latin typeface="Calibri"/>
+              </a:rPr>
+              <a:t>Eve</a:t>
+            </a:r>
+          </a:p>
+        </p:txBody>
+      </p:sp>
+      <p:sp>
+        <p:nvSpPr>
+          <p:cNvPr id="12" name="TextBox 11"/>
+          <p:cNvSpPr txBox="1"/>
+          <p:nvPr/>
+        </p:nvSpPr>
+        <p:spPr>
+          <a:xfrm>
+            <a:off x="8686800" y="1920240"/>
+            <a:ext cx="2926080" cy="1371600"/>
+          </a:xfrm>
+          <a:prstGeom prst="rect">
+            <a:avLst/>
+          </a:prstGeom>
+          <a:noFill/>
+        </p:spPr>
+        <p:txBody>
+          <a:bodyPr wrap="square" anchor="t" lIns="45720" rIns="45720" tIns="18288" bIns="18288">
+            <a:spAutoFit/>
+          </a:bodyPr>
+          <a:lstStyle/>
+          <a:p>
+            <a:pPr algn="ctr"/>
+            <a:r>
+              <a:rPr sz="1400" b="0" i="0">
                 <a:solidFill>
                   <a:srgbClr val="1A1A1A"/>
                 </a:solidFill>
                 <a:latin typeface="Calibri"/>
               </a:rPr>
-              <a:t>•  Beam toward Bob via MRT:  w = hB / ‖hB‖.</a:t>
-            </a:r>
-          </a:p>
-          <a:p>
-            <a:pPr algn="l">
-              <a:spcAft>
-                <a:spcPts val="800"/>
-              </a:spcAft>
-            </a:pPr>
-            <a:r>
-              <a:rPr sz="1700">
+              <a:t>Passive eavesdropper.
+Hears signal-plus-AN.  Trying to decode anyway.</a:t>
+            </a:r>
+          </a:p>
+        </p:txBody>
+      </p:sp>
+      <p:sp>
+        <p:nvSpPr>
+          <p:cNvPr id="13" name="TextBox 12"/>
+          <p:cNvSpPr txBox="1"/>
+          <p:nvPr/>
+        </p:nvSpPr>
+        <p:spPr>
+          <a:xfrm>
+            <a:off x="548640" y="3657600"/>
+            <a:ext cx="11247120" cy="457200"/>
+          </a:xfrm>
+          <a:prstGeom prst="rect">
+            <a:avLst/>
+          </a:prstGeom>
+          <a:noFill/>
+        </p:spPr>
+        <p:txBody>
+          <a:bodyPr wrap="square" anchor="t" lIns="45720" rIns="45720" tIns="18288" bIns="18288">
+            <a:spAutoFit/>
+          </a:bodyPr>
+          <a:lstStyle/>
+          <a:p>
+            <a:pPr algn="l"/>
+            <a:r>
+              <a:rPr sz="1800" b="0" i="0">
                 <a:solidFill>
                   <a:srgbClr val="1A1A1A"/>
                 </a:solidFill>
                 <a:latin typeface="Calibri"/>
               </a:rPr>
-              <a:t>•  AN lives in null(hB) via projector P⊥, so Bob hears 0 AN.</a:t>
-            </a:r>
-          </a:p>
-          <a:p>
-            <a:pPr algn="l">
-              <a:spcAft>
-                <a:spcPts val="800"/>
-              </a:spcAft>
-            </a:pPr>
-            <a:r>
-              <a:rPr sz="1700">
-                <a:solidFill>
-                  <a:srgbClr val="1A1A1A"/>
-                </a:solidFill>
-                <a:latin typeface="Calibri"/>
-              </a:rPr>
-              <a:t>•  x = √(ρP)·w·s + √((1−ρ)P)·z</a:t>
-            </a:r>
-          </a:p>
-          <a:p>
-            <a:pPr algn="l">
-              <a:spcAft>
-                <a:spcPts val="800"/>
-              </a:spcAft>
-            </a:pPr>
-            <a:r>
-              <a:rPr sz="1700">
-                <a:solidFill>
-                  <a:srgbClr val="1A1A1A"/>
-                </a:solidFill>
-                <a:latin typeface="Calibri"/>
-              </a:rPr>
-              <a:t>•  Imperfect CSI on Eve:  ĥE = √κ·hE + √(1−κ)·e,  e ~ CN(0, I).</a:t>
-            </a:r>
-          </a:p>
-          <a:p>
-            <a:pPr algn="l">
-              <a:spcAft>
-                <a:spcPts val="800"/>
-              </a:spcAft>
-            </a:pPr>
-            <a:r>
-              <a:rPr sz="1700">
-                <a:solidFill>
-                  <a:srgbClr val="1A1A1A"/>
-                </a:solidFill>
-                <a:latin typeface="Calibri"/>
-              </a:rPr>
-              <a:t>•  κ = 1 → perfect intel; κ = 0 → pure guessing.</a:t>
-            </a:r>
-          </a:p>
-          <a:p>
-            <a:pPr algn="l">
-              <a:spcAft>
-                <a:spcPts val="800"/>
-              </a:spcAft>
-            </a:pPr>
-            <a:r>
-              <a:rPr sz="1700">
-                <a:solidFill>
-                  <a:srgbClr val="1A1A1A"/>
-                </a:solidFill>
-                <a:latin typeface="Calibri"/>
-              </a:rPr>
-              <a:t>•  Achieved secrecy rate Rs is computed against the TRUE hE, not ĥE.</a:t>
+              <a:t>Alice's intel on Eve is noisy.  We model it as:</a:t>
             </a:r>
           </a:p>
         </p:txBody>
       </p:sp>
       <p:pic>
         <p:nvPicPr>
-          <p:cNvPr id="5" name="Picture 4" descr="01_single_channel_sweep.png"/>
+          <p:cNvPr id="14" name="Picture 13" descr="eq04_csi.png"/>
           <p:cNvPicPr>
             <a:picLocks noChangeAspect="1"/>
           </p:cNvPicPr>
@@ -4779,8 +5954,8 @@
         </p:blipFill>
         <p:spPr>
           <a:xfrm>
-            <a:off x="7132320" y="1371600"/>
-            <a:ext cx="4754880" cy="2852928"/>
+            <a:off x="2286000" y="4206240"/>
+            <a:ext cx="7680960" cy="759043"/>
           </a:xfrm>
           <a:prstGeom prst="rect">
             <a:avLst/>
@@ -4789,48 +5964,48 @@
       </p:pic>
       <p:sp>
         <p:nvSpPr>
-          <p:cNvPr id="6" name="TextBox 5"/>
-          <p:cNvSpPr txBox="1"/>
-          <p:nvPr/>
-        </p:nvSpPr>
-        <p:spPr>
-          <a:xfrm>
-            <a:off x="7132320" y="5989320"/>
-            <a:ext cx="4754880" cy="365760"/>
-          </a:xfrm>
-          <a:prstGeom prst="rect">
-            <a:avLst/>
-          </a:prstGeom>
-          <a:noFill/>
-        </p:spPr>
-        <p:txBody>
-          <a:bodyPr wrap="square" lIns="45720" rIns="45720" tIns="18288" bIns="18288">
+          <p:cNvPr id="15" name="TextBox 14"/>
+          <p:cNvSpPr txBox="1"/>
+          <p:nvPr/>
+        </p:nvSpPr>
+        <p:spPr>
+          <a:xfrm>
+            <a:off x="548640" y="5852160"/>
+            <a:ext cx="11247120" cy="365760"/>
+          </a:xfrm>
+          <a:prstGeom prst="rect">
+            <a:avLst/>
+          </a:prstGeom>
+          <a:noFill/>
+        </p:spPr>
+        <p:txBody>
+          <a:bodyPr wrap="square" anchor="t" lIns="45720" rIns="45720" tIns="18288" bIns="18288">
             <a:spAutoFit/>
           </a:bodyPr>
           <a:lstStyle/>
           <a:p>
             <a:pPr algn="ctr"/>
             <a:r>
-              <a:rPr sz="1100" b="0" i="1">
-                <a:solidFill>
-                  <a:srgbClr val="7F7F7F"/>
-                </a:solidFill>
-                <a:latin typeface="Calibri"/>
-              </a:rPr>
-              <a:t>Rs(ρ) is concave with a clean interior peak — the optimisation problem is well-posed.</a:t>
-            </a:r>
-          </a:p>
-        </p:txBody>
-      </p:sp>
-      <p:sp>
-        <p:nvSpPr>
-          <p:cNvPr id="7" name="TextBox 6"/>
-          <p:cNvSpPr txBox="1"/>
-          <p:nvPr/>
-        </p:nvSpPr>
-        <p:spPr>
-          <a:xfrm>
-            <a:off x="10058400" y="6446520"/>
+              <a:rPr sz="1800" b="0" i="1">
+                <a:solidFill>
+                  <a:srgbClr val="1F4E79"/>
+                </a:solidFill>
+                <a:latin typeface="Calibri"/>
+              </a:rPr>
+              <a:t>κ = 1  →  perfect intel        κ = 0  →  pure guessing</a:t>
+            </a:r>
+          </a:p>
+        </p:txBody>
+      </p:sp>
+      <p:sp>
+        <p:nvSpPr>
+          <p:cNvPr id="16" name="TextBox 15"/>
+          <p:cNvSpPr txBox="1"/>
+          <p:nvPr/>
+        </p:nvSpPr>
+        <p:spPr>
+          <a:xfrm>
+            <a:off x="10058400" y="6492240"/>
             <a:ext cx="2011680" cy="274320"/>
           </a:xfrm>
           <a:prstGeom prst="rect">
@@ -4839,7 +6014,7 @@
           <a:noFill/>
         </p:spPr>
         <p:txBody>
-          <a:bodyPr wrap="square" lIns="45720" rIns="45720" tIns="18288" bIns="18288">
+          <a:bodyPr wrap="square" anchor="t" lIns="45720" rIns="45720" tIns="18288" bIns="18288">
             <a:spAutoFit/>
           </a:bodyPr>
           <a:lstStyle/>
@@ -4942,188 +6117,269 @@
           <a:lstStyle/>
           <a:p>
             <a:r>
-              <a:rPr sz="2800" b="1">
+              <a:rPr sz="3000" b="1">
                 <a:solidFill>
                   <a:srgbClr val="FFFFFF"/>
                 </a:solidFill>
                 <a:latin typeface="Calibri"/>
               </a:rPr>
-              <a:t>Baseline: Goel–Negi  +  the gap we want to close</a:t>
-            </a:r>
-          </a:p>
-        </p:txBody>
-      </p:sp>
-      <p:sp>
-        <p:nvSpPr>
-          <p:cNvPr id="4" name="TextBox 3"/>
-          <p:cNvSpPr txBox="1"/>
-          <p:nvPr/>
-        </p:nvSpPr>
-        <p:spPr>
-          <a:xfrm>
-            <a:off x="548640" y="1188720"/>
-            <a:ext cx="6035040" cy="5029200"/>
-          </a:xfrm>
-          <a:prstGeom prst="rect">
-            <a:avLst/>
-          </a:prstGeom>
-          <a:noFill/>
-        </p:spPr>
-        <p:txBody>
-          <a:bodyPr wrap="square">
-            <a:spAutoFit/>
-          </a:bodyPr>
-          <a:lstStyle/>
-          <a:p>
-            <a:pPr algn="l">
-              <a:spcAft>
-                <a:spcPts val="800"/>
-              </a:spcAft>
-            </a:pPr>
-            <a:r>
-              <a:rPr sz="1700">
+              <a:t>Two classical answers  —  and why both fall short</a:t>
+            </a:r>
+          </a:p>
+        </p:txBody>
+      </p:sp>
+      <p:sp>
+        <p:nvSpPr>
+          <p:cNvPr id="4" name="Rounded Rectangle 3"/>
+          <p:cNvSpPr/>
+          <p:nvPr/>
+        </p:nvSpPr>
+        <p:spPr>
+          <a:xfrm>
+            <a:off x="548640" y="1371600"/>
+            <a:ext cx="5486400" cy="5029200"/>
+          </a:xfrm>
+          <a:prstGeom prst="roundRect">
+            <a:avLst/>
+          </a:prstGeom>
+          <a:solidFill>
+            <a:srgbClr val="E5ECF3"/>
+          </a:solidFill>
+          <a:ln w="15875">
+            <a:solidFill>
+              <a:srgbClr val="1F4E79"/>
+            </a:solidFill>
+          </a:ln>
+          <a:effectLst/>
+        </p:spPr>
+        <p:style>
+          <a:lnRef idx="1">
+            <a:schemeClr val="accent1"/>
+          </a:lnRef>
+          <a:fillRef idx="3">
+            <a:schemeClr val="accent1"/>
+          </a:fillRef>
+          <a:effectRef idx="2">
+            <a:schemeClr val="accent1"/>
+          </a:effectRef>
+          <a:fontRef idx="minor">
+            <a:schemeClr val="lt1"/>
+          </a:fontRef>
+        </p:style>
+        <p:txBody>
+          <a:bodyPr rtlCol="0" anchor="ctr"/>
+          <a:lstStyle/>
+          <a:p>
+            <a:pPr algn="ctr"/>
+          </a:p>
+        </p:txBody>
+      </p:sp>
+      <p:sp>
+        <p:nvSpPr>
+          <p:cNvPr id="5" name="TextBox 4"/>
+          <p:cNvSpPr txBox="1"/>
+          <p:nvPr/>
+        </p:nvSpPr>
+        <p:spPr>
+          <a:xfrm>
+            <a:off x="731520" y="1554480"/>
+            <a:ext cx="5120640" cy="457200"/>
+          </a:xfrm>
+          <a:prstGeom prst="rect">
+            <a:avLst/>
+          </a:prstGeom>
+          <a:noFill/>
+        </p:spPr>
+        <p:txBody>
+          <a:bodyPr wrap="square" anchor="t" lIns="45720" rIns="45720" tIns="18288" bIns="18288">
+            <a:spAutoFit/>
+          </a:bodyPr>
+          <a:lstStyle/>
+          <a:p>
+            <a:pPr algn="l"/>
+            <a:r>
+              <a:rPr sz="2000" b="1" i="0">
+                <a:solidFill>
+                  <a:srgbClr val="1F4E79"/>
+                </a:solidFill>
+                <a:latin typeface="Calibri"/>
+              </a:rPr>
+              <a:t>Scheme 1  —  Fixed (Goel &amp; Negi, 2008)</a:t>
+            </a:r>
+          </a:p>
+        </p:txBody>
+      </p:sp>
+      <p:sp>
+        <p:nvSpPr>
+          <p:cNvPr id="6" name="TextBox 5"/>
+          <p:cNvSpPr txBox="1"/>
+          <p:nvPr/>
+        </p:nvSpPr>
+        <p:spPr>
+          <a:xfrm>
+            <a:off x="731520" y="2148840"/>
+            <a:ext cx="5120640" cy="4114800"/>
+          </a:xfrm>
+          <a:prstGeom prst="rect">
+            <a:avLst/>
+          </a:prstGeom>
+          <a:noFill/>
+        </p:spPr>
+        <p:txBody>
+          <a:bodyPr wrap="square" anchor="t" lIns="45720" rIns="45720" tIns="18288" bIns="18288">
+            <a:spAutoFit/>
+          </a:bodyPr>
+          <a:lstStyle/>
+          <a:p>
+            <a:pPr algn="l"/>
+            <a:r>
+              <a:rPr sz="1600" b="0" i="0">
                 <a:solidFill>
                   <a:srgbClr val="1A1A1A"/>
                 </a:solidFill>
                 <a:latin typeface="Calibri"/>
               </a:rPr>
-              <a:t>•  Scheme 1 — Fixed: ρ = 0.5 always. Goel &amp; Negi 2008.</a:t>
-            </a:r>
-          </a:p>
-          <a:p>
-            <a:pPr algn="l">
-              <a:spcAft>
-                <a:spcPts val="800"/>
-              </a:spcAft>
-            </a:pPr>
-            <a:r>
-              <a:rPr sz="1700">
+              <a:t>Always splits power 50/50.
+Pros
+    Cannot be misled by bad intel.
+    Always returns a sensible answer.
+Cons
+    Sub-optimal whenever the channel is asymmetric.
+    Leaves rate on the table at high SNR.</a:t>
+            </a:r>
+          </a:p>
+        </p:txBody>
+      </p:sp>
+      <p:sp>
+        <p:nvSpPr>
+          <p:cNvPr id="7" name="Rounded Rectangle 6"/>
+          <p:cNvSpPr/>
+          <p:nvPr/>
+        </p:nvSpPr>
+        <p:spPr>
+          <a:xfrm>
+            <a:off x="6126480" y="1371600"/>
+            <a:ext cx="5577840" cy="5029200"/>
+          </a:xfrm>
+          <a:prstGeom prst="roundRect">
+            <a:avLst/>
+          </a:prstGeom>
+          <a:solidFill>
+            <a:srgbClr val="FAE7E6"/>
+          </a:solidFill>
+          <a:ln w="15875">
+            <a:solidFill>
+              <a:srgbClr val="C0504D"/>
+            </a:solidFill>
+          </a:ln>
+          <a:effectLst/>
+        </p:spPr>
+        <p:style>
+          <a:lnRef idx="1">
+            <a:schemeClr val="accent1"/>
+          </a:lnRef>
+          <a:fillRef idx="3">
+            <a:schemeClr val="accent1"/>
+          </a:fillRef>
+          <a:effectRef idx="2">
+            <a:schemeClr val="accent1"/>
+          </a:effectRef>
+          <a:fontRef idx="minor">
+            <a:schemeClr val="lt1"/>
+          </a:fontRef>
+        </p:style>
+        <p:txBody>
+          <a:bodyPr rtlCol="0" anchor="ctr"/>
+          <a:lstStyle/>
+          <a:p>
+            <a:pPr algn="ctr"/>
+          </a:p>
+        </p:txBody>
+      </p:sp>
+      <p:sp>
+        <p:nvSpPr>
+          <p:cNvPr id="8" name="TextBox 7"/>
+          <p:cNvSpPr txBox="1"/>
+          <p:nvPr/>
+        </p:nvSpPr>
+        <p:spPr>
+          <a:xfrm>
+            <a:off x="6309360" y="1554480"/>
+            <a:ext cx="5212079" cy="457200"/>
+          </a:xfrm>
+          <a:prstGeom prst="rect">
+            <a:avLst/>
+          </a:prstGeom>
+          <a:noFill/>
+        </p:spPr>
+        <p:txBody>
+          <a:bodyPr wrap="square" anchor="t" lIns="45720" rIns="45720" tIns="18288" bIns="18288">
+            <a:spAutoFit/>
+          </a:bodyPr>
+          <a:lstStyle/>
+          <a:p>
+            <a:pPr algn="l"/>
+            <a:r>
+              <a:rPr sz="2000" b="1" i="0">
+                <a:solidFill>
+                  <a:srgbClr val="C0504D"/>
+                </a:solidFill>
+                <a:latin typeface="Calibri"/>
+              </a:rPr>
+              <a:t>Scheme 2  —  Traditional optimiser</a:t>
+            </a:r>
+          </a:p>
+        </p:txBody>
+      </p:sp>
+      <p:sp>
+        <p:nvSpPr>
+          <p:cNvPr id="9" name="TextBox 8"/>
+          <p:cNvSpPr txBox="1"/>
+          <p:nvPr/>
+        </p:nvSpPr>
+        <p:spPr>
+          <a:xfrm>
+            <a:off x="6309360" y="2148840"/>
+            <a:ext cx="5212079" cy="4114800"/>
+          </a:xfrm>
+          <a:prstGeom prst="rect">
+            <a:avLst/>
+          </a:prstGeom>
+          <a:noFill/>
+        </p:spPr>
+        <p:txBody>
+          <a:bodyPr wrap="square" anchor="t" lIns="45720" rIns="45720" tIns="18288" bIns="18288">
+            <a:spAutoFit/>
+          </a:bodyPr>
+          <a:lstStyle/>
+          <a:p>
+            <a:pPr algn="l"/>
+            <a:r>
+              <a:rPr sz="1600" b="0" i="0">
                 <a:solidFill>
                   <a:srgbClr val="1A1A1A"/>
                 </a:solidFill>
                 <a:latin typeface="Calibri"/>
               </a:rPr>
-              <a:t>•  Scheme 2 — Traditional: argmax over ρ of Rs against ĥE. scipy bounded scalar optimiser (Brent).</a:t>
-            </a:r>
-          </a:p>
-          <a:p>
-            <a:pPr algn="l">
-              <a:spcAft>
-                <a:spcPts val="800"/>
-              </a:spcAft>
-            </a:pPr>
-            <a:r>
-              <a:rPr sz="1700">
-                <a:solidFill>
-                  <a:srgbClr val="1A1A1A"/>
-                </a:solidFill>
-                <a:latin typeface="Calibri"/>
-              </a:rPr>
-              <a:t>•  At κ = 1, Scheme 2 ≥ Scheme 1 always — sanity check.</a:t>
-            </a:r>
-          </a:p>
-          <a:p>
-            <a:pPr algn="l">
-              <a:spcAft>
-                <a:spcPts val="800"/>
-              </a:spcAft>
-            </a:pPr>
-            <a:r>
-              <a:rPr sz="1700">
-                <a:solidFill>
-                  <a:srgbClr val="1A1A1A"/>
-                </a:solidFill>
-                <a:latin typeface="Calibri"/>
-              </a:rPr>
-              <a:t>•  At κ &lt; 1, Scheme 2 is solving the WRONG optimisation problem (noisy ĥE, not true hE).</a:t>
-            </a:r>
-          </a:p>
-          <a:p>
-            <a:pPr algn="l">
-              <a:spcAft>
-                <a:spcPts val="800"/>
-              </a:spcAft>
-            </a:pPr>
-            <a:r>
-              <a:rPr sz="1700">
-                <a:solidFill>
-                  <a:srgbClr val="1A1A1A"/>
-                </a:solidFill>
-                <a:latin typeface="Calibri"/>
-              </a:rPr>
-              <a:t>•  Hypothesis: under noisy CSI Scheme 2 may underperform Scheme 1 because the optimiser AMPLIFIES the noise.</a:t>
-            </a:r>
-          </a:p>
-        </p:txBody>
-      </p:sp>
-      <p:pic>
-        <p:nvPicPr>
-          <p:cNvPr id="5" name="Picture 4" descr="02_validation_scheme1_vs_scheme2.png"/>
-          <p:cNvPicPr>
-            <a:picLocks noChangeAspect="1"/>
-          </p:cNvPicPr>
-          <p:nvPr/>
-        </p:nvPicPr>
-        <p:blipFill>
-          <a:blip r:embed="rId2"/>
-          <a:stretch>
-            <a:fillRect/>
-          </a:stretch>
-        </p:blipFill>
-        <p:spPr>
-          <a:xfrm>
-            <a:off x="6858000" y="1463040"/>
-            <a:ext cx="5029200" cy="3017520"/>
-          </a:xfrm>
-          <a:prstGeom prst="rect">
-            <a:avLst/>
-          </a:prstGeom>
-        </p:spPr>
-      </p:pic>
-      <p:sp>
-        <p:nvSpPr>
-          <p:cNvPr id="6" name="TextBox 5"/>
-          <p:cNvSpPr txBox="1"/>
-          <p:nvPr/>
-        </p:nvSpPr>
-        <p:spPr>
-          <a:xfrm>
-            <a:off x="6858000" y="5989320"/>
-            <a:ext cx="5029200" cy="365760"/>
-          </a:xfrm>
-          <a:prstGeom prst="rect">
-            <a:avLst/>
-          </a:prstGeom>
-          <a:noFill/>
-        </p:spPr>
-        <p:txBody>
-          <a:bodyPr wrap="square" lIns="45720" rIns="45720" tIns="18288" bIns="18288">
-            <a:spAutoFit/>
-          </a:bodyPr>
-          <a:lstStyle/>
-          <a:p>
-            <a:pPr algn="ctr"/>
-            <a:r>
-              <a:rPr sz="1100" b="0" i="1">
-                <a:solidFill>
-                  <a:srgbClr val="7F7F7F"/>
-                </a:solidFill>
-                <a:latin typeface="Calibri"/>
-              </a:rPr>
-              <a:t>κ = 1 sanity check: Scheme 2 cleanly beats Scheme 1 across SNR.</a:t>
-            </a:r>
-          </a:p>
-        </p:txBody>
-      </p:sp>
-      <p:sp>
-        <p:nvSpPr>
-          <p:cNvPr id="7" name="TextBox 6"/>
-          <p:cNvSpPr txBox="1"/>
-          <p:nvPr/>
-        </p:nvSpPr>
-        <p:spPr>
-          <a:xfrm>
-            <a:off x="10058400" y="6446520"/>
+              <a:t>Per-channel argmax of Rs against the noisy ĥE.
+scipy bounded scalar (Brent's method).
+Pros
+    Provably optimal at κ = 1.
+Cons
+    Trusts ĥE blindly.  At low κ the noise gets amplified, and the optimiser confidently picks the WRONG ρ.</a:t>
+            </a:r>
+          </a:p>
+        </p:txBody>
+      </p:sp>
+      <p:sp>
+        <p:nvSpPr>
+          <p:cNvPr id="10" name="TextBox 9"/>
+          <p:cNvSpPr txBox="1"/>
+          <p:nvPr/>
+        </p:nvSpPr>
+        <p:spPr>
+          <a:xfrm>
+            <a:off x="10058400" y="6492240"/>
             <a:ext cx="2011680" cy="274320"/>
           </a:xfrm>
           <a:prstGeom prst="rect">
@@ -5132,7 +6388,7 @@
           <a:noFill/>
         </p:spPr>
         <p:txBody>
-          <a:bodyPr wrap="square" lIns="45720" rIns="45720" tIns="18288" bIns="18288">
+          <a:bodyPr wrap="square" anchor="t" lIns="45720" rIns="45720" tIns="18288" bIns="18288">
             <a:spAutoFit/>
           </a:bodyPr>
           <a:lstStyle/>
@@ -5235,24 +6491,13 @@
           <a:lstStyle/>
           <a:p>
             <a:r>
-              <a:rPr sz="2800" b="1">
+              <a:rPr sz="3000" b="1">
                 <a:solidFill>
                   <a:srgbClr val="FFFFFF"/>
                 </a:solidFill>
                 <a:latin typeface="Calibri"/>
               </a:rPr>
-              <a:t>The noisy-CSI failure mode</a:t>
-            </a:r>
-          </a:p>
-          <a:p>
-            <a:r>
-              <a:rPr sz="1300" i="1">
-                <a:solidFill>
-                  <a:srgbClr val="E0E5EC"/>
-                </a:solidFill>
-                <a:latin typeface="Calibri"/>
-              </a:rPr>
-              <a:t>Trusting bad intel is worse than ignoring it</a:t>
+              <a:t>The failure mode  —  trusting bad intel hurts</a:t>
             </a:r>
           </a:p>
         </p:txBody>
@@ -5273,8 +6518,8 @@
         </p:blipFill>
         <p:spPr>
           <a:xfrm>
-            <a:off x="2377440" y="1097280"/>
-            <a:ext cx="7315200" cy="5413248"/>
+            <a:off x="2194560" y="1051560"/>
+            <a:ext cx="7680960" cy="5683910"/>
           </a:xfrm>
           <a:prstGeom prst="rect">
             <a:avLst/>
@@ -5289,29 +6534,29 @@
         </p:nvSpPr>
         <p:spPr>
           <a:xfrm>
-            <a:off x="548640" y="5852160"/>
-            <a:ext cx="11247120" cy="822960"/>
-          </a:xfrm>
-          <a:prstGeom prst="rect">
-            <a:avLst/>
-          </a:prstGeom>
-          <a:noFill/>
-        </p:spPr>
-        <p:txBody>
-          <a:bodyPr wrap="square" lIns="45720" rIns="45720" tIns="18288" bIns="18288">
+            <a:off x="548640" y="5897880"/>
+            <a:ext cx="11247120" cy="777240"/>
+          </a:xfrm>
+          <a:prstGeom prst="rect">
+            <a:avLst/>
+          </a:prstGeom>
+          <a:noFill/>
+        </p:spPr>
+        <p:txBody>
+          <a:bodyPr wrap="square" anchor="t" lIns="45720" rIns="45720" tIns="18288" bIns="18288">
             <a:spAutoFit/>
           </a:bodyPr>
           <a:lstStyle/>
           <a:p>
             <a:pPr algn="ctr"/>
             <a:r>
-              <a:rPr sz="1400" b="0" i="1">
+              <a:rPr sz="1500" b="0" i="1">
                 <a:solidFill>
                   <a:srgbClr val="1A1A1A"/>
                 </a:solidFill>
                 <a:latin typeface="Calibri"/>
               </a:rPr>
-              <a:t>At κ = 0.4, Nt = 4: the Traditional curve (red) drops BELOW the Fixed baseline (grey) — exactly the failure mode our DQN is designed to avoid. The DQN curve (green) stays at or above grey across the whole SNR range.</a:t>
+              <a:t>At κ = 0.4 the red Traditional curve drops BELOW the grey Fixed baseline.  The optimiser is doing worse than doing nothing.  The green DQN curve  (next slides) is the fix.</a:t>
             </a:r>
           </a:p>
         </p:txBody>
@@ -5324,7 +6569,7 @@
         </p:nvSpPr>
         <p:spPr>
           <a:xfrm>
-            <a:off x="10058400" y="6446520"/>
+            <a:off x="10058400" y="6492240"/>
             <a:ext cx="2011680" cy="274320"/>
           </a:xfrm>
           <a:prstGeom prst="rect">
@@ -5333,7 +6578,7 @@
           <a:noFill/>
         </p:spPr>
         <p:txBody>
-          <a:bodyPr wrap="square" lIns="45720" rIns="45720" tIns="18288" bIns="18288">
+          <a:bodyPr wrap="square" anchor="t" lIns="45720" rIns="45720" tIns="18288" bIns="18288">
             <a:spAutoFit/>
           </a:bodyPr>
           <a:lstStyle/>
@@ -5436,161 +6681,377 @@
           <a:lstStyle/>
           <a:p>
             <a:r>
-              <a:rPr sz="2800" b="1">
+              <a:rPr sz="3000" b="1">
                 <a:solidFill>
                   <a:srgbClr val="FFFFFF"/>
                 </a:solidFill>
                 <a:latin typeface="Calibri"/>
               </a:rPr>
-              <a:t>Our approach — DQN trained over random κ</a:t>
-            </a:r>
-          </a:p>
-        </p:txBody>
-      </p:sp>
-      <p:sp>
-        <p:nvSpPr>
-          <p:cNvPr id="4" name="TextBox 3"/>
-          <p:cNvSpPr txBox="1"/>
-          <p:nvPr/>
-        </p:nvSpPr>
-        <p:spPr>
-          <a:xfrm>
-            <a:off x="548640" y="1188720"/>
-            <a:ext cx="11247120" cy="5303520"/>
-          </a:xfrm>
-          <a:prstGeom prst="rect">
-            <a:avLst/>
-          </a:prstGeom>
-          <a:noFill/>
-        </p:spPr>
-        <p:txBody>
-          <a:bodyPr wrap="square">
-            <a:spAutoFit/>
-          </a:bodyPr>
-          <a:lstStyle/>
-          <a:p>
-            <a:pPr algn="l">
-              <a:spcAft>
-                <a:spcPts val="800"/>
-              </a:spcAft>
-            </a:pPr>
-            <a:r>
-              <a:rPr sz="1800">
+              <a:t>Our approach  —  train a policy that EXPECTS noisy intel</a:t>
+            </a:r>
+          </a:p>
+        </p:txBody>
+      </p:sp>
+      <p:sp>
+        <p:nvSpPr>
+          <p:cNvPr id="4" name="Rounded Rectangle 3"/>
+          <p:cNvSpPr/>
+          <p:nvPr/>
+        </p:nvSpPr>
+        <p:spPr>
+          <a:xfrm>
+            <a:off x="548640" y="1280160"/>
+            <a:ext cx="3657600" cy="5029200"/>
+          </a:xfrm>
+          <a:prstGeom prst="roundRect">
+            <a:avLst/>
+          </a:prstGeom>
+          <a:solidFill>
+            <a:srgbClr val="E5ECF3"/>
+          </a:solidFill>
+          <a:ln w="15875">
+            <a:solidFill>
+              <a:srgbClr val="1F4E79"/>
+            </a:solidFill>
+          </a:ln>
+          <a:effectLst/>
+        </p:spPr>
+        <p:style>
+          <a:lnRef idx="1">
+            <a:schemeClr val="accent1"/>
+          </a:lnRef>
+          <a:fillRef idx="3">
+            <a:schemeClr val="accent1"/>
+          </a:fillRef>
+          <a:effectRef idx="2">
+            <a:schemeClr val="accent1"/>
+          </a:effectRef>
+          <a:fontRef idx="minor">
+            <a:schemeClr val="lt1"/>
+          </a:fontRef>
+        </p:style>
+        <p:txBody>
+          <a:bodyPr rtlCol="0" anchor="ctr"/>
+          <a:lstStyle/>
+          <a:p>
+            <a:pPr algn="ctr"/>
+          </a:p>
+        </p:txBody>
+      </p:sp>
+      <p:sp>
+        <p:nvSpPr>
+          <p:cNvPr id="5" name="TextBox 4"/>
+          <p:cNvSpPr txBox="1"/>
+          <p:nvPr/>
+        </p:nvSpPr>
+        <p:spPr>
+          <a:xfrm>
+            <a:off x="548640" y="1463040"/>
+            <a:ext cx="3657600" cy="457200"/>
+          </a:xfrm>
+          <a:prstGeom prst="rect">
+            <a:avLst/>
+          </a:prstGeom>
+          <a:noFill/>
+        </p:spPr>
+        <p:txBody>
+          <a:bodyPr wrap="square" anchor="t" lIns="45720" rIns="45720" tIns="18288" bIns="18288">
+            <a:spAutoFit/>
+          </a:bodyPr>
+          <a:lstStyle/>
+          <a:p>
+            <a:pPr algn="ctr"/>
+            <a:r>
+              <a:rPr sz="2200" b="1" i="0">
+                <a:solidFill>
+                  <a:srgbClr val="1F4E79"/>
+                </a:solidFill>
+                <a:latin typeface="Calibri"/>
+              </a:rPr>
+              <a:t>1.  Reframe</a:t>
+            </a:r>
+          </a:p>
+        </p:txBody>
+      </p:sp>
+      <p:sp>
+        <p:nvSpPr>
+          <p:cNvPr id="6" name="TextBox 5"/>
+          <p:cNvSpPr txBox="1"/>
+          <p:nvPr/>
+        </p:nvSpPr>
+        <p:spPr>
+          <a:xfrm>
+            <a:off x="731520" y="2011680"/>
+            <a:ext cx="3291840" cy="4114800"/>
+          </a:xfrm>
+          <a:prstGeom prst="rect">
+            <a:avLst/>
+          </a:prstGeom>
+          <a:noFill/>
+        </p:spPr>
+        <p:txBody>
+          <a:bodyPr wrap="square" anchor="t" lIns="45720" rIns="45720" tIns="18288" bIns="18288">
+            <a:spAutoFit/>
+          </a:bodyPr>
+          <a:lstStyle/>
+          <a:p>
+            <a:pPr algn="l"/>
+            <a:r>
+              <a:rPr sz="1500" b="0" i="0">
                 <a:solidFill>
                   <a:srgbClr val="1A1A1A"/>
                 </a:solidFill>
                 <a:latin typeface="Calibri"/>
               </a:rPr>
-              <a:t>•  Replace the per-channel optimiser with a deep Q-network policy trained off-line.</a:t>
-            </a:r>
-          </a:p>
-          <a:p>
-            <a:pPr algn="l">
-              <a:spcAft>
-                <a:spcPts val="800"/>
-              </a:spcAft>
-            </a:pPr>
-            <a:r>
-              <a:rPr sz="1800">
+              <a:t>Stop trying to find the closed-form optimum each call.
+Instead, train a policy off-line, across MANY noisy-intel scenarios, that learns when to trust ĥE and when to fall back to safe defaults.</a:t>
+            </a:r>
+          </a:p>
+        </p:txBody>
+      </p:sp>
+      <p:sp>
+        <p:nvSpPr>
+          <p:cNvPr id="7" name="Rounded Rectangle 6"/>
+          <p:cNvSpPr/>
+          <p:nvPr/>
+        </p:nvSpPr>
+        <p:spPr>
+          <a:xfrm>
+            <a:off x="4297680" y="1280160"/>
+            <a:ext cx="3657600" cy="5029200"/>
+          </a:xfrm>
+          <a:prstGeom prst="roundRect">
+            <a:avLst/>
+          </a:prstGeom>
+          <a:solidFill>
+            <a:srgbClr val="E0F1E0"/>
+          </a:solidFill>
+          <a:ln w="15875">
+            <a:solidFill>
+              <a:srgbClr val="2CA02C"/>
+            </a:solidFill>
+          </a:ln>
+          <a:effectLst/>
+        </p:spPr>
+        <p:style>
+          <a:lnRef idx="1">
+            <a:schemeClr val="accent1"/>
+          </a:lnRef>
+          <a:fillRef idx="3">
+            <a:schemeClr val="accent1"/>
+          </a:fillRef>
+          <a:effectRef idx="2">
+            <a:schemeClr val="accent1"/>
+          </a:effectRef>
+          <a:fontRef idx="minor">
+            <a:schemeClr val="lt1"/>
+          </a:fontRef>
+        </p:style>
+        <p:txBody>
+          <a:bodyPr rtlCol="0" anchor="ctr"/>
+          <a:lstStyle/>
+          <a:p>
+            <a:pPr algn="ctr"/>
+          </a:p>
+        </p:txBody>
+      </p:sp>
+      <p:sp>
+        <p:nvSpPr>
+          <p:cNvPr id="8" name="TextBox 7"/>
+          <p:cNvSpPr txBox="1"/>
+          <p:nvPr/>
+        </p:nvSpPr>
+        <p:spPr>
+          <a:xfrm>
+            <a:off x="4297680" y="1463040"/>
+            <a:ext cx="3657600" cy="457200"/>
+          </a:xfrm>
+          <a:prstGeom prst="rect">
+            <a:avLst/>
+          </a:prstGeom>
+          <a:noFill/>
+        </p:spPr>
+        <p:txBody>
+          <a:bodyPr wrap="square" anchor="t" lIns="45720" rIns="45720" tIns="18288" bIns="18288">
+            <a:spAutoFit/>
+          </a:bodyPr>
+          <a:lstStyle/>
+          <a:p>
+            <a:pPr algn="ctr"/>
+            <a:r>
+              <a:rPr sz="2200" b="1" i="0">
+                <a:solidFill>
+                  <a:srgbClr val="2CA02C"/>
+                </a:solidFill>
+                <a:latin typeface="Calibri"/>
+              </a:rPr>
+              <a:t>2.  Two key inputs</a:t>
+            </a:r>
+          </a:p>
+        </p:txBody>
+      </p:sp>
+      <p:sp>
+        <p:nvSpPr>
+          <p:cNvPr id="9" name="TextBox 8"/>
+          <p:cNvSpPr txBox="1"/>
+          <p:nvPr/>
+        </p:nvSpPr>
+        <p:spPr>
+          <a:xfrm>
+            <a:off x="4480560" y="2011680"/>
+            <a:ext cx="3291840" cy="4114800"/>
+          </a:xfrm>
+          <a:prstGeom prst="rect">
+            <a:avLst/>
+          </a:prstGeom>
+          <a:noFill/>
+        </p:spPr>
+        <p:txBody>
+          <a:bodyPr wrap="square" anchor="t" lIns="45720" rIns="45720" tIns="18288" bIns="18288">
+            <a:spAutoFit/>
+          </a:bodyPr>
+          <a:lstStyle/>
+          <a:p>
+            <a:pPr algn="l"/>
+            <a:r>
+              <a:rPr sz="1500" b="0" i="0">
                 <a:solidFill>
                   <a:srgbClr val="1A1A1A"/>
                 </a:solidFill>
                 <a:latin typeface="Calibri"/>
               </a:rPr>
-              <a:t>•  Train across random (channel, SNR, κ) tuples — the policy is trained to EXPECT noisy CSI rather than to be fooled by it.</a:t>
-            </a:r>
-          </a:p>
-          <a:p>
-            <a:pPr algn="l">
-              <a:spcAft>
-                <a:spcPts val="800"/>
-              </a:spcAft>
-            </a:pPr>
-            <a:r>
-              <a:rPr sz="1800">
+              <a:t>Tell the agent how trustworthy its intel is  →  feed κ directly into its observation.
+Tell it the channel geometry  →  feed the alignment between Bob's beam and the noisy Eve estimate.</a:t>
+            </a:r>
+          </a:p>
+        </p:txBody>
+      </p:sp>
+      <p:sp>
+        <p:nvSpPr>
+          <p:cNvPr id="10" name="Rounded Rectangle 9"/>
+          <p:cNvSpPr/>
+          <p:nvPr/>
+        </p:nvSpPr>
+        <p:spPr>
+          <a:xfrm>
+            <a:off x="8046720" y="1280160"/>
+            <a:ext cx="3657600" cy="5029200"/>
+          </a:xfrm>
+          <a:prstGeom prst="roundRect">
+            <a:avLst/>
+          </a:prstGeom>
+          <a:solidFill>
+            <a:srgbClr val="FAE7E6"/>
+          </a:solidFill>
+          <a:ln w="15875">
+            <a:solidFill>
+              <a:srgbClr val="C0504D"/>
+            </a:solidFill>
+          </a:ln>
+          <a:effectLst/>
+        </p:spPr>
+        <p:style>
+          <a:lnRef idx="1">
+            <a:schemeClr val="accent1"/>
+          </a:lnRef>
+          <a:fillRef idx="3">
+            <a:schemeClr val="accent1"/>
+          </a:fillRef>
+          <a:effectRef idx="2">
+            <a:schemeClr val="accent1"/>
+          </a:effectRef>
+          <a:fontRef idx="minor">
+            <a:schemeClr val="lt1"/>
+          </a:fontRef>
+        </p:style>
+        <p:txBody>
+          <a:bodyPr rtlCol="0" anchor="ctr"/>
+          <a:lstStyle/>
+          <a:p>
+            <a:pPr algn="ctr"/>
+          </a:p>
+        </p:txBody>
+      </p:sp>
+      <p:sp>
+        <p:nvSpPr>
+          <p:cNvPr id="11" name="TextBox 10"/>
+          <p:cNvSpPr txBox="1"/>
+          <p:nvPr/>
+        </p:nvSpPr>
+        <p:spPr>
+          <a:xfrm>
+            <a:off x="8046720" y="1463040"/>
+            <a:ext cx="3657600" cy="457200"/>
+          </a:xfrm>
+          <a:prstGeom prst="rect">
+            <a:avLst/>
+          </a:prstGeom>
+          <a:noFill/>
+        </p:spPr>
+        <p:txBody>
+          <a:bodyPr wrap="square" anchor="t" lIns="45720" rIns="45720" tIns="18288" bIns="18288">
+            <a:spAutoFit/>
+          </a:bodyPr>
+          <a:lstStyle/>
+          <a:p>
+            <a:pPr algn="ctr"/>
+            <a:r>
+              <a:rPr sz="2200" b="1" i="0">
+                <a:solidFill>
+                  <a:srgbClr val="C0504D"/>
+                </a:solidFill>
+                <a:latin typeface="Calibri"/>
+              </a:rPr>
+              <a:t>3.  Single deployable model</a:t>
+            </a:r>
+          </a:p>
+        </p:txBody>
+      </p:sp>
+      <p:sp>
+        <p:nvSpPr>
+          <p:cNvPr id="12" name="TextBox 11"/>
+          <p:cNvSpPr txBox="1"/>
+          <p:nvPr/>
+        </p:nvSpPr>
+        <p:spPr>
+          <a:xfrm>
+            <a:off x="8229600" y="2011680"/>
+            <a:ext cx="3291840" cy="4114800"/>
+          </a:xfrm>
+          <a:prstGeom prst="rect">
+            <a:avLst/>
+          </a:prstGeom>
+          <a:noFill/>
+        </p:spPr>
+        <p:txBody>
+          <a:bodyPr wrap="square" anchor="t" lIns="45720" rIns="45720" tIns="18288" bIns="18288">
+            <a:spAutoFit/>
+          </a:bodyPr>
+          <a:lstStyle/>
+          <a:p>
+            <a:pPr algn="l"/>
+            <a:r>
+              <a:rPr sz="1500" b="0" i="0">
                 <a:solidFill>
                   <a:srgbClr val="1A1A1A"/>
                 </a:solidFill>
                 <a:latin typeface="Calibri"/>
               </a:rPr>
-              <a:t>•  At deployment: a single Q-network forward pass replaces the iterative optimisation. Same model used for every operating point.</a:t>
-            </a:r>
-          </a:p>
-          <a:p>
-            <a:pPr algn="l">
-              <a:spcAft>
-                <a:spcPts val="800"/>
-              </a:spcAft>
-            </a:pPr>
-            <a:r>
-              <a:rPr sz="1800">
-                <a:solidFill>
-                  <a:srgbClr val="1A1A1A"/>
-                </a:solidFill>
-                <a:latin typeface="Calibri"/>
-              </a:rPr>
-              <a:t>•  Two design choices that mattered the most:</a:t>
-            </a:r>
-          </a:p>
-          <a:p>
-            <a:pPr algn="l">
-              <a:spcAft>
-                <a:spcPts val="800"/>
-              </a:spcAft>
-            </a:pPr>
-            <a:r>
-              <a:rPr sz="1800">
-                <a:solidFill>
-                  <a:srgbClr val="1A1A1A"/>
-                </a:solidFill>
-                <a:latin typeface="Calibri"/>
-              </a:rPr>
-              <a:t>•      (a) include κ in the state — the agent KNOWS how much to trust ĥE,</a:t>
-            </a:r>
-          </a:p>
-          <a:p>
-            <a:pPr algn="l">
-              <a:spcAft>
-                <a:spcPts val="800"/>
-              </a:spcAft>
-            </a:pPr>
-            <a:r>
-              <a:rPr sz="1800">
-                <a:solidFill>
-                  <a:srgbClr val="1A1A1A"/>
-                </a:solidFill>
-                <a:latin typeface="Calibri"/>
-              </a:rPr>
-              <a:t>•      (b) include an alignment cue α between hB and ĥE — the geometry that drives the optimal ρ on each channel.</a:t>
-            </a:r>
-          </a:p>
-          <a:p>
-            <a:pPr algn="l">
-              <a:spcAft>
-                <a:spcPts val="800"/>
-              </a:spcAft>
-            </a:pPr>
-            <a:r>
-              <a:rPr sz="1800">
-                <a:solidFill>
-                  <a:srgbClr val="1A1A1A"/>
-                </a:solidFill>
-                <a:latin typeface="Calibri"/>
-              </a:rPr>
-              <a:t>•  Result: the DQN sits at or above Fixed across the whole κ range, and matches Traditional at high κ.</a:t>
-            </a:r>
-          </a:p>
-        </p:txBody>
-      </p:sp>
-      <p:sp>
-        <p:nvSpPr>
-          <p:cNvPr id="5" name="TextBox 4"/>
-          <p:cNvSpPr txBox="1"/>
-          <p:nvPr/>
-        </p:nvSpPr>
-        <p:spPr>
-          <a:xfrm>
-            <a:off x="10058400" y="6446520"/>
+              <a:t>ONE trained network handles every (SNR, κ) it sees in the test set.
+No retuning, no re-optimising at run time.  A forward pass replaces an iterative solver.</a:t>
+            </a:r>
+          </a:p>
+        </p:txBody>
+      </p:sp>
+      <p:sp>
+        <p:nvSpPr>
+          <p:cNvPr id="13" name="TextBox 12"/>
+          <p:cNvSpPr txBox="1"/>
+          <p:nvPr/>
+        </p:nvSpPr>
+        <p:spPr>
+          <a:xfrm>
+            <a:off x="10058400" y="6492240"/>
             <a:ext cx="2011680" cy="274320"/>
           </a:xfrm>
           <a:prstGeom prst="rect">
@@ -5599,7 +7060,7 @@
           <a:noFill/>
         </p:spPr>
         <p:txBody>
-          <a:bodyPr wrap="square" lIns="45720" rIns="45720" tIns="18288" bIns="18288">
+          <a:bodyPr wrap="square" anchor="t" lIns="45720" rIns="45720" tIns="18288" bIns="18288">
             <a:spAutoFit/>
           </a:bodyPr>
           <a:lstStyle/>
@@ -5702,13 +7163,13 @@
           <a:lstStyle/>
           <a:p>
             <a:r>
-              <a:rPr sz="2800" b="1">
+              <a:rPr sz="3000" b="1">
                 <a:solidFill>
                   <a:srgbClr val="FFFFFF"/>
                 </a:solidFill>
                 <a:latin typeface="Calibri"/>
               </a:rPr>
-              <a:t>State and action space</a:t>
+              <a:t>What the agent sees, what it does</a:t>
             </a:r>
           </a:p>
         </p:txBody>
@@ -5721,29 +7182,29 @@
         </p:nvSpPr>
         <p:spPr>
           <a:xfrm>
-            <a:off x="548640" y="1188720"/>
-            <a:ext cx="5852160" cy="365760"/>
-          </a:xfrm>
-          <a:prstGeom prst="rect">
-            <a:avLst/>
-          </a:prstGeom>
-          <a:noFill/>
-        </p:spPr>
-        <p:txBody>
-          <a:bodyPr wrap="square" lIns="45720" rIns="45720" tIns="18288" bIns="18288">
+            <a:off x="548640" y="1097280"/>
+            <a:ext cx="5943600" cy="457200"/>
+          </a:xfrm>
+          <a:prstGeom prst="rect">
+            <a:avLst/>
+          </a:prstGeom>
+          <a:noFill/>
+        </p:spPr>
+        <p:txBody>
+          <a:bodyPr wrap="square" anchor="t" lIns="45720" rIns="45720" tIns="18288" bIns="18288">
             <a:spAutoFit/>
           </a:bodyPr>
           <a:lstStyle/>
           <a:p>
             <a:pPr algn="l"/>
             <a:r>
-              <a:rPr sz="1800" b="1" i="0">
+              <a:rPr sz="2000" b="1" i="0">
                 <a:solidFill>
                   <a:srgbClr val="1F4E79"/>
                 </a:solidFill>
                 <a:latin typeface="Calibri"/>
               </a:rPr>
-              <a:t>State (7 dims, all roughly in [0, 1]):</a:t>
+              <a:t>State  —  7 numbers describing the situation</a:t>
             </a:r>
           </a:p>
         </p:txBody>
@@ -5756,339 +7217,791 @@
         </p:nvSpPr>
         <p:spPr>
           <a:xfrm>
-            <a:off x="548640" y="1554480"/>
-            <a:ext cx="5852160" cy="4114800"/>
-          </a:xfrm>
-          <a:prstGeom prst="rect">
-            <a:avLst/>
-          </a:prstGeom>
-          <a:noFill/>
-        </p:spPr>
-        <p:txBody>
-          <a:bodyPr wrap="square">
-            <a:spAutoFit/>
-          </a:bodyPr>
-          <a:lstStyle/>
-          <a:p>
-            <a:pPr algn="l">
-              <a:spcAft>
-                <a:spcPts val="800"/>
-              </a:spcAft>
-            </a:pPr>
-            <a:r>
-              <a:rPr sz="1500">
+            <a:off x="640080" y="1691640"/>
+            <a:ext cx="365760" cy="320040"/>
+          </a:xfrm>
+          <a:prstGeom prst="rect">
+            <a:avLst/>
+          </a:prstGeom>
+          <a:noFill/>
+        </p:spPr>
+        <p:txBody>
+          <a:bodyPr wrap="square" anchor="t" lIns="45720" rIns="45720" tIns="18288" bIns="18288">
+            <a:spAutoFit/>
+          </a:bodyPr>
+          <a:lstStyle/>
+          <a:p>
+            <a:pPr algn="ctr"/>
+            <a:r>
+              <a:rPr sz="1600" b="0" i="0">
                 <a:solidFill>
                   <a:srgbClr val="1A1A1A"/>
                 </a:solidFill>
                 <a:latin typeface="Calibri"/>
               </a:rPr>
-              <a:t>•  ‖hB‖² / Nt  —  Bob's channel gain per antenna</a:t>
-            </a:r>
-          </a:p>
-          <a:p>
-            <a:pPr algn="l">
-              <a:spcAft>
-                <a:spcPts val="800"/>
-              </a:spcAft>
-            </a:pPr>
-            <a:r>
-              <a:rPr sz="1500">
+              <a:t>📡</a:t>
+            </a:r>
+          </a:p>
+        </p:txBody>
+      </p:sp>
+      <p:sp>
+        <p:nvSpPr>
+          <p:cNvPr id="6" name="TextBox 5"/>
+          <p:cNvSpPr txBox="1"/>
+          <p:nvPr/>
+        </p:nvSpPr>
+        <p:spPr>
+          <a:xfrm>
+            <a:off x="1097280" y="1691640"/>
+            <a:ext cx="5029200" cy="320040"/>
+          </a:xfrm>
+          <a:prstGeom prst="rect">
+            <a:avLst/>
+          </a:prstGeom>
+          <a:noFill/>
+        </p:spPr>
+        <p:txBody>
+          <a:bodyPr wrap="square" anchor="t" lIns="45720" rIns="45720" tIns="18288" bIns="18288">
+            <a:spAutoFit/>
+          </a:bodyPr>
+          <a:lstStyle/>
+          <a:p>
+            <a:pPr algn="l"/>
+            <a:r>
+              <a:rPr sz="1500" b="0" i="0">
                 <a:solidFill>
                   <a:srgbClr val="1A1A1A"/>
                 </a:solidFill>
                 <a:latin typeface="Calibri"/>
               </a:rPr>
-              <a:t>•  ‖ĥE‖² / Nt  —  Eve's NOISY gain estimate</a:t>
-            </a:r>
-          </a:p>
-          <a:p>
-            <a:pPr algn="l">
-              <a:spcAft>
-                <a:spcPts val="800"/>
-              </a:spcAft>
-            </a:pPr>
-            <a:r>
-              <a:rPr sz="1500">
+              <a:t>Bob's channel strength</a:t>
+            </a:r>
+          </a:p>
+        </p:txBody>
+      </p:sp>
+      <p:sp>
+        <p:nvSpPr>
+          <p:cNvPr id="7" name="TextBox 6"/>
+          <p:cNvSpPr txBox="1"/>
+          <p:nvPr/>
+        </p:nvSpPr>
+        <p:spPr>
+          <a:xfrm>
+            <a:off x="640080" y="2075688"/>
+            <a:ext cx="365760" cy="320040"/>
+          </a:xfrm>
+          <a:prstGeom prst="rect">
+            <a:avLst/>
+          </a:prstGeom>
+          <a:noFill/>
+        </p:spPr>
+        <p:txBody>
+          <a:bodyPr wrap="square" anchor="t" lIns="45720" rIns="45720" tIns="18288" bIns="18288">
+            <a:spAutoFit/>
+          </a:bodyPr>
+          <a:lstStyle/>
+          <a:p>
+            <a:pPr algn="ctr"/>
+            <a:r>
+              <a:rPr sz="1600" b="0" i="0">
                 <a:solidFill>
                   <a:srgbClr val="1A1A1A"/>
                 </a:solidFill>
                 <a:latin typeface="Calibri"/>
               </a:rPr>
-              <a:t>•  SNR_dB / 30  —  transmit SNR (normalised)</a:t>
-            </a:r>
-          </a:p>
-          <a:p>
-            <a:pPr algn="l">
-              <a:spcAft>
-                <a:spcPts val="800"/>
-              </a:spcAft>
-            </a:pPr>
-            <a:r>
-              <a:rPr sz="1500">
+              <a:t>📡</a:t>
+            </a:r>
+          </a:p>
+        </p:txBody>
+      </p:sp>
+      <p:sp>
+        <p:nvSpPr>
+          <p:cNvPr id="8" name="TextBox 7"/>
+          <p:cNvSpPr txBox="1"/>
+          <p:nvPr/>
+        </p:nvSpPr>
+        <p:spPr>
+          <a:xfrm>
+            <a:off x="1097280" y="2075688"/>
+            <a:ext cx="5029200" cy="320040"/>
+          </a:xfrm>
+          <a:prstGeom prst="rect">
+            <a:avLst/>
+          </a:prstGeom>
+          <a:noFill/>
+        </p:spPr>
+        <p:txBody>
+          <a:bodyPr wrap="square" anchor="t" lIns="45720" rIns="45720" tIns="18288" bIns="18288">
+            <a:spAutoFit/>
+          </a:bodyPr>
+          <a:lstStyle/>
+          <a:p>
+            <a:pPr algn="l"/>
+            <a:r>
+              <a:rPr sz="1500" b="0" i="0">
                 <a:solidFill>
                   <a:srgbClr val="1A1A1A"/>
                 </a:solidFill>
                 <a:latin typeface="Calibri"/>
               </a:rPr>
-              <a:t>•  ρ_prev, Rs_prev / 10  —  previous-step bookkeeping</a:t>
-            </a:r>
-          </a:p>
-          <a:p>
-            <a:pPr algn="l">
-              <a:spcAft>
-                <a:spcPts val="800"/>
-              </a:spcAft>
-            </a:pPr>
-            <a:r>
-              <a:rPr sz="1500">
+              <a:t>Eve's (noisy) channel strength</a:t>
+            </a:r>
+          </a:p>
+        </p:txBody>
+      </p:sp>
+      <p:sp>
+        <p:nvSpPr>
+          <p:cNvPr id="9" name="TextBox 8"/>
+          <p:cNvSpPr txBox="1"/>
+          <p:nvPr/>
+        </p:nvSpPr>
+        <p:spPr>
+          <a:xfrm>
+            <a:off x="640080" y="2459736"/>
+            <a:ext cx="365760" cy="320040"/>
+          </a:xfrm>
+          <a:prstGeom prst="rect">
+            <a:avLst/>
+          </a:prstGeom>
+          <a:noFill/>
+        </p:spPr>
+        <p:txBody>
+          <a:bodyPr wrap="square" anchor="t" lIns="45720" rIns="45720" tIns="18288" bIns="18288">
+            <a:spAutoFit/>
+          </a:bodyPr>
+          <a:lstStyle/>
+          <a:p>
+            <a:pPr algn="ctr"/>
+            <a:r>
+              <a:rPr sz="1600" b="0" i="0">
                 <a:solidFill>
                   <a:srgbClr val="1A1A1A"/>
                 </a:solidFill>
                 <a:latin typeface="Calibri"/>
               </a:rPr>
-              <a:t>•  κ  —  CSI quality factor (THE robustness axis)</a:t>
-            </a:r>
-          </a:p>
-          <a:p>
-            <a:pPr algn="l">
-              <a:spcAft>
-                <a:spcPts val="800"/>
-              </a:spcAft>
-            </a:pPr>
-            <a:r>
-              <a:rPr sz="1500">
+              <a:t>⚡</a:t>
+            </a:r>
+          </a:p>
+        </p:txBody>
+      </p:sp>
+      <p:sp>
+        <p:nvSpPr>
+          <p:cNvPr id="10" name="TextBox 9"/>
+          <p:cNvSpPr txBox="1"/>
+          <p:nvPr/>
+        </p:nvSpPr>
+        <p:spPr>
+          <a:xfrm>
+            <a:off x="1097280" y="2459736"/>
+            <a:ext cx="5029200" cy="320040"/>
+          </a:xfrm>
+          <a:prstGeom prst="rect">
+            <a:avLst/>
+          </a:prstGeom>
+          <a:noFill/>
+        </p:spPr>
+        <p:txBody>
+          <a:bodyPr wrap="square" anchor="t" lIns="45720" rIns="45720" tIns="18288" bIns="18288">
+            <a:spAutoFit/>
+          </a:bodyPr>
+          <a:lstStyle/>
+          <a:p>
+            <a:pPr algn="l"/>
+            <a:r>
+              <a:rPr sz="1500" b="0" i="0">
                 <a:solidFill>
                   <a:srgbClr val="1A1A1A"/>
                 </a:solidFill>
                 <a:latin typeface="Calibri"/>
               </a:rPr>
-              <a:t>•  α = |hB^H ĥE|² / (‖hB‖²‖ĥE‖²)  —  alignment cue</a:t>
-            </a:r>
-          </a:p>
-        </p:txBody>
-      </p:sp>
-      <p:sp>
-        <p:nvSpPr>
-          <p:cNvPr id="6" name="TextBox 5"/>
-          <p:cNvSpPr txBox="1"/>
-          <p:nvPr/>
-        </p:nvSpPr>
-        <p:spPr>
-          <a:xfrm>
-            <a:off x="6766560" y="1188720"/>
-            <a:ext cx="5029200" cy="365760"/>
-          </a:xfrm>
-          <a:prstGeom prst="rect">
-            <a:avLst/>
-          </a:prstGeom>
-          <a:noFill/>
-        </p:spPr>
-        <p:txBody>
-          <a:bodyPr wrap="square" lIns="45720" rIns="45720" tIns="18288" bIns="18288">
+              <a:t>Transmit SNR</a:t>
+            </a:r>
+          </a:p>
+        </p:txBody>
+      </p:sp>
+      <p:sp>
+        <p:nvSpPr>
+          <p:cNvPr id="11" name="TextBox 10"/>
+          <p:cNvSpPr txBox="1"/>
+          <p:nvPr/>
+        </p:nvSpPr>
+        <p:spPr>
+          <a:xfrm>
+            <a:off x="640080" y="2843784"/>
+            <a:ext cx="365760" cy="320040"/>
+          </a:xfrm>
+          <a:prstGeom prst="rect">
+            <a:avLst/>
+          </a:prstGeom>
+          <a:noFill/>
+        </p:spPr>
+        <p:txBody>
+          <a:bodyPr wrap="square" anchor="t" lIns="45720" rIns="45720" tIns="18288" bIns="18288">
+            <a:spAutoFit/>
+          </a:bodyPr>
+          <a:lstStyle/>
+          <a:p>
+            <a:pPr algn="ctr"/>
+            <a:r>
+              <a:rPr sz="1600" b="0" i="0">
+                <a:solidFill>
+                  <a:srgbClr val="1A1A1A"/>
+                </a:solidFill>
+                <a:latin typeface="Calibri"/>
+              </a:rPr>
+              <a:t>🕒</a:t>
+            </a:r>
+          </a:p>
+        </p:txBody>
+      </p:sp>
+      <p:sp>
+        <p:nvSpPr>
+          <p:cNvPr id="12" name="TextBox 11"/>
+          <p:cNvSpPr txBox="1"/>
+          <p:nvPr/>
+        </p:nvSpPr>
+        <p:spPr>
+          <a:xfrm>
+            <a:off x="1097280" y="2843784"/>
+            <a:ext cx="5029200" cy="320040"/>
+          </a:xfrm>
+          <a:prstGeom prst="rect">
+            <a:avLst/>
+          </a:prstGeom>
+          <a:noFill/>
+        </p:spPr>
+        <p:txBody>
+          <a:bodyPr wrap="square" anchor="t" lIns="45720" rIns="45720" tIns="18288" bIns="18288">
             <a:spAutoFit/>
           </a:bodyPr>
           <a:lstStyle/>
           <a:p>
             <a:pPr algn="l"/>
             <a:r>
-              <a:rPr sz="1800" b="1" i="0">
+              <a:rPr sz="1500" b="0" i="0">
+                <a:solidFill>
+                  <a:srgbClr val="1A1A1A"/>
+                </a:solidFill>
+                <a:latin typeface="Calibri"/>
+              </a:rPr>
+              <a:t>What it picked last time</a:t>
+            </a:r>
+          </a:p>
+        </p:txBody>
+      </p:sp>
+      <p:sp>
+        <p:nvSpPr>
+          <p:cNvPr id="13" name="TextBox 12"/>
+          <p:cNvSpPr txBox="1"/>
+          <p:nvPr/>
+        </p:nvSpPr>
+        <p:spPr>
+          <a:xfrm>
+            <a:off x="640080" y="3227832"/>
+            <a:ext cx="365760" cy="320040"/>
+          </a:xfrm>
+          <a:prstGeom prst="rect">
+            <a:avLst/>
+          </a:prstGeom>
+          <a:noFill/>
+        </p:spPr>
+        <p:txBody>
+          <a:bodyPr wrap="square" anchor="t" lIns="45720" rIns="45720" tIns="18288" bIns="18288">
+            <a:spAutoFit/>
+          </a:bodyPr>
+          <a:lstStyle/>
+          <a:p>
+            <a:pPr algn="ctr"/>
+            <a:r>
+              <a:rPr sz="1600" b="0" i="0">
+                <a:solidFill>
+                  <a:srgbClr val="1A1A1A"/>
+                </a:solidFill>
+                <a:latin typeface="Calibri"/>
+              </a:rPr>
+              <a:t>📊</a:t>
+            </a:r>
+          </a:p>
+        </p:txBody>
+      </p:sp>
+      <p:sp>
+        <p:nvSpPr>
+          <p:cNvPr id="14" name="TextBox 13"/>
+          <p:cNvSpPr txBox="1"/>
+          <p:nvPr/>
+        </p:nvSpPr>
+        <p:spPr>
+          <a:xfrm>
+            <a:off x="1097280" y="3227832"/>
+            <a:ext cx="5029200" cy="320040"/>
+          </a:xfrm>
+          <a:prstGeom prst="rect">
+            <a:avLst/>
+          </a:prstGeom>
+          <a:noFill/>
+        </p:spPr>
+        <p:txBody>
+          <a:bodyPr wrap="square" anchor="t" lIns="45720" rIns="45720" tIns="18288" bIns="18288">
+            <a:spAutoFit/>
+          </a:bodyPr>
+          <a:lstStyle/>
+          <a:p>
+            <a:pPr algn="l"/>
+            <a:r>
+              <a:rPr sz="1500" b="0" i="0">
+                <a:solidFill>
+                  <a:srgbClr val="1A1A1A"/>
+                </a:solidFill>
+                <a:latin typeface="Calibri"/>
+              </a:rPr>
+              <a:t>How it scored last time</a:t>
+            </a:r>
+          </a:p>
+        </p:txBody>
+      </p:sp>
+      <p:sp>
+        <p:nvSpPr>
+          <p:cNvPr id="15" name="TextBox 14"/>
+          <p:cNvSpPr txBox="1"/>
+          <p:nvPr/>
+        </p:nvSpPr>
+        <p:spPr>
+          <a:xfrm>
+            <a:off x="640080" y="3611879"/>
+            <a:ext cx="365760" cy="320040"/>
+          </a:xfrm>
+          <a:prstGeom prst="rect">
+            <a:avLst/>
+          </a:prstGeom>
+          <a:noFill/>
+        </p:spPr>
+        <p:txBody>
+          <a:bodyPr wrap="square" anchor="t" lIns="45720" rIns="45720" tIns="18288" bIns="18288">
+            <a:spAutoFit/>
+          </a:bodyPr>
+          <a:lstStyle/>
+          <a:p>
+            <a:pPr algn="ctr"/>
+            <a:r>
+              <a:rPr sz="1600" b="0" i="0">
+                <a:solidFill>
+                  <a:srgbClr val="1A1A1A"/>
+                </a:solidFill>
+                <a:latin typeface="Calibri"/>
+              </a:rPr>
+              <a:t>🎯</a:t>
+            </a:r>
+          </a:p>
+        </p:txBody>
+      </p:sp>
+      <p:sp>
+        <p:nvSpPr>
+          <p:cNvPr id="16" name="TextBox 15"/>
+          <p:cNvSpPr txBox="1"/>
+          <p:nvPr/>
+        </p:nvSpPr>
+        <p:spPr>
+          <a:xfrm>
+            <a:off x="1097280" y="3611879"/>
+            <a:ext cx="5029200" cy="320040"/>
+          </a:xfrm>
+          <a:prstGeom prst="rect">
+            <a:avLst/>
+          </a:prstGeom>
+          <a:noFill/>
+        </p:spPr>
+        <p:txBody>
+          <a:bodyPr wrap="square" anchor="t" lIns="45720" rIns="45720" tIns="18288" bIns="18288">
+            <a:spAutoFit/>
+          </a:bodyPr>
+          <a:lstStyle/>
+          <a:p>
+            <a:pPr algn="l"/>
+            <a:r>
+              <a:rPr sz="1500" b="0" i="0">
+                <a:solidFill>
+                  <a:srgbClr val="1A1A1A"/>
+                </a:solidFill>
+                <a:latin typeface="Calibri"/>
+              </a:rPr>
+              <a:t>κ  —  intel quality</a:t>
+            </a:r>
+          </a:p>
+        </p:txBody>
+      </p:sp>
+      <p:sp>
+        <p:nvSpPr>
+          <p:cNvPr id="17" name="TextBox 16"/>
+          <p:cNvSpPr txBox="1"/>
+          <p:nvPr/>
+        </p:nvSpPr>
+        <p:spPr>
+          <a:xfrm>
+            <a:off x="640080" y="3995928"/>
+            <a:ext cx="365760" cy="320040"/>
+          </a:xfrm>
+          <a:prstGeom prst="rect">
+            <a:avLst/>
+          </a:prstGeom>
+          <a:noFill/>
+        </p:spPr>
+        <p:txBody>
+          <a:bodyPr wrap="square" anchor="t" lIns="45720" rIns="45720" tIns="18288" bIns="18288">
+            <a:spAutoFit/>
+          </a:bodyPr>
+          <a:lstStyle/>
+          <a:p>
+            <a:pPr algn="ctr"/>
+            <a:r>
+              <a:rPr sz="1600" b="0" i="0">
+                <a:solidFill>
+                  <a:srgbClr val="1A1A1A"/>
+                </a:solidFill>
+                <a:latin typeface="Calibri"/>
+              </a:rPr>
+              <a:t>📐</a:t>
+            </a:r>
+          </a:p>
+        </p:txBody>
+      </p:sp>
+      <p:sp>
+        <p:nvSpPr>
+          <p:cNvPr id="18" name="TextBox 17"/>
+          <p:cNvSpPr txBox="1"/>
+          <p:nvPr/>
+        </p:nvSpPr>
+        <p:spPr>
+          <a:xfrm>
+            <a:off x="1097280" y="3995928"/>
+            <a:ext cx="5029200" cy="320040"/>
+          </a:xfrm>
+          <a:prstGeom prst="rect">
+            <a:avLst/>
+          </a:prstGeom>
+          <a:noFill/>
+        </p:spPr>
+        <p:txBody>
+          <a:bodyPr wrap="square" anchor="t" lIns="45720" rIns="45720" tIns="18288" bIns="18288">
+            <a:spAutoFit/>
+          </a:bodyPr>
+          <a:lstStyle/>
+          <a:p>
+            <a:pPr algn="l"/>
+            <a:r>
+              <a:rPr sz="1500" b="0" i="0">
+                <a:solidFill>
+                  <a:srgbClr val="1A1A1A"/>
+                </a:solidFill>
+                <a:latin typeface="Calibri"/>
+              </a:rPr>
+              <a:t>α  —  beam-vs-Eve alignment</a:t>
+            </a:r>
+          </a:p>
+        </p:txBody>
+      </p:sp>
+      <p:sp>
+        <p:nvSpPr>
+          <p:cNvPr id="19" name="TextBox 18"/>
+          <p:cNvSpPr txBox="1"/>
+          <p:nvPr/>
+        </p:nvSpPr>
+        <p:spPr>
+          <a:xfrm>
+            <a:off x="640080" y="5120640"/>
+            <a:ext cx="5486400" cy="320040"/>
+          </a:xfrm>
+          <a:prstGeom prst="rect">
+            <a:avLst/>
+          </a:prstGeom>
+          <a:noFill/>
+        </p:spPr>
+        <p:txBody>
+          <a:bodyPr wrap="square" anchor="t" lIns="45720" rIns="45720" tIns="18288" bIns="18288">
+            <a:spAutoFit/>
+          </a:bodyPr>
+          <a:lstStyle/>
+          <a:p>
+            <a:pPr algn="l"/>
+            <a:r>
+              <a:rPr sz="1200" b="0" i="1">
+                <a:solidFill>
+                  <a:srgbClr val="7F7F7F"/>
+                </a:solidFill>
+                <a:latin typeface="Calibri"/>
+              </a:rPr>
+              <a:t>(α formally:)</a:t>
+            </a:r>
+          </a:p>
+        </p:txBody>
+      </p:sp>
+      <p:pic>
+        <p:nvPicPr>
+          <p:cNvPr id="20" name="Picture 19" descr="eq06_alpha.png"/>
+          <p:cNvPicPr>
+            <a:picLocks noChangeAspect="1"/>
+          </p:cNvPicPr>
+          <p:nvPr/>
+        </p:nvPicPr>
+        <p:blipFill>
+          <a:blip r:embed="rId2"/>
+          <a:stretch>
+            <a:fillRect/>
+          </a:stretch>
+        </p:blipFill>
+        <p:spPr>
+          <a:xfrm>
+            <a:off x="640080" y="5440680"/>
+            <a:ext cx="5029200" cy="1270696"/>
+          </a:xfrm>
+          <a:prstGeom prst="rect">
+            <a:avLst/>
+          </a:prstGeom>
+        </p:spPr>
+      </p:pic>
+      <p:sp>
+        <p:nvSpPr>
+          <p:cNvPr id="21" name="Rounded Rectangle 20"/>
+          <p:cNvSpPr/>
+          <p:nvPr/>
+        </p:nvSpPr>
+        <p:spPr>
+          <a:xfrm>
+            <a:off x="6858000" y="1097280"/>
+            <a:ext cx="4846320" cy="2286000"/>
+          </a:xfrm>
+          <a:prstGeom prst="roundRect">
+            <a:avLst/>
+          </a:prstGeom>
+          <a:solidFill>
+            <a:srgbClr val="E5ECF3"/>
+          </a:solidFill>
+          <a:ln w="15875">
+            <a:solidFill>
+              <a:srgbClr val="1F4E79"/>
+            </a:solidFill>
+          </a:ln>
+          <a:effectLst/>
+        </p:spPr>
+        <p:style>
+          <a:lnRef idx="1">
+            <a:schemeClr val="accent1"/>
+          </a:lnRef>
+          <a:fillRef idx="3">
+            <a:schemeClr val="accent1"/>
+          </a:fillRef>
+          <a:effectRef idx="2">
+            <a:schemeClr val="accent1"/>
+          </a:effectRef>
+          <a:fontRef idx="minor">
+            <a:schemeClr val="lt1"/>
+          </a:fontRef>
+        </p:style>
+        <p:txBody>
+          <a:bodyPr rtlCol="0" anchor="ctr"/>
+          <a:lstStyle/>
+          <a:p>
+            <a:pPr algn="ctr"/>
+          </a:p>
+        </p:txBody>
+      </p:sp>
+      <p:sp>
+        <p:nvSpPr>
+          <p:cNvPr id="22" name="TextBox 21"/>
+          <p:cNvSpPr txBox="1"/>
+          <p:nvPr/>
+        </p:nvSpPr>
+        <p:spPr>
+          <a:xfrm>
+            <a:off x="7040880" y="1280160"/>
+            <a:ext cx="4480559" cy="457200"/>
+          </a:xfrm>
+          <a:prstGeom prst="rect">
+            <a:avLst/>
+          </a:prstGeom>
+          <a:noFill/>
+        </p:spPr>
+        <p:txBody>
+          <a:bodyPr wrap="square" anchor="t" lIns="45720" rIns="45720" tIns="18288" bIns="18288">
+            <a:spAutoFit/>
+          </a:bodyPr>
+          <a:lstStyle/>
+          <a:p>
+            <a:pPr algn="l"/>
+            <a:r>
+              <a:rPr sz="2000" b="1" i="0">
                 <a:solidFill>
                   <a:srgbClr val="1F4E79"/>
                 </a:solidFill>
                 <a:latin typeface="Calibri"/>
               </a:rPr>
-              <a:t>Action space:</a:t>
-            </a:r>
-          </a:p>
-        </p:txBody>
-      </p:sp>
-      <p:sp>
-        <p:nvSpPr>
-          <p:cNvPr id="7" name="TextBox 6"/>
-          <p:cNvSpPr txBox="1"/>
-          <p:nvPr/>
-        </p:nvSpPr>
-        <p:spPr>
-          <a:xfrm>
-            <a:off x="6766560" y="1554480"/>
-            <a:ext cx="5029200" cy="1097280"/>
-          </a:xfrm>
-          <a:prstGeom prst="rect">
-            <a:avLst/>
-          </a:prstGeom>
-          <a:noFill/>
-        </p:spPr>
-        <p:txBody>
-          <a:bodyPr wrap="square" lIns="45720" rIns="45720" tIns="18288" bIns="18288">
+              <a:t>Action</a:t>
+            </a:r>
+          </a:p>
+        </p:txBody>
+      </p:sp>
+      <p:sp>
+        <p:nvSpPr>
+          <p:cNvPr id="23" name="TextBox 22"/>
+          <p:cNvSpPr txBox="1"/>
+          <p:nvPr/>
+        </p:nvSpPr>
+        <p:spPr>
+          <a:xfrm>
+            <a:off x="7040880" y="1874519"/>
+            <a:ext cx="4480559" cy="1371600"/>
+          </a:xfrm>
+          <a:prstGeom prst="rect">
+            <a:avLst/>
+          </a:prstGeom>
+          <a:noFill/>
+        </p:spPr>
+        <p:txBody>
+          <a:bodyPr wrap="square" anchor="t" lIns="45720" rIns="45720" tIns="18288" bIns="18288">
             <a:spAutoFit/>
           </a:bodyPr>
           <a:lstStyle/>
           <a:p>
             <a:pPr algn="l"/>
             <a:r>
-              <a:rPr sz="1500" b="0" i="0">
+              <a:rPr sz="1600" b="0" i="0">
                 <a:solidFill>
                   <a:srgbClr val="1A1A1A"/>
                 </a:solidFill>
                 <a:latin typeface="Calibri"/>
               </a:rPr>
-              <a:t>ρ ∈ {0.05, 0.10, 0.15, …, 0.85} — 17 discrete splits in steps of 0.05.</a:t>
-            </a:r>
-          </a:p>
-        </p:txBody>
-      </p:sp>
-      <p:sp>
-        <p:nvSpPr>
-          <p:cNvPr id="8" name="TextBox 7"/>
-          <p:cNvSpPr txBox="1"/>
-          <p:nvPr/>
-        </p:nvSpPr>
-        <p:spPr>
-          <a:xfrm>
-            <a:off x="6766560" y="2834640"/>
-            <a:ext cx="5029200" cy="365760"/>
-          </a:xfrm>
-          <a:prstGeom prst="rect">
-            <a:avLst/>
-          </a:prstGeom>
-          <a:noFill/>
-        </p:spPr>
-        <p:txBody>
-          <a:bodyPr wrap="square" lIns="45720" rIns="45720" tIns="18288" bIns="18288">
+              <a:t>Pick one of 17 candidate splits between message and AN  (steps of 0.05).
+Discrete  →  light DQN architecture, fast inference.</a:t>
+            </a:r>
+          </a:p>
+        </p:txBody>
+      </p:sp>
+      <p:sp>
+        <p:nvSpPr>
+          <p:cNvPr id="24" name="Rounded Rectangle 23"/>
+          <p:cNvSpPr/>
+          <p:nvPr/>
+        </p:nvSpPr>
+        <p:spPr>
+          <a:xfrm>
+            <a:off x="6858000" y="3566160"/>
+            <a:ext cx="4846320" cy="2743200"/>
+          </a:xfrm>
+          <a:prstGeom prst="roundRect">
+            <a:avLst/>
+          </a:prstGeom>
+          <a:solidFill>
+            <a:srgbClr val="E0F1E0"/>
+          </a:solidFill>
+          <a:ln w="15875">
+            <a:solidFill>
+              <a:srgbClr val="2CA02C"/>
+            </a:solidFill>
+          </a:ln>
+          <a:effectLst/>
+        </p:spPr>
+        <p:style>
+          <a:lnRef idx="1">
+            <a:schemeClr val="accent1"/>
+          </a:lnRef>
+          <a:fillRef idx="3">
+            <a:schemeClr val="accent1"/>
+          </a:fillRef>
+          <a:effectRef idx="2">
+            <a:schemeClr val="accent1"/>
+          </a:effectRef>
+          <a:fontRef idx="minor">
+            <a:schemeClr val="lt1"/>
+          </a:fontRef>
+        </p:style>
+        <p:txBody>
+          <a:bodyPr rtlCol="0" anchor="ctr"/>
+          <a:lstStyle/>
+          <a:p>
+            <a:pPr algn="ctr"/>
+          </a:p>
+        </p:txBody>
+      </p:sp>
+      <p:sp>
+        <p:nvSpPr>
+          <p:cNvPr id="25" name="TextBox 24"/>
+          <p:cNvSpPr txBox="1"/>
+          <p:nvPr/>
+        </p:nvSpPr>
+        <p:spPr>
+          <a:xfrm>
+            <a:off x="7040880" y="3749039"/>
+            <a:ext cx="4480559" cy="457200"/>
+          </a:xfrm>
+          <a:prstGeom prst="rect">
+            <a:avLst/>
+          </a:prstGeom>
+          <a:noFill/>
+        </p:spPr>
+        <p:txBody>
+          <a:bodyPr wrap="square" anchor="t" lIns="45720" rIns="45720" tIns="18288" bIns="18288">
             <a:spAutoFit/>
           </a:bodyPr>
           <a:lstStyle/>
           <a:p>
             <a:pPr algn="l"/>
             <a:r>
-              <a:rPr sz="1800" b="1" i="0">
-                <a:solidFill>
-                  <a:srgbClr val="1F4E79"/>
-                </a:solidFill>
-                <a:latin typeface="Calibri"/>
-              </a:rPr>
-              <a:t>Network architecture:</a:t>
-            </a:r>
-          </a:p>
-        </p:txBody>
-      </p:sp>
-      <p:sp>
-        <p:nvSpPr>
-          <p:cNvPr id="9" name="TextBox 8"/>
-          <p:cNvSpPr txBox="1"/>
-          <p:nvPr/>
-        </p:nvSpPr>
-        <p:spPr>
-          <a:xfrm>
-            <a:off x="6766560" y="3200400"/>
-            <a:ext cx="5029200" cy="1463040"/>
-          </a:xfrm>
-          <a:prstGeom prst="rect">
-            <a:avLst/>
-          </a:prstGeom>
-          <a:noFill/>
-        </p:spPr>
-        <p:txBody>
-          <a:bodyPr wrap="square" lIns="45720" rIns="45720" tIns="18288" bIns="18288">
+              <a:rPr sz="2000" b="1" i="0">
+                <a:solidFill>
+                  <a:srgbClr val="2CA02C"/>
+                </a:solidFill>
+                <a:latin typeface="Calibri"/>
+              </a:rPr>
+              <a:t>Network</a:t>
+            </a:r>
+          </a:p>
+        </p:txBody>
+      </p:sp>
+      <p:sp>
+        <p:nvSpPr>
+          <p:cNvPr id="26" name="TextBox 25"/>
+          <p:cNvSpPr txBox="1"/>
+          <p:nvPr/>
+        </p:nvSpPr>
+        <p:spPr>
+          <a:xfrm>
+            <a:off x="7040880" y="4343400"/>
+            <a:ext cx="4480559" cy="1828800"/>
+          </a:xfrm>
+          <a:prstGeom prst="rect">
+            <a:avLst/>
+          </a:prstGeom>
+          <a:noFill/>
+        </p:spPr>
+        <p:txBody>
+          <a:bodyPr wrap="square" anchor="t" lIns="45720" rIns="45720" tIns="18288" bIns="18288">
             <a:spAutoFit/>
           </a:bodyPr>
           <a:lstStyle/>
           <a:p>
             <a:pPr algn="l"/>
             <a:r>
-              <a:rPr sz="1500" b="0" i="0">
+              <a:rPr sz="1600" b="0" i="0">
                 <a:solidFill>
                   <a:srgbClr val="1A1A1A"/>
                 </a:solidFill>
                 <a:latin typeface="Calibri"/>
               </a:rPr>
-              <a:t>MLP  7 → 64 → 64 → 32 → 17.
-ReLU on hidden layers, linear output (Q-values per action).
-Greedy action selection at test time.</a:t>
-            </a:r>
-          </a:p>
-        </p:txBody>
-      </p:sp>
-      <p:sp>
-        <p:nvSpPr>
-          <p:cNvPr id="10" name="TextBox 9"/>
-          <p:cNvSpPr txBox="1"/>
-          <p:nvPr/>
-        </p:nvSpPr>
-        <p:spPr>
-          <a:xfrm>
-            <a:off x="6766560" y="4937760"/>
-            <a:ext cx="5029200" cy="365760"/>
-          </a:xfrm>
-          <a:prstGeom prst="rect">
-            <a:avLst/>
-          </a:prstGeom>
-          <a:noFill/>
-        </p:spPr>
-        <p:txBody>
-          <a:bodyPr wrap="square" lIns="45720" rIns="45720" tIns="18288" bIns="18288">
-            <a:spAutoFit/>
-          </a:bodyPr>
-          <a:lstStyle/>
-          <a:p>
-            <a:pPr algn="l"/>
-            <a:r>
-              <a:rPr sz="1800" b="1" i="0">
-                <a:solidFill>
-                  <a:srgbClr val="1F4E79"/>
-                </a:solidFill>
-                <a:latin typeface="Calibri"/>
-              </a:rPr>
-              <a:t>Reward:</a:t>
-            </a:r>
-          </a:p>
-        </p:txBody>
-      </p:sp>
-      <p:sp>
-        <p:nvSpPr>
-          <p:cNvPr id="11" name="TextBox 10"/>
-          <p:cNvSpPr txBox="1"/>
-          <p:nvPr/>
-        </p:nvSpPr>
-        <p:spPr>
-          <a:xfrm>
-            <a:off x="6766560" y="5303520"/>
-            <a:ext cx="5029200" cy="914400"/>
-          </a:xfrm>
-          <a:prstGeom prst="rect">
-            <a:avLst/>
-          </a:prstGeom>
-          <a:noFill/>
-        </p:spPr>
-        <p:txBody>
-          <a:bodyPr wrap="square" lIns="45720" rIns="45720" tIns="18288" bIns="18288">
-            <a:spAutoFit/>
-          </a:bodyPr>
-          <a:lstStyle/>
-          <a:p>
-            <a:pPr algn="l"/>
-            <a:r>
-              <a:rPr sz="1400" b="0" i="1">
-                <a:solidFill>
-                  <a:srgbClr val="1A1A1A"/>
-                </a:solidFill>
-                <a:latin typeface="Calibri"/>
-              </a:rPr>
-              <a:t>r = 10 · Rs(hB, hE_TRUE, ρ, P/σ²)
-Computed against the TRUE hE — not the noisy estimate.</a:t>
-            </a:r>
-          </a:p>
-        </p:txBody>
-      </p:sp>
-      <p:sp>
-        <p:nvSpPr>
-          <p:cNvPr id="12" name="TextBox 11"/>
-          <p:cNvSpPr txBox="1"/>
-          <p:nvPr/>
-        </p:nvSpPr>
-        <p:spPr>
-          <a:xfrm>
-            <a:off x="10058400" y="6446520"/>
+              <a:t>Small feed-forward net, 7 inputs  →  17 Q-values.
+Greedy at test time:  pick the highest-Q action.
+Trained with Huber loss + Adam over 7000 episodes.</a:t>
+            </a:r>
+          </a:p>
+        </p:txBody>
+      </p:sp>
+      <p:sp>
+        <p:nvSpPr>
+          <p:cNvPr id="27" name="TextBox 26"/>
+          <p:cNvSpPr txBox="1"/>
+          <p:nvPr/>
+        </p:nvSpPr>
+        <p:spPr>
+          <a:xfrm>
+            <a:off x="10058400" y="6492240"/>
             <a:ext cx="2011680" cy="274320"/>
           </a:xfrm>
           <a:prstGeom prst="rect">
@@ -6097,7 +8010,7 @@
           <a:noFill/>
         </p:spPr>
         <p:txBody>
-          <a:bodyPr wrap="square" lIns="45720" rIns="45720" tIns="18288" bIns="18288">
+          <a:bodyPr wrap="square" anchor="t" lIns="45720" rIns="45720" tIns="18288" bIns="18288">
             <a:spAutoFit/>
           </a:bodyPr>
           <a:lstStyle/>
@@ -6200,187 +8113,20 @@
           <a:lstStyle/>
           <a:p>
             <a:r>
-              <a:rPr sz="2800" b="1">
+              <a:rPr sz="3000" b="1">
                 <a:solidFill>
                   <a:srgbClr val="FFFFFF"/>
                 </a:solidFill>
                 <a:latin typeface="Calibri"/>
               </a:rPr>
-              <a:t>Training procedure</a:t>
-            </a:r>
-          </a:p>
-        </p:txBody>
-      </p:sp>
-      <p:sp>
-        <p:nvSpPr>
-          <p:cNvPr id="4" name="TextBox 3"/>
-          <p:cNvSpPr txBox="1"/>
-          <p:nvPr/>
-        </p:nvSpPr>
-        <p:spPr>
-          <a:xfrm>
-            <a:off x="548640" y="1188720"/>
-            <a:ext cx="6766560" cy="5486400"/>
-          </a:xfrm>
-          <a:prstGeom prst="rect">
-            <a:avLst/>
-          </a:prstGeom>
-          <a:noFill/>
-        </p:spPr>
-        <p:txBody>
-          <a:bodyPr wrap="square">
-            <a:spAutoFit/>
-          </a:bodyPr>
-          <a:lstStyle/>
-          <a:p>
-            <a:pPr algn="l">
-              <a:spcAft>
-                <a:spcPts val="800"/>
-              </a:spcAft>
-            </a:pPr>
-            <a:r>
-              <a:rPr sz="1500">
-                <a:solidFill>
-                  <a:srgbClr val="1A1A1A"/>
-                </a:solidFill>
-                <a:latin typeface="Calibri"/>
-              </a:rPr>
-              <a:t>•  One channel realisation = one episode (single-shot decision).</a:t>
-            </a:r>
-          </a:p>
-          <a:p>
-            <a:pPr algn="l">
-              <a:spcAft>
-                <a:spcPts val="800"/>
-              </a:spcAft>
-            </a:pPr>
-            <a:r>
-              <a:rPr sz="1500">
-                <a:solidFill>
-                  <a:srgbClr val="1A1A1A"/>
-                </a:solidFill>
-                <a:latin typeface="Calibri"/>
-              </a:rPr>
-              <a:t>•  Each episode: random Nt-channel pair, random SNR ∈ [0, 30] dB, random κ ∈ [0.1, 0.9].</a:t>
-            </a:r>
-          </a:p>
-          <a:p>
-            <a:pPr algn="l">
-              <a:spcAft>
-                <a:spcPts val="800"/>
-              </a:spcAft>
-            </a:pPr>
-            <a:r>
-              <a:rPr sz="1500">
-                <a:solidFill>
-                  <a:srgbClr val="1A1A1A"/>
-                </a:solidFill>
-                <a:latin typeface="Calibri"/>
-              </a:rPr>
-              <a:t>•  Reward = 10 · Rs evaluated against the true hE.</a:t>
-            </a:r>
-          </a:p>
-          <a:p>
-            <a:pPr algn="l">
-              <a:spcAft>
-                <a:spcPts val="800"/>
-              </a:spcAft>
-            </a:pPr>
-            <a:r>
-              <a:rPr sz="1500">
-                <a:solidFill>
-                  <a:srgbClr val="1A1A1A"/>
-                </a:solidFill>
-                <a:latin typeface="Calibri"/>
-              </a:rPr>
-              <a:t>•  Discount γ = 0  (terminal-after-one-step MDP); full target network kept for future block-fading extension.</a:t>
-            </a:r>
-          </a:p>
-          <a:p>
-            <a:pPr algn="l">
-              <a:spcAft>
-                <a:spcPts val="800"/>
-              </a:spcAft>
-            </a:pPr>
-            <a:r>
-              <a:rPr sz="1500">
-                <a:solidFill>
-                  <a:srgbClr val="1A1A1A"/>
-                </a:solidFill>
-                <a:latin typeface="Calibri"/>
-              </a:rPr>
-              <a:t>•  ε-greedy exploration: 1.0 → 0.05 over the first 4200 episodes.</a:t>
-            </a:r>
-          </a:p>
-          <a:p>
-            <a:pPr algn="l">
-              <a:spcAft>
-                <a:spcPts val="800"/>
-              </a:spcAft>
-            </a:pPr>
-            <a:r>
-              <a:rPr sz="1500">
-                <a:solidFill>
-                  <a:srgbClr val="1A1A1A"/>
-                </a:solidFill>
-                <a:latin typeface="Calibri"/>
-              </a:rPr>
-              <a:t>•  Replay buffer: 10 000 transitions, batch 64.</a:t>
-            </a:r>
-          </a:p>
-          <a:p>
-            <a:pPr algn="l">
-              <a:spcAft>
-                <a:spcPts val="800"/>
-              </a:spcAft>
-            </a:pPr>
-            <a:r>
-              <a:rPr sz="1500">
-                <a:solidFill>
-                  <a:srgbClr val="1A1A1A"/>
-                </a:solidFill>
-                <a:latin typeface="Calibri"/>
-              </a:rPr>
-              <a:t>•  Target network synced every 100 steps. Huber loss + Adam, lr 1e-3.</a:t>
-            </a:r>
-          </a:p>
-          <a:p>
-            <a:pPr algn="l">
-              <a:spcAft>
-                <a:spcPts val="800"/>
-              </a:spcAft>
-            </a:pPr>
-            <a:r>
-              <a:rPr sz="1500">
-                <a:solidFill>
-                  <a:srgbClr val="1A1A1A"/>
-                </a:solidFill>
-                <a:latin typeface="Calibri"/>
-              </a:rPr>
-              <a:t>•  7000 episodes per Nt ∈ {2, 4, 8} — three independent models.</a:t>
-            </a:r>
-          </a:p>
-          <a:p>
-            <a:pPr algn="l">
-              <a:spcAft>
-                <a:spcPts val="800"/>
-              </a:spcAft>
-            </a:pPr>
-            <a:r>
-              <a:rPr sz="1500">
-                <a:solidFill>
-                  <a:srgbClr val="1A1A1A"/>
-                </a:solidFill>
-                <a:latin typeface="Calibri"/>
-              </a:rPr>
-              <a:t>•  Total training cost: ~ 38 s per Nt on a single CPU core.</a:t>
+              <a:t>Training  —  one decision per channel, 7000 channels</a:t>
             </a:r>
           </a:p>
         </p:txBody>
       </p:sp>
       <p:pic>
         <p:nvPicPr>
-          <p:cNvPr id="5" name="Picture 4" descr="03_dqn_training_curve.png"/>
+          <p:cNvPr id="4" name="Picture 3" descr="03_dqn_training_curve.png"/>
           <p:cNvPicPr>
             <a:picLocks noChangeAspect="1"/>
           </p:cNvPicPr>
@@ -6394,8 +8140,8 @@
         </p:blipFill>
         <p:spPr>
           <a:xfrm>
-            <a:off x="7498079" y="1371600"/>
-            <a:ext cx="4572000" cy="3272589"/>
+            <a:off x="457200" y="1097280"/>
+            <a:ext cx="6766560" cy="4843432"/>
           </a:xfrm>
           <a:prstGeom prst="rect">
             <a:avLst/>
@@ -6404,22 +8150,22 @@
       </p:pic>
       <p:sp>
         <p:nvSpPr>
-          <p:cNvPr id="6" name="TextBox 5"/>
-          <p:cNvSpPr txBox="1"/>
-          <p:nvPr/>
-        </p:nvSpPr>
-        <p:spPr>
-          <a:xfrm>
-            <a:off x="7498079" y="5989320"/>
-            <a:ext cx="4572000" cy="365760"/>
-          </a:xfrm>
-          <a:prstGeom prst="rect">
-            <a:avLst/>
-          </a:prstGeom>
-          <a:noFill/>
-        </p:spPr>
-        <p:txBody>
-          <a:bodyPr wrap="square" lIns="45720" rIns="45720" tIns="18288" bIns="18288">
+          <p:cNvPr id="5" name="TextBox 4"/>
+          <p:cNvSpPr txBox="1"/>
+          <p:nvPr/>
+        </p:nvSpPr>
+        <p:spPr>
+          <a:xfrm>
+            <a:off x="457200" y="5989320"/>
+            <a:ext cx="6766560" cy="365760"/>
+          </a:xfrm>
+          <a:prstGeom prst="rect">
+            <a:avLst/>
+          </a:prstGeom>
+          <a:noFill/>
+        </p:spPr>
+        <p:txBody>
+          <a:bodyPr wrap="square" anchor="t" lIns="45720" rIns="45720" tIns="18288" bIns="18288">
             <a:spAutoFit/>
           </a:bodyPr>
           <a:lstStyle/>
@@ -6432,8 +8178,54 @@
                 </a:solidFill>
                 <a:latin typeface="Calibri"/>
               </a:rPr>
-              <a:t>Training curve at Nt = 4 — running-average Rs improves monotonically.</a:t>
-            </a:r>
+              <a:t>Running average reward climbs as ε → 0 and the policy stabilises.</a:t>
+            </a:r>
+          </a:p>
+        </p:txBody>
+      </p:sp>
+      <p:sp>
+        <p:nvSpPr>
+          <p:cNvPr id="6" name="Rounded Rectangle 5"/>
+          <p:cNvSpPr/>
+          <p:nvPr/>
+        </p:nvSpPr>
+        <p:spPr>
+          <a:xfrm>
+            <a:off x="7498079" y="1097280"/>
+            <a:ext cx="4297680" cy="1554480"/>
+          </a:xfrm>
+          <a:prstGeom prst="roundRect">
+            <a:avLst/>
+          </a:prstGeom>
+          <a:solidFill>
+            <a:srgbClr val="E5ECF3"/>
+          </a:solidFill>
+          <a:ln w="15875">
+            <a:solidFill>
+              <a:srgbClr val="1F4E79"/>
+            </a:solidFill>
+          </a:ln>
+          <a:effectLst/>
+        </p:spPr>
+        <p:style>
+          <a:lnRef idx="1">
+            <a:schemeClr val="accent1"/>
+          </a:lnRef>
+          <a:fillRef idx="3">
+            <a:schemeClr val="accent1"/>
+          </a:fillRef>
+          <a:effectRef idx="2">
+            <a:schemeClr val="accent1"/>
+          </a:effectRef>
+          <a:fontRef idx="minor">
+            <a:schemeClr val="lt1"/>
+          </a:fontRef>
+        </p:style>
+        <p:txBody>
+          <a:bodyPr rtlCol="0" anchor="ctr"/>
+          <a:lstStyle/>
+          <a:p>
+            <a:pPr algn="ctr"/>
           </a:p>
         </p:txBody>
       </p:sp>
@@ -6445,7 +8237,309 @@
         </p:nvSpPr>
         <p:spPr>
           <a:xfrm>
-            <a:off x="10058400" y="6446520"/>
+            <a:off x="7498079" y="1234440"/>
+            <a:ext cx="4297680" cy="457200"/>
+          </a:xfrm>
+          <a:prstGeom prst="rect">
+            <a:avLst/>
+          </a:prstGeom>
+          <a:noFill/>
+        </p:spPr>
+        <p:txBody>
+          <a:bodyPr wrap="square" anchor="t" lIns="45720" rIns="45720" tIns="18288" bIns="18288">
+            <a:spAutoFit/>
+          </a:bodyPr>
+          <a:lstStyle/>
+          <a:p>
+            <a:pPr algn="ctr"/>
+            <a:r>
+              <a:rPr sz="4400" b="1" i="0">
+                <a:solidFill>
+                  <a:srgbClr val="1F4E79"/>
+                </a:solidFill>
+                <a:latin typeface="Calibri"/>
+              </a:rPr>
+              <a:t>7000</a:t>
+            </a:r>
+          </a:p>
+        </p:txBody>
+      </p:sp>
+      <p:sp>
+        <p:nvSpPr>
+          <p:cNvPr id="8" name="TextBox 7"/>
+          <p:cNvSpPr txBox="1"/>
+          <p:nvPr/>
+        </p:nvSpPr>
+        <p:spPr>
+          <a:xfrm>
+            <a:off x="7498079" y="2057400"/>
+            <a:ext cx="4297680" cy="457200"/>
+          </a:xfrm>
+          <a:prstGeom prst="rect">
+            <a:avLst/>
+          </a:prstGeom>
+          <a:noFill/>
+        </p:spPr>
+        <p:txBody>
+          <a:bodyPr wrap="square" anchor="t" lIns="45720" rIns="45720" tIns="18288" bIns="18288">
+            <a:spAutoFit/>
+          </a:bodyPr>
+          <a:lstStyle/>
+          <a:p>
+            <a:pPr algn="ctr"/>
+            <a:r>
+              <a:rPr sz="1400" b="0" i="1">
+                <a:solidFill>
+                  <a:srgbClr val="1A1A1A"/>
+                </a:solidFill>
+                <a:latin typeface="Calibri"/>
+              </a:rPr>
+              <a:t>training episodes per Nt</a:t>
+            </a:r>
+          </a:p>
+        </p:txBody>
+      </p:sp>
+      <p:sp>
+        <p:nvSpPr>
+          <p:cNvPr id="9" name="Rounded Rectangle 8"/>
+          <p:cNvSpPr/>
+          <p:nvPr/>
+        </p:nvSpPr>
+        <p:spPr>
+          <a:xfrm>
+            <a:off x="7498079" y="2788920"/>
+            <a:ext cx="4297680" cy="1554480"/>
+          </a:xfrm>
+          <a:prstGeom prst="roundRect">
+            <a:avLst/>
+          </a:prstGeom>
+          <a:solidFill>
+            <a:srgbClr val="E0F1E0"/>
+          </a:solidFill>
+          <a:ln w="15875">
+            <a:solidFill>
+              <a:srgbClr val="2CA02C"/>
+            </a:solidFill>
+          </a:ln>
+          <a:effectLst/>
+        </p:spPr>
+        <p:style>
+          <a:lnRef idx="1">
+            <a:schemeClr val="accent1"/>
+          </a:lnRef>
+          <a:fillRef idx="3">
+            <a:schemeClr val="accent1"/>
+          </a:fillRef>
+          <a:effectRef idx="2">
+            <a:schemeClr val="accent1"/>
+          </a:effectRef>
+          <a:fontRef idx="minor">
+            <a:schemeClr val="lt1"/>
+          </a:fontRef>
+        </p:style>
+        <p:txBody>
+          <a:bodyPr rtlCol="0" anchor="ctr"/>
+          <a:lstStyle/>
+          <a:p>
+            <a:pPr algn="ctr"/>
+          </a:p>
+        </p:txBody>
+      </p:sp>
+      <p:sp>
+        <p:nvSpPr>
+          <p:cNvPr id="10" name="TextBox 9"/>
+          <p:cNvSpPr txBox="1"/>
+          <p:nvPr/>
+        </p:nvSpPr>
+        <p:spPr>
+          <a:xfrm>
+            <a:off x="7498079" y="2926080"/>
+            <a:ext cx="4297680" cy="457200"/>
+          </a:xfrm>
+          <a:prstGeom prst="rect">
+            <a:avLst/>
+          </a:prstGeom>
+          <a:noFill/>
+        </p:spPr>
+        <p:txBody>
+          <a:bodyPr wrap="square" anchor="t" lIns="45720" rIns="45720" tIns="18288" bIns="18288">
+            <a:spAutoFit/>
+          </a:bodyPr>
+          <a:lstStyle/>
+          <a:p>
+            <a:pPr algn="ctr"/>
+            <a:r>
+              <a:rPr sz="4400" b="1" i="0">
+                <a:solidFill>
+                  <a:srgbClr val="2CA02C"/>
+                </a:solidFill>
+                <a:latin typeface="Calibri"/>
+              </a:rPr>
+              <a:t>≈ 38 s</a:t>
+            </a:r>
+          </a:p>
+        </p:txBody>
+      </p:sp>
+      <p:sp>
+        <p:nvSpPr>
+          <p:cNvPr id="11" name="TextBox 10"/>
+          <p:cNvSpPr txBox="1"/>
+          <p:nvPr/>
+        </p:nvSpPr>
+        <p:spPr>
+          <a:xfrm>
+            <a:off x="7498079" y="3749039"/>
+            <a:ext cx="4297680" cy="457200"/>
+          </a:xfrm>
+          <a:prstGeom prst="rect">
+            <a:avLst/>
+          </a:prstGeom>
+          <a:noFill/>
+        </p:spPr>
+        <p:txBody>
+          <a:bodyPr wrap="square" anchor="t" lIns="45720" rIns="45720" tIns="18288" bIns="18288">
+            <a:spAutoFit/>
+          </a:bodyPr>
+          <a:lstStyle/>
+          <a:p>
+            <a:pPr algn="ctr"/>
+            <a:r>
+              <a:rPr sz="1400" b="0" i="1">
+                <a:solidFill>
+                  <a:srgbClr val="1A1A1A"/>
+                </a:solidFill>
+                <a:latin typeface="Calibri"/>
+              </a:rPr>
+              <a:t>training cost on a single CPU core</a:t>
+            </a:r>
+          </a:p>
+        </p:txBody>
+      </p:sp>
+      <p:sp>
+        <p:nvSpPr>
+          <p:cNvPr id="12" name="Rounded Rectangle 11"/>
+          <p:cNvSpPr/>
+          <p:nvPr/>
+        </p:nvSpPr>
+        <p:spPr>
+          <a:xfrm>
+            <a:off x="7498079" y="4480560"/>
+            <a:ext cx="4297680" cy="1554480"/>
+          </a:xfrm>
+          <a:prstGeom prst="roundRect">
+            <a:avLst/>
+          </a:prstGeom>
+          <a:solidFill>
+            <a:srgbClr val="FAE7E6"/>
+          </a:solidFill>
+          <a:ln w="15875">
+            <a:solidFill>
+              <a:srgbClr val="C0504D"/>
+            </a:solidFill>
+          </a:ln>
+          <a:effectLst/>
+        </p:spPr>
+        <p:style>
+          <a:lnRef idx="1">
+            <a:schemeClr val="accent1"/>
+          </a:lnRef>
+          <a:fillRef idx="3">
+            <a:schemeClr val="accent1"/>
+          </a:fillRef>
+          <a:effectRef idx="2">
+            <a:schemeClr val="accent1"/>
+          </a:effectRef>
+          <a:fontRef idx="minor">
+            <a:schemeClr val="lt1"/>
+          </a:fontRef>
+        </p:style>
+        <p:txBody>
+          <a:bodyPr rtlCol="0" anchor="ctr"/>
+          <a:lstStyle/>
+          <a:p>
+            <a:pPr algn="ctr"/>
+          </a:p>
+        </p:txBody>
+      </p:sp>
+      <p:sp>
+        <p:nvSpPr>
+          <p:cNvPr id="13" name="TextBox 12"/>
+          <p:cNvSpPr txBox="1"/>
+          <p:nvPr/>
+        </p:nvSpPr>
+        <p:spPr>
+          <a:xfrm>
+            <a:off x="7498079" y="4617720"/>
+            <a:ext cx="4297680" cy="457200"/>
+          </a:xfrm>
+          <a:prstGeom prst="rect">
+            <a:avLst/>
+          </a:prstGeom>
+          <a:noFill/>
+        </p:spPr>
+        <p:txBody>
+          <a:bodyPr wrap="square" anchor="t" lIns="45720" rIns="45720" tIns="18288" bIns="18288">
+            <a:spAutoFit/>
+          </a:bodyPr>
+          <a:lstStyle/>
+          <a:p>
+            <a:pPr algn="ctr"/>
+            <a:r>
+              <a:rPr sz="2800" b="1" i="0">
+                <a:solidFill>
+                  <a:srgbClr val="C0504D"/>
+                </a:solidFill>
+                <a:latin typeface="Calibri"/>
+              </a:rPr>
+              <a:t>Nt ∈ {2, 4, 8}</a:t>
+            </a:r>
+          </a:p>
+        </p:txBody>
+      </p:sp>
+      <p:sp>
+        <p:nvSpPr>
+          <p:cNvPr id="14" name="TextBox 13"/>
+          <p:cNvSpPr txBox="1"/>
+          <p:nvPr/>
+        </p:nvSpPr>
+        <p:spPr>
+          <a:xfrm>
+            <a:off x="7498079" y="5440680"/>
+            <a:ext cx="4297680" cy="457200"/>
+          </a:xfrm>
+          <a:prstGeom prst="rect">
+            <a:avLst/>
+          </a:prstGeom>
+          <a:noFill/>
+        </p:spPr>
+        <p:txBody>
+          <a:bodyPr wrap="square" anchor="t" lIns="45720" rIns="45720" tIns="18288" bIns="18288">
+            <a:spAutoFit/>
+          </a:bodyPr>
+          <a:lstStyle/>
+          <a:p>
+            <a:pPr algn="ctr"/>
+            <a:r>
+              <a:rPr sz="1400" b="0" i="1">
+                <a:solidFill>
+                  <a:srgbClr val="1A1A1A"/>
+                </a:solidFill>
+                <a:latin typeface="Calibri"/>
+              </a:rPr>
+              <a:t>three independent models, identical hyperparams</a:t>
+            </a:r>
+          </a:p>
+        </p:txBody>
+      </p:sp>
+      <p:sp>
+        <p:nvSpPr>
+          <p:cNvPr id="15" name="TextBox 14"/>
+          <p:cNvSpPr txBox="1"/>
+          <p:nvPr/>
+        </p:nvSpPr>
+        <p:spPr>
+          <a:xfrm>
+            <a:off x="10058400" y="6492240"/>
             <a:ext cx="2011680" cy="274320"/>
           </a:xfrm>
           <a:prstGeom prst="rect">
@@ -6454,7 +8548,7 @@
           <a:noFill/>
         </p:spPr>
         <p:txBody>
-          <a:bodyPr wrap="square" lIns="45720" rIns="45720" tIns="18288" bIns="18288">
+          <a:bodyPr wrap="square" anchor="t" lIns="45720" rIns="45720" tIns="18288" bIns="18288">
             <a:spAutoFit/>
           </a:bodyPr>
           <a:lstStyle/>
@@ -6557,13 +8651,13 @@
           <a:lstStyle/>
           <a:p>
             <a:r>
-              <a:rPr sz="2800" b="1">
+              <a:rPr sz="3000" b="1">
                 <a:solidFill>
                   <a:srgbClr val="FFFFFF"/>
                 </a:solidFill>
                 <a:latin typeface="Calibri"/>
               </a:rPr>
-              <a:t>Results — three-scheme comparison</a:t>
+              <a:t>Headline result  —  three schemes, same channels</a:t>
             </a:r>
           </a:p>
           <a:p>
@@ -6574,7 +8668,7 @@
                 </a:solidFill>
                 <a:latin typeface="Calibri"/>
               </a:rPr>
-              <a:t>Headline plot at the realistic operating point</a:t>
+              <a:t>κ = 0.4, Nt = 4, 400 unseen channels per SNR point</a:t>
             </a:r>
           </a:p>
         </p:txBody>
@@ -6595,8 +8689,8 @@
         </p:blipFill>
         <p:spPr>
           <a:xfrm>
-            <a:off x="2468880" y="1097280"/>
-            <a:ext cx="7223760" cy="5345582"/>
+            <a:off x="2194560" y="1097280"/>
+            <a:ext cx="7680960" cy="5683910"/>
           </a:xfrm>
           <a:prstGeom prst="rect">
             <a:avLst/>
@@ -6611,29 +8705,29 @@
         </p:nvSpPr>
         <p:spPr>
           <a:xfrm>
-            <a:off x="548640" y="5852160"/>
-            <a:ext cx="11247120" cy="822960"/>
-          </a:xfrm>
-          <a:prstGeom prst="rect">
-            <a:avLst/>
-          </a:prstGeom>
-          <a:noFill/>
-        </p:spPr>
-        <p:txBody>
-          <a:bodyPr wrap="square" lIns="45720" rIns="45720" tIns="18288" bIns="18288">
+            <a:off x="548640" y="5943600"/>
+            <a:ext cx="11247120" cy="731520"/>
+          </a:xfrm>
+          <a:prstGeom prst="rect">
+            <a:avLst/>
+          </a:prstGeom>
+          <a:noFill/>
+        </p:spPr>
+        <p:txBody>
+          <a:bodyPr wrap="square" anchor="t" lIns="45720" rIns="45720" tIns="18288" bIns="18288">
             <a:spAutoFit/>
           </a:bodyPr>
           <a:lstStyle/>
           <a:p>
             <a:pPr algn="ctr"/>
             <a:r>
-              <a:rPr sz="1300" b="0" i="1">
+              <a:rPr sz="1400" b="0" i="1">
                 <a:solidFill>
                   <a:srgbClr val="1A1A1A"/>
                 </a:solidFill>
                 <a:latin typeface="Calibri"/>
               </a:rPr>
-              <a:t>κ = 0.4, Nt = 4, 400 unseen channels per SNR point.  DQN (green) ≥ Fixed (grey) everywhere; Traditional (red) drops below Fixed across most of the SNR range.</a:t>
+              <a:t>DQN (green) sits at or above the Fixed baseline (grey) everywhere.  Traditional (red, dashed) drops below.  Same model, no retuning per SNR.</a:t>
             </a:r>
           </a:p>
         </p:txBody>
@@ -6646,7 +8740,7 @@
         </p:nvSpPr>
         <p:spPr>
           <a:xfrm>
-            <a:off x="10058400" y="6446520"/>
+            <a:off x="10058400" y="6492240"/>
             <a:ext cx="2011680" cy="274320"/>
           </a:xfrm>
           <a:prstGeom prst="rect">
@@ -6655,7 +8749,7 @@
           <a:noFill/>
         </p:spPr>
         <p:txBody>
-          <a:bodyPr wrap="square" lIns="45720" rIns="45720" tIns="18288" bIns="18288">
+          <a:bodyPr wrap="square" anchor="t" lIns="45720" rIns="45720" tIns="18288" bIns="18288">
             <a:spAutoFit/>
           </a:bodyPr>
           <a:lstStyle/>

--- a/report/slides.pptx
+++ b/report/slides.pptx
@@ -3431,7 +3431,7 @@
         <p:spPr>
           <a:xfrm>
             <a:off x="365760" y="1097280"/>
-            <a:ext cx="6035040" cy="3692024"/>
+            <a:ext cx="5852160" cy="3580145"/>
           </a:xfrm>
           <a:prstGeom prst="rect">
             <a:avLst/>
@@ -3454,7 +3454,7 @@
         </p:blipFill>
         <p:spPr>
           <a:xfrm>
-            <a:off x="6675120" y="1097280"/>
+            <a:off x="6583680" y="1097280"/>
             <a:ext cx="5212080" cy="3188567"/>
           </a:xfrm>
           <a:prstGeom prst="rect">
@@ -3470,8 +3470,8 @@
         </p:nvSpPr>
         <p:spPr>
           <a:xfrm>
-            <a:off x="365760" y="5943600"/>
-            <a:ext cx="6035040" cy="640080"/>
+            <a:off x="365760" y="5349240"/>
+            <a:ext cx="5852160" cy="365760"/>
           </a:xfrm>
           <a:prstGeom prst="rect">
             <a:avLst/>
@@ -3486,27 +3486,97 @@
           <a:p>
             <a:pPr algn="ctr"/>
             <a:r>
-              <a:rPr sz="1300" b="0" i="1">
+              <a:rPr sz="1100" b="1" i="0">
+                <a:solidFill>
+                  <a:srgbClr val="1F4E79"/>
+                </a:solidFill>
+                <a:latin typeface="Calibri"/>
+              </a:rPr>
+              <a:t>X →  CSI quality κ ∈ [0, 1]    Y →  Rs (bits/s/Hz)</a:t>
+            </a:r>
+          </a:p>
+        </p:txBody>
+      </p:sp>
+      <p:sp>
+        <p:nvSpPr>
+          <p:cNvPr id="7" name="TextBox 6"/>
+          <p:cNvSpPr txBox="1"/>
+          <p:nvPr/>
+        </p:nvSpPr>
+        <p:spPr>
+          <a:xfrm>
+            <a:off x="6583680" y="5349240"/>
+            <a:ext cx="5212080" cy="365760"/>
+          </a:xfrm>
+          <a:prstGeom prst="rect">
+            <a:avLst/>
+          </a:prstGeom>
+          <a:noFill/>
+        </p:spPr>
+        <p:txBody>
+          <a:bodyPr wrap="square" anchor="t" lIns="45720" rIns="45720" tIns="18288" bIns="18288">
+            <a:spAutoFit/>
+          </a:bodyPr>
+          <a:lstStyle/>
+          <a:p>
+            <a:pPr algn="ctr"/>
+            <a:r>
+              <a:rPr sz="1100" b="1" i="0">
+                <a:solidFill>
+                  <a:srgbClr val="1F4E79"/>
+                </a:solidFill>
+                <a:latin typeface="Calibri"/>
+              </a:rPr>
+              <a:t>X →  target rate R₀    Y →  outage P(Rs &lt; R₀)</a:t>
+            </a:r>
+          </a:p>
+        </p:txBody>
+      </p:sp>
+      <p:sp>
+        <p:nvSpPr>
+          <p:cNvPr id="8" name="TextBox 7"/>
+          <p:cNvSpPr txBox="1"/>
+          <p:nvPr/>
+        </p:nvSpPr>
+        <p:spPr>
+          <a:xfrm>
+            <a:off x="365760" y="5760720"/>
+            <a:ext cx="5852160" cy="777240"/>
+          </a:xfrm>
+          <a:prstGeom prst="rect">
+            <a:avLst/>
+          </a:prstGeom>
+          <a:noFill/>
+        </p:spPr>
+        <p:txBody>
+          <a:bodyPr wrap="square" anchor="t" lIns="45720" rIns="45720" tIns="18288" bIns="18288">
+            <a:spAutoFit/>
+          </a:bodyPr>
+          <a:lstStyle/>
+          <a:p>
+            <a:pPr algn="ctr"/>
+            <a:r>
+              <a:rPr sz="1200" b="0" i="1">
                 <a:solidFill>
                   <a:srgbClr val="1A1A1A"/>
                 </a:solidFill>
                 <a:latin typeface="Calibri"/>
               </a:rPr>
-              <a:t>Drag κ from 1 → 0.  Traditional collapses below Fixed near κ = 0.6.  DQN never does.</a:t>
-            </a:r>
-          </a:p>
-        </p:txBody>
-      </p:sp>
-      <p:sp>
-        <p:nvSpPr>
-          <p:cNvPr id="7" name="TextBox 6"/>
-          <p:cNvSpPr txBox="1"/>
-          <p:nvPr/>
-        </p:nvSpPr>
-        <p:spPr>
-          <a:xfrm>
-            <a:off x="6675120" y="5943600"/>
-            <a:ext cx="5212080" cy="640080"/>
+              <a:t>Drag κ from 1 → 0.  Traditional collapses below Fixed near κ ≈ 0.6.  DQN never does.</a:t>
+            </a:r>
+          </a:p>
+        </p:txBody>
+      </p:sp>
+      <p:sp>
+        <p:nvSpPr>
+          <p:cNvPr id="9" name="TextBox 8"/>
+          <p:cNvSpPr txBox="1"/>
+          <p:nvPr/>
+        </p:nvSpPr>
+        <p:spPr>
+          <a:xfrm>
+            <a:off x="6583680" y="5760720"/>
+            <a:ext cx="5212080" cy="777240"/>
           </a:xfrm>
           <a:prstGeom prst="rect">
             <a:avLst/>
@@ -3521,7 +3591,7 @@
           <a:p>
             <a:pPr algn="ctr"/>
             <a:r>
-              <a:rPr sz="1300" b="0" i="1">
+              <a:rPr sz="1200" b="0" i="1">
                 <a:solidFill>
                   <a:srgbClr val="1A1A1A"/>
                 </a:solidFill>
@@ -3534,7 +3604,7 @@
       </p:sp>
       <p:sp>
         <p:nvSpPr>
-          <p:cNvPr id="8" name="TextBox 7"/>
+          <p:cNvPr id="10" name="TextBox 9"/>
           <p:cNvSpPr txBox="1"/>
           <p:nvPr/>
         </p:nvSpPr>
@@ -6497,14 +6567,25 @@
                 </a:solidFill>
                 <a:latin typeface="Calibri"/>
               </a:rPr>
-              <a:t>The failure mode  —  trusting bad intel hurts</a:t>
+              <a:t>BEFORE vs AFTER our AI  —  same channels, same κ</a:t>
+            </a:r>
+          </a:p>
+          <a:p>
+            <a:r>
+              <a:rPr sz="1300" i="1">
+                <a:solidFill>
+                  <a:srgbClr val="E0E5EC"/>
+                </a:solidFill>
+                <a:latin typeface="Calibri"/>
+              </a:rPr>
+              <a:t>Left: only existing schemes.  Right: with DQN added.</a:t>
             </a:r>
           </a:p>
         </p:txBody>
       </p:sp>
       <p:pic>
         <p:nvPicPr>
-          <p:cNvPr id="4" name="Picture 3" descr="04_three_scheme_comparison.png"/>
+          <p:cNvPr id="4" name="Picture 3" descr="12_before_after.png"/>
           <p:cNvPicPr>
             <a:picLocks noChangeAspect="1"/>
           </p:cNvPicPr>
@@ -6518,8 +6599,8 @@
         </p:blipFill>
         <p:spPr>
           <a:xfrm>
-            <a:off x="2194560" y="1051560"/>
-            <a:ext cx="7680960" cy="5683910"/>
+            <a:off x="274320" y="1051560"/>
+            <a:ext cx="11612880" cy="4962129"/>
           </a:xfrm>
           <a:prstGeom prst="rect">
             <a:avLst/>
@@ -6528,42 +6609,158 @@
       </p:pic>
       <p:sp>
         <p:nvSpPr>
-          <p:cNvPr id="5" name="TextBox 4"/>
-          <p:cNvSpPr txBox="1"/>
-          <p:nvPr/>
-        </p:nvSpPr>
-        <p:spPr>
-          <a:xfrm>
-            <a:off x="548640" y="5897880"/>
-            <a:ext cx="11247120" cy="777240"/>
-          </a:xfrm>
-          <a:prstGeom prst="rect">
-            <a:avLst/>
-          </a:prstGeom>
-          <a:noFill/>
-        </p:spPr>
-        <p:txBody>
-          <a:bodyPr wrap="square" anchor="t" lIns="45720" rIns="45720" tIns="18288" bIns="18288">
-            <a:spAutoFit/>
-          </a:bodyPr>
+          <p:cNvPr id="5" name="Rectangle 4"/>
+          <p:cNvSpPr/>
+          <p:nvPr/>
+        </p:nvSpPr>
+        <p:spPr>
+          <a:xfrm>
+            <a:off x="457200" y="5943600"/>
+            <a:ext cx="11247120" cy="502920"/>
+          </a:xfrm>
+          <a:prstGeom prst="rect">
+            <a:avLst/>
+          </a:prstGeom>
+          <a:solidFill>
+            <a:srgbClr val="E5ECF3"/>
+          </a:solidFill>
+          <a:ln w="9525">
+            <a:solidFill>
+              <a:srgbClr val="1F4E79"/>
+            </a:solidFill>
+          </a:ln>
+          <a:effectLst/>
+        </p:spPr>
+        <p:style>
+          <a:lnRef idx="1">
+            <a:schemeClr val="accent1"/>
+          </a:lnRef>
+          <a:fillRef idx="3">
+            <a:schemeClr val="accent1"/>
+          </a:fillRef>
+          <a:effectRef idx="2">
+            <a:schemeClr val="accent1"/>
+          </a:effectRef>
+          <a:fontRef idx="minor">
+            <a:schemeClr val="lt1"/>
+          </a:fontRef>
+        </p:style>
+        <p:txBody>
+          <a:bodyPr rtlCol="0" anchor="ctr"/>
           <a:lstStyle/>
           <a:p>
             <a:pPr algn="ctr"/>
-            <a:r>
-              <a:rPr sz="1500" b="0" i="1">
+          </a:p>
+        </p:txBody>
+      </p:sp>
+      <p:sp>
+        <p:nvSpPr>
+          <p:cNvPr id="6" name="TextBox 5"/>
+          <p:cNvSpPr txBox="1"/>
+          <p:nvPr/>
+        </p:nvSpPr>
+        <p:spPr>
+          <a:xfrm>
+            <a:off x="640080" y="5989320"/>
+            <a:ext cx="5486400" cy="411480"/>
+          </a:xfrm>
+          <a:prstGeom prst="rect">
+            <a:avLst/>
+          </a:prstGeom>
+          <a:noFill/>
+        </p:spPr>
+        <p:txBody>
+          <a:bodyPr wrap="square" anchor="t" lIns="45720" rIns="45720" tIns="18288" bIns="18288">
+            <a:spAutoFit/>
+          </a:bodyPr>
+          <a:lstStyle/>
+          <a:p>
+            <a:pPr algn="l"/>
+            <a:r>
+              <a:rPr sz="1300" b="1" i="0">
+                <a:solidFill>
+                  <a:srgbClr val="1F4E79"/>
+                </a:solidFill>
+                <a:latin typeface="Calibri"/>
+              </a:rPr>
+              <a:t>X axis  →  Transmit power, SNR in dB  (0 to 30)</a:t>
+            </a:r>
+          </a:p>
+        </p:txBody>
+      </p:sp>
+      <p:sp>
+        <p:nvSpPr>
+          <p:cNvPr id="7" name="TextBox 6"/>
+          <p:cNvSpPr txBox="1"/>
+          <p:nvPr/>
+        </p:nvSpPr>
+        <p:spPr>
+          <a:xfrm>
+            <a:off x="5943600" y="5989320"/>
+            <a:ext cx="5760720" cy="411480"/>
+          </a:xfrm>
+          <a:prstGeom prst="rect">
+            <a:avLst/>
+          </a:prstGeom>
+          <a:noFill/>
+        </p:spPr>
+        <p:txBody>
+          <a:bodyPr wrap="square" anchor="t" lIns="45720" rIns="45720" tIns="18288" bIns="18288">
+            <a:spAutoFit/>
+          </a:bodyPr>
+          <a:lstStyle/>
+          <a:p>
+            <a:pPr algn="l"/>
+            <a:r>
+              <a:rPr sz="1300" b="1" i="0">
+                <a:solidFill>
+                  <a:srgbClr val="1F4E79"/>
+                </a:solidFill>
+                <a:latin typeface="Calibri"/>
+              </a:rPr>
+              <a:t>Y axis  →  Average secrecy rate  Rs (bits/s/Hz)  —  higher is better</a:t>
+            </a:r>
+          </a:p>
+        </p:txBody>
+      </p:sp>
+      <p:sp>
+        <p:nvSpPr>
+          <p:cNvPr id="8" name="TextBox 7"/>
+          <p:cNvSpPr txBox="1"/>
+          <p:nvPr/>
+        </p:nvSpPr>
+        <p:spPr>
+          <a:xfrm>
+            <a:off x="457200" y="6492240"/>
+            <a:ext cx="11247120" cy="320040"/>
+          </a:xfrm>
+          <a:prstGeom prst="rect">
+            <a:avLst/>
+          </a:prstGeom>
+          <a:noFill/>
+        </p:spPr>
+        <p:txBody>
+          <a:bodyPr wrap="square" anchor="t" lIns="45720" rIns="45720" tIns="18288" bIns="18288">
+            <a:spAutoFit/>
+          </a:bodyPr>
+          <a:lstStyle/>
+          <a:p>
+            <a:pPr algn="ctr"/>
+            <a:r>
+              <a:rPr sz="1200" b="0" i="1">
                 <a:solidFill>
                   <a:srgbClr val="1A1A1A"/>
                 </a:solidFill>
                 <a:latin typeface="Calibri"/>
               </a:rPr>
-              <a:t>At κ = 0.4 the red Traditional curve drops BELOW the grey Fixed baseline.  The optimiser is doing worse than doing nothing.  The green DQN curve  (next slides) is the fix.</a:t>
-            </a:r>
-          </a:p>
-        </p:txBody>
-      </p:sp>
-      <p:sp>
-        <p:nvSpPr>
-          <p:cNvPr id="6" name="TextBox 5"/>
+              <a:t>Left panel: Traditional (red) drops BELOW Fixed (grey) — trusting noisy intel hurts.    Right panel: DQN (green) holds at or above Fixed everywhere.</a:t>
+            </a:r>
+          </a:p>
+        </p:txBody>
+      </p:sp>
+      <p:sp>
+        <p:nvSpPr>
+          <p:cNvPr id="9" name="TextBox 8"/>
           <p:cNvSpPr txBox="1"/>
           <p:nvPr/>
         </p:nvSpPr>
@@ -8689,8 +8886,8 @@
         </p:blipFill>
         <p:spPr>
           <a:xfrm>
-            <a:off x="2194560" y="1097280"/>
-            <a:ext cx="7680960" cy="5683910"/>
+            <a:off x="2377440" y="1097280"/>
+            <a:ext cx="7315200" cy="5413248"/>
           </a:xfrm>
           <a:prstGeom prst="rect">
             <a:avLst/>
@@ -8705,7 +8902,77 @@
         </p:nvSpPr>
         <p:spPr>
           <a:xfrm>
-            <a:off x="548640" y="5943600"/>
+            <a:off x="457200" y="5532120"/>
+            <a:ext cx="5669280" cy="365760"/>
+          </a:xfrm>
+          <a:prstGeom prst="rect">
+            <a:avLst/>
+          </a:prstGeom>
+          <a:noFill/>
+        </p:spPr>
+        <p:txBody>
+          <a:bodyPr wrap="square" anchor="t" lIns="45720" rIns="45720" tIns="18288" bIns="18288">
+            <a:spAutoFit/>
+          </a:bodyPr>
+          <a:lstStyle/>
+          <a:p>
+            <a:pPr algn="l"/>
+            <a:r>
+              <a:rPr sz="1300" b="1" i="0">
+                <a:solidFill>
+                  <a:srgbClr val="1F4E79"/>
+                </a:solidFill>
+                <a:latin typeface="Calibri"/>
+              </a:rPr>
+              <a:t>X axis  →  Transmit SNR (dB)</a:t>
+            </a:r>
+          </a:p>
+        </p:txBody>
+      </p:sp>
+      <p:sp>
+        <p:nvSpPr>
+          <p:cNvPr id="6" name="TextBox 5"/>
+          <p:cNvSpPr txBox="1"/>
+          <p:nvPr/>
+        </p:nvSpPr>
+        <p:spPr>
+          <a:xfrm>
+            <a:off x="5943600" y="5532120"/>
+            <a:ext cx="5760720" cy="365760"/>
+          </a:xfrm>
+          <a:prstGeom prst="rect">
+            <a:avLst/>
+          </a:prstGeom>
+          <a:noFill/>
+        </p:spPr>
+        <p:txBody>
+          <a:bodyPr wrap="square" anchor="t" lIns="45720" rIns="45720" tIns="18288" bIns="18288">
+            <a:spAutoFit/>
+          </a:bodyPr>
+          <a:lstStyle/>
+          <a:p>
+            <a:pPr algn="l"/>
+            <a:r>
+              <a:rPr sz="1300" b="1" i="0">
+                <a:solidFill>
+                  <a:srgbClr val="1F4E79"/>
+                </a:solidFill>
+                <a:latin typeface="Calibri"/>
+              </a:rPr>
+              <a:t>Top Y  →  absolute Rs (bits/s/Hz);   Bottom Y  →  gain over Fixed</a:t>
+            </a:r>
+          </a:p>
+        </p:txBody>
+      </p:sp>
+      <p:sp>
+        <p:nvSpPr>
+          <p:cNvPr id="7" name="TextBox 6"/>
+          <p:cNvSpPr txBox="1"/>
+          <p:nvPr/>
+        </p:nvSpPr>
+        <p:spPr>
+          <a:xfrm>
+            <a:off x="548640" y="5989320"/>
             <a:ext cx="11247120" cy="731520"/>
           </a:xfrm>
           <a:prstGeom prst="rect">
@@ -8721,7 +8988,7 @@
           <a:p>
             <a:pPr algn="ctr"/>
             <a:r>
-              <a:rPr sz="1400" b="0" i="1">
+              <a:rPr sz="1300" b="0" i="1">
                 <a:solidFill>
                   <a:srgbClr val="1A1A1A"/>
                 </a:solidFill>
@@ -8734,7 +9001,7 @@
       </p:sp>
       <p:sp>
         <p:nvSpPr>
-          <p:cNvPr id="6" name="TextBox 5"/>
+          <p:cNvPr id="8" name="TextBox 7"/>
           <p:cNvSpPr txBox="1"/>
           <p:nvPr/>
         </p:nvSpPr>

--- a/report/slides.pptx
+++ b/report/slides.pptx
@@ -5620,18 +5620,112 @@
               <a:t>The setting  —  MISO wiretap channel</a:t>
             </a:r>
           </a:p>
-        </p:txBody>
-      </p:sp>
-      <p:sp>
-        <p:nvSpPr>
-          <p:cNvPr id="4" name="Rounded Rectangle 3"/>
+          <a:p>
+            <a:r>
+              <a:rPr sz="1300" i="1">
+                <a:solidFill>
+                  <a:srgbClr val="E0E5EC"/>
+                </a:solidFill>
+                <a:latin typeface="Calibri"/>
+              </a:rPr>
+              <a:t>Alice (multi-antenna), Bob (legitimate), Eve (eavesdropper)</a:t>
+            </a:r>
+          </a:p>
+        </p:txBody>
+      </p:sp>
+      <p:pic>
+        <p:nvPicPr>
+          <p:cNvPr id="4" name="Picture 3" descr="14_geometry_sketch.png"/>
+          <p:cNvPicPr>
+            <a:picLocks noChangeAspect="1"/>
+          </p:cNvPicPr>
+          <p:nvPr/>
+        </p:nvPicPr>
+        <p:blipFill>
+          <a:blip r:embed="rId2"/>
+          <a:stretch>
+            <a:fillRect/>
+          </a:stretch>
+        </p:blipFill>
+        <p:spPr>
+          <a:xfrm>
+            <a:off x="365760" y="1005840"/>
+            <a:ext cx="7863840" cy="4806235"/>
+          </a:xfrm>
+          <a:prstGeom prst="rect">
+            <a:avLst/>
+          </a:prstGeom>
+        </p:spPr>
+      </p:pic>
+      <p:sp>
+        <p:nvSpPr>
+          <p:cNvPr id="5" name="TextBox 4"/>
+          <p:cNvSpPr txBox="1"/>
+          <p:nvPr/>
+        </p:nvSpPr>
+        <p:spPr>
+          <a:xfrm>
+            <a:off x="8503920" y="1188720"/>
+            <a:ext cx="3383280" cy="457200"/>
+          </a:xfrm>
+          <a:prstGeom prst="rect">
+            <a:avLst/>
+          </a:prstGeom>
+          <a:noFill/>
+        </p:spPr>
+        <p:txBody>
+          <a:bodyPr wrap="square" anchor="t" lIns="45720" rIns="45720" tIns="18288" bIns="18288">
+            <a:spAutoFit/>
+          </a:bodyPr>
+          <a:lstStyle/>
+          <a:p>
+            <a:pPr algn="l"/>
+            <a:r>
+              <a:rPr sz="1400" b="1" i="0">
+                <a:solidFill>
+                  <a:srgbClr val="1F4E79"/>
+                </a:solidFill>
+                <a:latin typeface="Calibri"/>
+              </a:rPr>
+              <a:t>Alice's intel on Eve is noisy:</a:t>
+            </a:r>
+          </a:p>
+        </p:txBody>
+      </p:sp>
+      <p:pic>
+        <p:nvPicPr>
+          <p:cNvPr id="6" name="Picture 5" descr="eq04_csi.png"/>
+          <p:cNvPicPr>
+            <a:picLocks noChangeAspect="1"/>
+          </p:cNvPicPr>
+          <p:nvPr/>
+        </p:nvPicPr>
+        <p:blipFill>
+          <a:blip r:embed="rId3"/>
+          <a:stretch>
+            <a:fillRect/>
+          </a:stretch>
+        </p:blipFill>
+        <p:spPr>
+          <a:xfrm>
+            <a:off x="8229600" y="1691640"/>
+            <a:ext cx="3840480" cy="379522"/>
+          </a:xfrm>
+          <a:prstGeom prst="rect">
+            <a:avLst/>
+          </a:prstGeom>
+        </p:spPr>
+      </p:pic>
+      <p:sp>
+        <p:nvSpPr>
+          <p:cNvPr id="7" name="Rounded Rectangle 6"/>
           <p:cNvSpPr/>
           <p:nvPr/>
         </p:nvSpPr>
         <p:spPr>
           <a:xfrm>
-            <a:off x="548640" y="1280160"/>
-            <a:ext cx="3657600" cy="2011680"/>
+            <a:off x="8503920" y="3108960"/>
+            <a:ext cx="3383280" cy="2286000"/>
           </a:xfrm>
           <a:prstGeom prst="roundRect">
             <a:avLst/>
@@ -5670,14 +5764,87 @@
       </p:sp>
       <p:sp>
         <p:nvSpPr>
-          <p:cNvPr id="5" name="TextBox 4"/>
-          <p:cNvSpPr txBox="1"/>
-          <p:nvPr/>
-        </p:nvSpPr>
-        <p:spPr>
-          <a:xfrm>
-            <a:off x="548640" y="1417320"/>
-            <a:ext cx="3657600" cy="457200"/>
+          <p:cNvPr id="8" name="TextBox 7"/>
+          <p:cNvSpPr txBox="1"/>
+          <p:nvPr/>
+        </p:nvSpPr>
+        <p:spPr>
+          <a:xfrm>
+            <a:off x="8641080" y="3246120"/>
+            <a:ext cx="3108960" cy="457200"/>
+          </a:xfrm>
+          <a:prstGeom prst="rect">
+            <a:avLst/>
+          </a:prstGeom>
+          <a:noFill/>
+        </p:spPr>
+        <p:txBody>
+          <a:bodyPr wrap="square" anchor="t" lIns="45720" rIns="45720" tIns="18288" bIns="18288">
+            <a:spAutoFit/>
+          </a:bodyPr>
+          <a:lstStyle/>
+          <a:p>
+            <a:pPr algn="l"/>
+            <a:r>
+              <a:rPr sz="1500" b="1" i="0">
+                <a:solidFill>
+                  <a:srgbClr val="1F4E79"/>
+                </a:solidFill>
+                <a:latin typeface="Calibri"/>
+              </a:rPr>
+              <a:t>κ  —  CSI quality</a:t>
+            </a:r>
+          </a:p>
+        </p:txBody>
+      </p:sp>
+      <p:sp>
+        <p:nvSpPr>
+          <p:cNvPr id="9" name="TextBox 8"/>
+          <p:cNvSpPr txBox="1"/>
+          <p:nvPr/>
+        </p:nvSpPr>
+        <p:spPr>
+          <a:xfrm>
+            <a:off x="8641080" y="3703320"/>
+            <a:ext cx="3108960" cy="1554480"/>
+          </a:xfrm>
+          <a:prstGeom prst="rect">
+            <a:avLst/>
+          </a:prstGeom>
+          <a:noFill/>
+        </p:spPr>
+        <p:txBody>
+          <a:bodyPr wrap="square" anchor="t" lIns="45720" rIns="45720" tIns="18288" bIns="18288">
+            <a:spAutoFit/>
+          </a:bodyPr>
+          <a:lstStyle/>
+          <a:p>
+            <a:pPr algn="l"/>
+            <a:r>
+              <a:rPr sz="1200" b="0" i="0">
+                <a:solidFill>
+                  <a:srgbClr val="1A1A1A"/>
+                </a:solidFill>
+                <a:latin typeface="Calibri"/>
+              </a:rPr>
+              <a:t>κ = 1  →  perfect intel
+κ = 0.4  →  realistic
+            (our default)
+κ = 0  →  pure guessing</a:t>
+            </a:r>
+          </a:p>
+        </p:txBody>
+      </p:sp>
+      <p:sp>
+        <p:nvSpPr>
+          <p:cNvPr id="10" name="TextBox 9"/>
+          <p:cNvSpPr txBox="1"/>
+          <p:nvPr/>
+        </p:nvSpPr>
+        <p:spPr>
+          <a:xfrm>
+            <a:off x="365760" y="5760720"/>
+            <a:ext cx="7863840" cy="365760"/>
           </a:xfrm>
           <a:prstGeom prst="rect">
             <a:avLst/>
@@ -5692,27 +5859,27 @@
           <a:p>
             <a:pPr algn="ctr"/>
             <a:r>
-              <a:rPr sz="2400" b="1" i="0">
-                <a:solidFill>
-                  <a:srgbClr val="1F4E79"/>
-                </a:solidFill>
-                <a:latin typeface="Calibri"/>
-              </a:rPr>
-              <a:t>Alice</a:t>
-            </a:r>
-          </a:p>
-        </p:txBody>
-      </p:sp>
-      <p:sp>
-        <p:nvSpPr>
-          <p:cNvPr id="6" name="TextBox 5"/>
-          <p:cNvSpPr txBox="1"/>
-          <p:nvPr/>
-        </p:nvSpPr>
-        <p:spPr>
-          <a:xfrm>
-            <a:off x="640080" y="1920240"/>
-            <a:ext cx="3474720" cy="1371600"/>
+              <a:rPr sz="1200" b="0" i="1">
+                <a:solidFill>
+                  <a:srgbClr val="1A1A1A"/>
+                </a:solidFill>
+                <a:latin typeface="Calibri"/>
+              </a:rPr>
+              <a:t>Green wedge = MRT beam at Bob.   Red hatched region = artificial-noise spray.</a:t>
+            </a:r>
+          </a:p>
+        </p:txBody>
+      </p:sp>
+      <p:sp>
+        <p:nvSpPr>
+          <p:cNvPr id="11" name="TextBox 10"/>
+          <p:cNvSpPr txBox="1"/>
+          <p:nvPr/>
+        </p:nvSpPr>
+        <p:spPr>
+          <a:xfrm>
+            <a:off x="365760" y="6172200"/>
+            <a:ext cx="7863840" cy="365760"/>
           </a:xfrm>
           <a:prstGeom prst="rect">
             <a:avLst/>
@@ -5727,212 +5894,13 @@
           <a:p>
             <a:pPr algn="ctr"/>
             <a:r>
-              <a:rPr sz="1400" b="0" i="0">
+              <a:rPr sz="1200" b="0" i="1">
                 <a:solidFill>
                   <a:srgbClr val="1A1A1A"/>
                 </a:solidFill>
                 <a:latin typeface="Calibri"/>
               </a:rPr>
-              <a:t>Multi-antenna transmitter  (Nt antennas).
-Beams data toward Bob, sprays AN elsewhere.</a:t>
-            </a:r>
-          </a:p>
-        </p:txBody>
-      </p:sp>
-      <p:sp>
-        <p:nvSpPr>
-          <p:cNvPr id="7" name="Rounded Rectangle 6"/>
-          <p:cNvSpPr/>
-          <p:nvPr/>
-        </p:nvSpPr>
-        <p:spPr>
-          <a:xfrm>
-            <a:off x="4572000" y="1280160"/>
-            <a:ext cx="3657600" cy="2011680"/>
-          </a:xfrm>
-          <a:prstGeom prst="roundRect">
-            <a:avLst/>
-          </a:prstGeom>
-          <a:solidFill>
-            <a:srgbClr val="E0F1E0"/>
-          </a:solidFill>
-          <a:ln w="15875">
-            <a:solidFill>
-              <a:srgbClr val="2CA02C"/>
-            </a:solidFill>
-          </a:ln>
-          <a:effectLst/>
-        </p:spPr>
-        <p:style>
-          <a:lnRef idx="1">
-            <a:schemeClr val="accent1"/>
-          </a:lnRef>
-          <a:fillRef idx="3">
-            <a:schemeClr val="accent1"/>
-          </a:fillRef>
-          <a:effectRef idx="2">
-            <a:schemeClr val="accent1"/>
-          </a:effectRef>
-          <a:fontRef idx="minor">
-            <a:schemeClr val="lt1"/>
-          </a:fontRef>
-        </p:style>
-        <p:txBody>
-          <a:bodyPr rtlCol="0" anchor="ctr"/>
-          <a:lstStyle/>
-          <a:p>
-            <a:pPr algn="ctr"/>
-          </a:p>
-        </p:txBody>
-      </p:sp>
-      <p:sp>
-        <p:nvSpPr>
-          <p:cNvPr id="8" name="TextBox 7"/>
-          <p:cNvSpPr txBox="1"/>
-          <p:nvPr/>
-        </p:nvSpPr>
-        <p:spPr>
-          <a:xfrm>
-            <a:off x="4572000" y="1417320"/>
-            <a:ext cx="3657600" cy="457200"/>
-          </a:xfrm>
-          <a:prstGeom prst="rect">
-            <a:avLst/>
-          </a:prstGeom>
-          <a:noFill/>
-        </p:spPr>
-        <p:txBody>
-          <a:bodyPr wrap="square" anchor="t" lIns="45720" rIns="45720" tIns="18288" bIns="18288">
-            <a:spAutoFit/>
-          </a:bodyPr>
-          <a:lstStyle/>
-          <a:p>
-            <a:pPr algn="ctr"/>
-            <a:r>
-              <a:rPr sz="2400" b="1" i="0">
-                <a:solidFill>
-                  <a:srgbClr val="2CA02C"/>
-                </a:solidFill>
-                <a:latin typeface="Calibri"/>
-              </a:rPr>
-              <a:t>Bob</a:t>
-            </a:r>
-          </a:p>
-        </p:txBody>
-      </p:sp>
-      <p:sp>
-        <p:nvSpPr>
-          <p:cNvPr id="9" name="TextBox 8"/>
-          <p:cNvSpPr txBox="1"/>
-          <p:nvPr/>
-        </p:nvSpPr>
-        <p:spPr>
-          <a:xfrm>
-            <a:off x="4663440" y="1920240"/>
-            <a:ext cx="3474720" cy="1371600"/>
-          </a:xfrm>
-          <a:prstGeom prst="rect">
-            <a:avLst/>
-          </a:prstGeom>
-          <a:noFill/>
-        </p:spPr>
-        <p:txBody>
-          <a:bodyPr wrap="square" anchor="t" lIns="45720" rIns="45720" tIns="18288" bIns="18288">
-            <a:spAutoFit/>
-          </a:bodyPr>
-          <a:lstStyle/>
-          <a:p>
-            <a:pPr algn="ctr"/>
-            <a:r>
-              <a:rPr sz="1400" b="0" i="0">
-                <a:solidFill>
-                  <a:srgbClr val="1A1A1A"/>
-                </a:solidFill>
-                <a:latin typeface="Calibri"/>
-              </a:rPr>
-              <a:t>Legitimate receiver, single antenna.
-Hears the signal cleanly  —  AN cancels at his location.</a:t>
-            </a:r>
-          </a:p>
-        </p:txBody>
-      </p:sp>
-      <p:sp>
-        <p:nvSpPr>
-          <p:cNvPr id="10" name="Rounded Rectangle 9"/>
-          <p:cNvSpPr/>
-          <p:nvPr/>
-        </p:nvSpPr>
-        <p:spPr>
-          <a:xfrm>
-            <a:off x="8595360" y="1280160"/>
-            <a:ext cx="3108960" cy="2011680"/>
-          </a:xfrm>
-          <a:prstGeom prst="roundRect">
-            <a:avLst/>
-          </a:prstGeom>
-          <a:solidFill>
-            <a:srgbClr val="FAE7E6"/>
-          </a:solidFill>
-          <a:ln w="15875">
-            <a:solidFill>
-              <a:srgbClr val="C0504D"/>
-            </a:solidFill>
-          </a:ln>
-          <a:effectLst/>
-        </p:spPr>
-        <p:style>
-          <a:lnRef idx="1">
-            <a:schemeClr val="accent1"/>
-          </a:lnRef>
-          <a:fillRef idx="3">
-            <a:schemeClr val="accent1"/>
-          </a:fillRef>
-          <a:effectRef idx="2">
-            <a:schemeClr val="accent1"/>
-          </a:effectRef>
-          <a:fontRef idx="minor">
-            <a:schemeClr val="lt1"/>
-          </a:fontRef>
-        </p:style>
-        <p:txBody>
-          <a:bodyPr rtlCol="0" anchor="ctr"/>
-          <a:lstStyle/>
-          <a:p>
-            <a:pPr algn="ctr"/>
-          </a:p>
-        </p:txBody>
-      </p:sp>
-      <p:sp>
-        <p:nvSpPr>
-          <p:cNvPr id="11" name="TextBox 10"/>
-          <p:cNvSpPr txBox="1"/>
-          <p:nvPr/>
-        </p:nvSpPr>
-        <p:spPr>
-          <a:xfrm>
-            <a:off x="8595360" y="1417320"/>
-            <a:ext cx="3108960" cy="457200"/>
-          </a:xfrm>
-          <a:prstGeom prst="rect">
-            <a:avLst/>
-          </a:prstGeom>
-          <a:noFill/>
-        </p:spPr>
-        <p:txBody>
-          <a:bodyPr wrap="square" anchor="t" lIns="45720" rIns="45720" tIns="18288" bIns="18288">
-            <a:spAutoFit/>
-          </a:bodyPr>
-          <a:lstStyle/>
-          <a:p>
-            <a:pPr algn="ctr"/>
-            <a:r>
-              <a:rPr sz="2400" b="1" i="0">
-                <a:solidFill>
-                  <a:srgbClr val="C0504D"/>
-                </a:solidFill>
-                <a:latin typeface="Calibri"/>
-              </a:rPr>
-              <a:t>Eve</a:t>
+              <a:t>The dial ρ controls how power is split between green (message) and red (jamming).</a:t>
             </a:r>
           </a:p>
         </p:txBody>
@@ -5940,136 +5908,6 @@
       <p:sp>
         <p:nvSpPr>
           <p:cNvPr id="12" name="TextBox 11"/>
-          <p:cNvSpPr txBox="1"/>
-          <p:nvPr/>
-        </p:nvSpPr>
-        <p:spPr>
-          <a:xfrm>
-            <a:off x="8686800" y="1920240"/>
-            <a:ext cx="2926080" cy="1371600"/>
-          </a:xfrm>
-          <a:prstGeom prst="rect">
-            <a:avLst/>
-          </a:prstGeom>
-          <a:noFill/>
-        </p:spPr>
-        <p:txBody>
-          <a:bodyPr wrap="square" anchor="t" lIns="45720" rIns="45720" tIns="18288" bIns="18288">
-            <a:spAutoFit/>
-          </a:bodyPr>
-          <a:lstStyle/>
-          <a:p>
-            <a:pPr algn="ctr"/>
-            <a:r>
-              <a:rPr sz="1400" b="0" i="0">
-                <a:solidFill>
-                  <a:srgbClr val="1A1A1A"/>
-                </a:solidFill>
-                <a:latin typeface="Calibri"/>
-              </a:rPr>
-              <a:t>Passive eavesdropper.
-Hears signal-plus-AN.  Trying to decode anyway.</a:t>
-            </a:r>
-          </a:p>
-        </p:txBody>
-      </p:sp>
-      <p:sp>
-        <p:nvSpPr>
-          <p:cNvPr id="13" name="TextBox 12"/>
-          <p:cNvSpPr txBox="1"/>
-          <p:nvPr/>
-        </p:nvSpPr>
-        <p:spPr>
-          <a:xfrm>
-            <a:off x="548640" y="3657600"/>
-            <a:ext cx="11247120" cy="457200"/>
-          </a:xfrm>
-          <a:prstGeom prst="rect">
-            <a:avLst/>
-          </a:prstGeom>
-          <a:noFill/>
-        </p:spPr>
-        <p:txBody>
-          <a:bodyPr wrap="square" anchor="t" lIns="45720" rIns="45720" tIns="18288" bIns="18288">
-            <a:spAutoFit/>
-          </a:bodyPr>
-          <a:lstStyle/>
-          <a:p>
-            <a:pPr algn="l"/>
-            <a:r>
-              <a:rPr sz="1800" b="0" i="0">
-                <a:solidFill>
-                  <a:srgbClr val="1A1A1A"/>
-                </a:solidFill>
-                <a:latin typeface="Calibri"/>
-              </a:rPr>
-              <a:t>Alice's intel on Eve is noisy.  We model it as:</a:t>
-            </a:r>
-          </a:p>
-        </p:txBody>
-      </p:sp>
-      <p:pic>
-        <p:nvPicPr>
-          <p:cNvPr id="14" name="Picture 13" descr="eq04_csi.png"/>
-          <p:cNvPicPr>
-            <a:picLocks noChangeAspect="1"/>
-          </p:cNvPicPr>
-          <p:nvPr/>
-        </p:nvPicPr>
-        <p:blipFill>
-          <a:blip r:embed="rId2"/>
-          <a:stretch>
-            <a:fillRect/>
-          </a:stretch>
-        </p:blipFill>
-        <p:spPr>
-          <a:xfrm>
-            <a:off x="2286000" y="4206240"/>
-            <a:ext cx="7680960" cy="759043"/>
-          </a:xfrm>
-          <a:prstGeom prst="rect">
-            <a:avLst/>
-          </a:prstGeom>
-        </p:spPr>
-      </p:pic>
-      <p:sp>
-        <p:nvSpPr>
-          <p:cNvPr id="15" name="TextBox 14"/>
-          <p:cNvSpPr txBox="1"/>
-          <p:nvPr/>
-        </p:nvSpPr>
-        <p:spPr>
-          <a:xfrm>
-            <a:off x="548640" y="5852160"/>
-            <a:ext cx="11247120" cy="365760"/>
-          </a:xfrm>
-          <a:prstGeom prst="rect">
-            <a:avLst/>
-          </a:prstGeom>
-          <a:noFill/>
-        </p:spPr>
-        <p:txBody>
-          <a:bodyPr wrap="square" anchor="t" lIns="45720" rIns="45720" tIns="18288" bIns="18288">
-            <a:spAutoFit/>
-          </a:bodyPr>
-          <a:lstStyle/>
-          <a:p>
-            <a:pPr algn="ctr"/>
-            <a:r>
-              <a:rPr sz="1800" b="0" i="1">
-                <a:solidFill>
-                  <a:srgbClr val="1F4E79"/>
-                </a:solidFill>
-                <a:latin typeface="Calibri"/>
-              </a:rPr>
-              <a:t>κ = 1  →  perfect intel        κ = 0  →  pure guessing</a:t>
-            </a:r>
-          </a:p>
-        </p:txBody>
-      </p:sp>
-      <p:sp>
-        <p:nvSpPr>
-          <p:cNvPr id="16" name="TextBox 15"/>
           <p:cNvSpPr txBox="1"/>
           <p:nvPr/>
         </p:nvSpPr>
@@ -8323,7 +8161,7 @@
       </p:sp>
       <p:pic>
         <p:nvPicPr>
-          <p:cNvPr id="4" name="Picture 3" descr="03_dqn_training_curve.png"/>
+          <p:cNvPr id="4" name="Picture 3" descr="13_training_curve_clean.png"/>
           <p:cNvPicPr>
             <a:picLocks noChangeAspect="1"/>
           </p:cNvPicPr>
@@ -8338,7 +8176,7 @@
         <p:spPr>
           <a:xfrm>
             <a:off x="457200" y="1097280"/>
-            <a:ext cx="6766560" cy="4843432"/>
+            <a:ext cx="6766560" cy="3742372"/>
           </a:xfrm>
           <a:prstGeom prst="rect">
             <a:avLst/>
@@ -8375,7 +8213,7 @@
                 </a:solidFill>
                 <a:latin typeface="Calibri"/>
               </a:rPr>
-              <a:t>Running average reward climbs as ε → 0 and the policy stabilises.</a:t>
+              <a:t>Smoothed running-average reward climbs as ε decays to 0.05; policy stabilises in the second half.</a:t>
             </a:r>
           </a:p>
         </p:txBody>

--- a/report/slides.pptx
+++ b/report/slides.pptx
@@ -5649,8 +5649,8 @@
         </p:blipFill>
         <p:spPr>
           <a:xfrm>
-            <a:off x="365760" y="1005840"/>
-            <a:ext cx="7863840" cy="4806235"/>
+            <a:off x="1463040" y="960120"/>
+            <a:ext cx="9235440" cy="5644532"/>
           </a:xfrm>
           <a:prstGeom prst="rect">
             <a:avLst/>
@@ -5659,73 +5659,14 @@
       </p:pic>
       <p:sp>
         <p:nvSpPr>
-          <p:cNvPr id="5" name="TextBox 4"/>
-          <p:cNvSpPr txBox="1"/>
-          <p:nvPr/>
-        </p:nvSpPr>
-        <p:spPr>
-          <a:xfrm>
-            <a:off x="8503920" y="1188720"/>
-            <a:ext cx="3383280" cy="457200"/>
-          </a:xfrm>
-          <a:prstGeom prst="rect">
-            <a:avLst/>
-          </a:prstGeom>
-          <a:noFill/>
-        </p:spPr>
-        <p:txBody>
-          <a:bodyPr wrap="square" anchor="t" lIns="45720" rIns="45720" tIns="18288" bIns="18288">
-            <a:spAutoFit/>
-          </a:bodyPr>
-          <a:lstStyle/>
-          <a:p>
-            <a:pPr algn="l"/>
-            <a:r>
-              <a:rPr sz="1400" b="1" i="0">
-                <a:solidFill>
-                  <a:srgbClr val="1F4E79"/>
-                </a:solidFill>
-                <a:latin typeface="Calibri"/>
-              </a:rPr>
-              <a:t>Alice's intel on Eve is noisy:</a:t>
-            </a:r>
-          </a:p>
-        </p:txBody>
-      </p:sp>
-      <p:pic>
-        <p:nvPicPr>
-          <p:cNvPr id="6" name="Picture 5" descr="eq04_csi.png"/>
-          <p:cNvPicPr>
-            <a:picLocks noChangeAspect="1"/>
-          </p:cNvPicPr>
-          <p:nvPr/>
-        </p:nvPicPr>
-        <p:blipFill>
-          <a:blip r:embed="rId3"/>
-          <a:stretch>
-            <a:fillRect/>
-          </a:stretch>
-        </p:blipFill>
-        <p:spPr>
-          <a:xfrm>
-            <a:off x="8229600" y="1691640"/>
-            <a:ext cx="3840480" cy="379522"/>
-          </a:xfrm>
-          <a:prstGeom prst="rect">
-            <a:avLst/>
-          </a:prstGeom>
-        </p:spPr>
-      </p:pic>
-      <p:sp>
-        <p:nvSpPr>
-          <p:cNvPr id="7" name="Rounded Rectangle 6"/>
+          <p:cNvPr id="5" name="Rounded Rectangle 4"/>
           <p:cNvSpPr/>
           <p:nvPr/>
         </p:nvSpPr>
         <p:spPr>
           <a:xfrm>
-            <a:off x="8503920" y="3108960"/>
-            <a:ext cx="3383280" cy="2286000"/>
+            <a:off x="457200" y="5166360"/>
+            <a:ext cx="5852160" cy="1508760"/>
           </a:xfrm>
           <a:prstGeom prst="roundRect">
             <a:avLst/>
@@ -5764,14 +5705,14 @@
       </p:sp>
       <p:sp>
         <p:nvSpPr>
-          <p:cNvPr id="8" name="TextBox 7"/>
-          <p:cNvSpPr txBox="1"/>
-          <p:nvPr/>
-        </p:nvSpPr>
-        <p:spPr>
-          <a:xfrm>
-            <a:off x="8641080" y="3246120"/>
-            <a:ext cx="3108960" cy="457200"/>
+          <p:cNvPr id="6" name="TextBox 5"/>
+          <p:cNvSpPr txBox="1"/>
+          <p:nvPr/>
+        </p:nvSpPr>
+        <p:spPr>
+          <a:xfrm>
+            <a:off x="594360" y="5257800"/>
+            <a:ext cx="5577840" cy="365760"/>
           </a:xfrm>
           <a:prstGeom prst="rect">
             <a:avLst/>
@@ -5786,14 +5727,84 @@
           <a:p>
             <a:pPr algn="l"/>
             <a:r>
-              <a:rPr sz="1500" b="1" i="0">
+              <a:rPr sz="1300" b="1" i="0">
                 <a:solidFill>
                   <a:srgbClr val="1F4E79"/>
                 </a:solidFill>
                 <a:latin typeface="Calibri"/>
               </a:rPr>
-              <a:t>κ  —  CSI quality</a:t>
-            </a:r>
+              <a:t>Imperfect CSI model</a:t>
+            </a:r>
+          </a:p>
+        </p:txBody>
+      </p:sp>
+      <p:pic>
+        <p:nvPicPr>
+          <p:cNvPr id="7" name="Picture 6" descr="eq04_csi.png"/>
+          <p:cNvPicPr>
+            <a:picLocks noChangeAspect="1"/>
+          </p:cNvPicPr>
+          <p:nvPr/>
+        </p:nvPicPr>
+        <p:blipFill>
+          <a:blip r:embed="rId3"/>
+          <a:stretch>
+            <a:fillRect/>
+          </a:stretch>
+        </p:blipFill>
+        <p:spPr>
+          <a:xfrm>
+            <a:off x="777240" y="5669280"/>
+            <a:ext cx="5212080" cy="515065"/>
+          </a:xfrm>
+          <a:prstGeom prst="rect">
+            <a:avLst/>
+          </a:prstGeom>
+        </p:spPr>
+      </p:pic>
+      <p:sp>
+        <p:nvSpPr>
+          <p:cNvPr id="8" name="Rounded Rectangle 7"/>
+          <p:cNvSpPr/>
+          <p:nvPr/>
+        </p:nvSpPr>
+        <p:spPr>
+          <a:xfrm>
+            <a:off x="6492240" y="5166360"/>
+            <a:ext cx="5212080" cy="1508760"/>
+          </a:xfrm>
+          <a:prstGeom prst="roundRect">
+            <a:avLst/>
+          </a:prstGeom>
+          <a:solidFill>
+            <a:srgbClr val="E0F1E0"/>
+          </a:solidFill>
+          <a:ln w="15875">
+            <a:solidFill>
+              <a:srgbClr val="2CA02C"/>
+            </a:solidFill>
+          </a:ln>
+          <a:effectLst/>
+        </p:spPr>
+        <p:style>
+          <a:lnRef idx="1">
+            <a:schemeClr val="accent1"/>
+          </a:lnRef>
+          <a:fillRef idx="3">
+            <a:schemeClr val="accent1"/>
+          </a:fillRef>
+          <a:effectRef idx="2">
+            <a:schemeClr val="accent1"/>
+          </a:effectRef>
+          <a:fontRef idx="minor">
+            <a:schemeClr val="lt1"/>
+          </a:fontRef>
+        </p:style>
+        <p:txBody>
+          <a:bodyPr rtlCol="0" anchor="ctr"/>
+          <a:lstStyle/>
+          <a:p>
+            <a:pPr algn="ctr"/>
           </a:p>
         </p:txBody>
       </p:sp>
@@ -5805,8 +5816,8 @@
         </p:nvSpPr>
         <p:spPr>
           <a:xfrm>
-            <a:off x="8641080" y="3703320"/>
-            <a:ext cx="3108960" cy="1554480"/>
+            <a:off x="6629400" y="5257800"/>
+            <a:ext cx="4937760" cy="365760"/>
           </a:xfrm>
           <a:prstGeom prst="rect">
             <a:avLst/>
@@ -5821,51 +5832,48 @@
           <a:p>
             <a:pPr algn="l"/>
             <a:r>
+              <a:rPr sz="1300" b="1" i="0">
+                <a:solidFill>
+                  <a:srgbClr val="2CA02C"/>
+                </a:solidFill>
+                <a:latin typeface="Calibri"/>
+              </a:rPr>
+              <a:t>κ  —  CSI quality dial</a:t>
+            </a:r>
+          </a:p>
+        </p:txBody>
+      </p:sp>
+      <p:sp>
+        <p:nvSpPr>
+          <p:cNvPr id="10" name="TextBox 9"/>
+          <p:cNvSpPr txBox="1"/>
+          <p:nvPr/>
+        </p:nvSpPr>
+        <p:spPr>
+          <a:xfrm>
+            <a:off x="6629400" y="5669280"/>
+            <a:ext cx="4937760" cy="914400"/>
+          </a:xfrm>
+          <a:prstGeom prst="rect">
+            <a:avLst/>
+          </a:prstGeom>
+          <a:noFill/>
+        </p:spPr>
+        <p:txBody>
+          <a:bodyPr wrap="square" anchor="t" lIns="45720" rIns="45720" tIns="18288" bIns="18288">
+            <a:spAutoFit/>
+          </a:bodyPr>
+          <a:lstStyle/>
+          <a:p>
+            <a:pPr algn="l"/>
+            <a:r>
               <a:rPr sz="1200" b="0" i="0">
                 <a:solidFill>
                   <a:srgbClr val="1A1A1A"/>
                 </a:solidFill>
                 <a:latin typeface="Calibri"/>
               </a:rPr>
-              <a:t>κ = 1  →  perfect intel
-κ = 0.4  →  realistic
-            (our default)
-κ = 0  →  pure guessing</a:t>
-            </a:r>
-          </a:p>
-        </p:txBody>
-      </p:sp>
-      <p:sp>
-        <p:nvSpPr>
-          <p:cNvPr id="10" name="TextBox 9"/>
-          <p:cNvSpPr txBox="1"/>
-          <p:nvPr/>
-        </p:nvSpPr>
-        <p:spPr>
-          <a:xfrm>
-            <a:off x="365760" y="5760720"/>
-            <a:ext cx="7863840" cy="365760"/>
-          </a:xfrm>
-          <a:prstGeom prst="rect">
-            <a:avLst/>
-          </a:prstGeom>
-          <a:noFill/>
-        </p:spPr>
-        <p:txBody>
-          <a:bodyPr wrap="square" anchor="t" lIns="45720" rIns="45720" tIns="18288" bIns="18288">
-            <a:spAutoFit/>
-          </a:bodyPr>
-          <a:lstStyle/>
-          <a:p>
-            <a:pPr algn="ctr"/>
-            <a:r>
-              <a:rPr sz="1200" b="0" i="1">
-                <a:solidFill>
-                  <a:srgbClr val="1A1A1A"/>
-                </a:solidFill>
-                <a:latin typeface="Calibri"/>
-              </a:rPr>
-              <a:t>Green wedge = MRT beam at Bob.   Red hatched region = artificial-noise spray.</a:t>
+              <a:t>κ = 1  perfect intel    ·    κ = 0.4  our default    ·    κ = 0  pure noise</a:t>
             </a:r>
           </a:p>
         </p:txBody>
@@ -5873,41 +5881,6 @@
       <p:sp>
         <p:nvSpPr>
           <p:cNvPr id="11" name="TextBox 10"/>
-          <p:cNvSpPr txBox="1"/>
-          <p:nvPr/>
-        </p:nvSpPr>
-        <p:spPr>
-          <a:xfrm>
-            <a:off x="365760" y="6172200"/>
-            <a:ext cx="7863840" cy="365760"/>
-          </a:xfrm>
-          <a:prstGeom prst="rect">
-            <a:avLst/>
-          </a:prstGeom>
-          <a:noFill/>
-        </p:spPr>
-        <p:txBody>
-          <a:bodyPr wrap="square" anchor="t" lIns="45720" rIns="45720" tIns="18288" bIns="18288">
-            <a:spAutoFit/>
-          </a:bodyPr>
-          <a:lstStyle/>
-          <a:p>
-            <a:pPr algn="ctr"/>
-            <a:r>
-              <a:rPr sz="1200" b="0" i="1">
-                <a:solidFill>
-                  <a:srgbClr val="1A1A1A"/>
-                </a:solidFill>
-                <a:latin typeface="Calibri"/>
-              </a:rPr>
-              <a:t>The dial ρ controls how power is split between green (message) and red (jamming).</a:t>
-            </a:r>
-          </a:p>
-        </p:txBody>
-      </p:sp>
-      <p:sp>
-        <p:nvSpPr>
-          <p:cNvPr id="12" name="TextBox 11"/>
           <p:cNvSpPr txBox="1"/>
           <p:nvPr/>
         </p:nvSpPr>

--- a/report/slides.pptx
+++ b/report/slides.pptx
@@ -18,6 +18,7 @@
     <p:sldId id="266" r:id="rId17"/>
     <p:sldId id="267" r:id="rId18"/>
     <p:sldId id="268" r:id="rId19"/>
+    <p:sldId id="269" r:id="rId20"/>
   </p:sldIdLst>
   <p:sldSz cx="12191695" cy="6858000" type="screen4x3"/>
   <p:notesSz cx="6858000" cy="9144000"/>
@@ -3728,21 +3729,767 @@
                 </a:solidFill>
                 <a:latin typeface="Calibri"/>
               </a:rPr>
-              <a:t>Live demo  —  Streamlit GUI</a:t>
-            </a:r>
-          </a:p>
-        </p:txBody>
-      </p:sp>
-      <p:sp>
-        <p:nvSpPr>
-          <p:cNvPr id="4" name="TextBox 3"/>
-          <p:cNvSpPr txBox="1"/>
-          <p:nvPr/>
-        </p:nvSpPr>
-        <p:spPr>
-          <a:xfrm>
-            <a:off x="1371600" y="1280160"/>
-            <a:ext cx="9418320" cy="457200"/>
+              <a:t>With vs Without our AI  —  the numbers</a:t>
+            </a:r>
+          </a:p>
+          <a:p>
+            <a:r>
+              <a:rPr sz="1300" i="1">
+                <a:solidFill>
+                  <a:srgbClr val="E0E5EC"/>
+                </a:solidFill>
+                <a:latin typeface="Calibri"/>
+              </a:rPr>
+              <a:t>Average secrecy rate Rs (bits/s/Hz) across five operating points, same Monte Carlo channels</a:t>
+            </a:r>
+          </a:p>
+        </p:txBody>
+      </p:sp>
+      <p:graphicFrame>
+        <p:nvGraphicFramePr>
+          <p:cNvPr id="4" name="Table 3"/>
+          <p:cNvGraphicFramePr>
+            <a:graphicFrameLocks noGrp="1"/>
+          </p:cNvGraphicFramePr>
+          <p:nvPr/>
+        </p:nvGraphicFramePr>
+        <p:xfrm>
+          <a:off x="457200" y="1143000"/>
+          <a:ext cx="11247120" cy="3931920"/>
+        </p:xfrm>
+        <a:graphic>
+          <a:graphicData uri="http://schemas.openxmlformats.org/drawingml/2006/table">
+            <a:tbl>
+              <a:tblPr firstRow="1" bandRow="1">
+                <a:tableStyleId>{5C22544A-7EE6-4342-B048-85BDC9FD1C3A}</a:tableStyleId>
+              </a:tblPr>
+              <a:tblGrid>
+                <a:gridCol w="3383280"/>
+                <a:gridCol w="1828800"/>
+                <a:gridCol w="2103120"/>
+                <a:gridCol w="1828800"/>
+                <a:gridCol w="2103120"/>
+              </a:tblGrid>
+              <a:tr h="777240">
+                <a:tc>
+                  <a:txBody>
+                    <a:bodyPr/>
+                    <a:lstStyle/>
+                    <a:p>
+                      <a:pPr algn="ctr"/>
+                      <a:r>
+                        <a:rPr sz="1200" b="1">
+                          <a:solidFill>
+                            <a:srgbClr val="FFFFFF"/>
+                          </a:solidFill>
+                          <a:latin typeface="Calibri"/>
+                        </a:rPr>
+                        <a:t>Scenario</a:t>
+                      </a:r>
+                    </a:p>
+                  </a:txBody>
+                  <a:tcPr>
+                    <a:solidFill>
+                      <a:srgbClr val="1F4E79"/>
+                    </a:solidFill>
+                  </a:tcPr>
+                </a:tc>
+                <a:tc>
+                  <a:txBody>
+                    <a:bodyPr/>
+                    <a:lstStyle/>
+                    <a:p>
+                      <a:pPr algn="ctr"/>
+                      <a:r>
+                        <a:rPr sz="1200" b="1">
+                          <a:solidFill>
+                            <a:srgbClr val="FFFFFF"/>
+                          </a:solidFill>
+                          <a:latin typeface="Calibri"/>
+                        </a:rPr>
+                        <a:t>Without AI:
+Fixed (ρ = 0.5)</a:t>
+                      </a:r>
+                    </a:p>
+                  </a:txBody>
+                  <a:tcPr>
+                    <a:solidFill>
+                      <a:srgbClr val="1F4E79"/>
+                    </a:solidFill>
+                  </a:tcPr>
+                </a:tc>
+                <a:tc>
+                  <a:txBody>
+                    <a:bodyPr/>
+                    <a:lstStyle/>
+                    <a:p>
+                      <a:pPr algn="ctr"/>
+                      <a:r>
+                        <a:rPr sz="1200" b="1">
+                          <a:solidFill>
+                            <a:srgbClr val="FFFFFF"/>
+                          </a:solidFill>
+                          <a:latin typeface="Calibri"/>
+                        </a:rPr>
+                        <a:t>Without AI:
+Traditional (noisy ĥE)</a:t>
+                      </a:r>
+                    </a:p>
+                  </a:txBody>
+                  <a:tcPr>
+                    <a:solidFill>
+                      <a:srgbClr val="1F4E79"/>
+                    </a:solidFill>
+                  </a:tcPr>
+                </a:tc>
+                <a:tc>
+                  <a:txBody>
+                    <a:bodyPr/>
+                    <a:lstStyle/>
+                    <a:p>
+                      <a:pPr algn="ctr"/>
+                      <a:r>
+                        <a:rPr sz="1200" b="1">
+                          <a:solidFill>
+                            <a:srgbClr val="FFFFFF"/>
+                          </a:solidFill>
+                          <a:latin typeface="Calibri"/>
+                        </a:rPr>
+                        <a:t>With AI:
+DQN (ours)</a:t>
+                      </a:r>
+                    </a:p>
+                  </a:txBody>
+                  <a:tcPr>
+                    <a:solidFill>
+                      <a:srgbClr val="1F4E79"/>
+                    </a:solidFill>
+                  </a:tcPr>
+                </a:tc>
+                <a:tc>
+                  <a:txBody>
+                    <a:bodyPr/>
+                    <a:lstStyle/>
+                    <a:p>
+                      <a:pPr algn="ctr"/>
+                      <a:r>
+                        <a:rPr sz="1200" b="1">
+                          <a:solidFill>
+                            <a:srgbClr val="FFFFFF"/>
+                          </a:solidFill>
+                          <a:latin typeface="Calibri"/>
+                        </a:rPr>
+                        <a:t>DQN gain
+over Traditional</a:t>
+                      </a:r>
+                    </a:p>
+                  </a:txBody>
+                  <a:tcPr>
+                    <a:solidFill>
+                      <a:srgbClr val="1F4E79"/>
+                    </a:solidFill>
+                  </a:tcPr>
+                </a:tc>
+              </a:tr>
+              <a:tr h="594360">
+                <a:tc>
+                  <a:txBody>
+                    <a:bodyPr/>
+                    <a:lstStyle/>
+                    <a:p>
+                      <a:pPr algn="l"/>
+                      <a:r>
+                        <a:rPr sz="1300">
+                          <a:solidFill>
+                            <a:srgbClr val="1A1A1A"/>
+                          </a:solidFill>
+                          <a:latin typeface="Calibri"/>
+                        </a:rPr>
+                        <a:t>Nt = 4,  SNR = 15 dB,  κ = 0.4</a:t>
+                      </a:r>
+                    </a:p>
+                  </a:txBody>
+                  <a:tcPr>
+                    <a:solidFill>
+                      <a:srgbClr val="F4F4F6"/>
+                    </a:solidFill>
+                  </a:tcPr>
+                </a:tc>
+                <a:tc>
+                  <a:txBody>
+                    <a:bodyPr/>
+                    <a:lstStyle/>
+                    <a:p>
+                      <a:pPr algn="ctr"/>
+                      <a:r>
+                        <a:rPr sz="1500">
+                          <a:solidFill>
+                            <a:srgbClr val="1A1A1A"/>
+                          </a:solidFill>
+                          <a:latin typeface="Calibri"/>
+                        </a:rPr>
+                        <a:t>4.879</a:t>
+                      </a:r>
+                    </a:p>
+                  </a:txBody>
+                  <a:tcPr>
+                    <a:solidFill>
+                      <a:srgbClr val="F4F4F6"/>
+                    </a:solidFill>
+                  </a:tcPr>
+                </a:tc>
+                <a:tc>
+                  <a:txBody>
+                    <a:bodyPr/>
+                    <a:lstStyle/>
+                    <a:p>
+                      <a:pPr algn="ctr"/>
+                      <a:r>
+                        <a:rPr sz="1500">
+                          <a:solidFill>
+                            <a:srgbClr val="1A1A1A"/>
+                          </a:solidFill>
+                          <a:latin typeface="Calibri"/>
+                        </a:rPr>
+                        <a:t>4.822</a:t>
+                      </a:r>
+                    </a:p>
+                  </a:txBody>
+                  <a:tcPr>
+                    <a:solidFill>
+                      <a:srgbClr val="F4F4F6"/>
+                    </a:solidFill>
+                  </a:tcPr>
+                </a:tc>
+                <a:tc>
+                  <a:txBody>
+                    <a:bodyPr/>
+                    <a:lstStyle/>
+                    <a:p>
+                      <a:pPr algn="ctr"/>
+                      <a:r>
+                        <a:rPr sz="1600" b="1">
+                          <a:solidFill>
+                            <a:srgbClr val="2CA02C"/>
+                          </a:solidFill>
+                          <a:latin typeface="Calibri"/>
+                        </a:rPr>
+                        <a:t>4.854</a:t>
+                      </a:r>
+                    </a:p>
+                  </a:txBody>
+                  <a:tcPr>
+                    <a:solidFill>
+                      <a:srgbClr val="F4F4F6"/>
+                    </a:solidFill>
+                  </a:tcPr>
+                </a:tc>
+                <a:tc>
+                  <a:txBody>
+                    <a:bodyPr/>
+                    <a:lstStyle/>
+                    <a:p>
+                      <a:pPr algn="ctr"/>
+                      <a:r>
+                        <a:rPr sz="1500" b="1">
+                          <a:solidFill>
+                            <a:srgbClr val="1F4E79"/>
+                          </a:solidFill>
+                          <a:latin typeface="Calibri"/>
+                        </a:rPr>
+                        <a:t>+0.032</a:t>
+                      </a:r>
+                    </a:p>
+                  </a:txBody>
+                  <a:tcPr>
+                    <a:solidFill>
+                      <a:srgbClr val="F4F4F6"/>
+                    </a:solidFill>
+                  </a:tcPr>
+                </a:tc>
+              </a:tr>
+              <a:tr h="594360">
+                <a:tc>
+                  <a:txBody>
+                    <a:bodyPr/>
+                    <a:lstStyle/>
+                    <a:p>
+                      <a:pPr algn="l"/>
+                      <a:r>
+                        <a:rPr sz="1300">
+                          <a:solidFill>
+                            <a:srgbClr val="1A1A1A"/>
+                          </a:solidFill>
+                          <a:latin typeface="Calibri"/>
+                        </a:rPr>
+                        <a:t>Nt = 4,  SNR = 15 dB,  κ = 0.2  (low intel)</a:t>
+                      </a:r>
+                    </a:p>
+                  </a:txBody>
+                  <a:tcPr>
+                    <a:solidFill>
+                      <a:srgbClr val="FFFFFF"/>
+                    </a:solidFill>
+                  </a:tcPr>
+                </a:tc>
+                <a:tc>
+                  <a:txBody>
+                    <a:bodyPr/>
+                    <a:lstStyle/>
+                    <a:p>
+                      <a:pPr algn="ctr"/>
+                      <a:r>
+                        <a:rPr sz="1500">
+                          <a:solidFill>
+                            <a:srgbClr val="1A1A1A"/>
+                          </a:solidFill>
+                          <a:latin typeface="Calibri"/>
+                        </a:rPr>
+                        <a:t>4.879</a:t>
+                      </a:r>
+                    </a:p>
+                  </a:txBody>
+                  <a:tcPr>
+                    <a:solidFill>
+                      <a:srgbClr val="FFFFFF"/>
+                    </a:solidFill>
+                  </a:tcPr>
+                </a:tc>
+                <a:tc>
+                  <a:txBody>
+                    <a:bodyPr/>
+                    <a:lstStyle/>
+                    <a:p>
+                      <a:pPr algn="ctr"/>
+                      <a:r>
+                        <a:rPr sz="1500">
+                          <a:solidFill>
+                            <a:srgbClr val="1A1A1A"/>
+                          </a:solidFill>
+                          <a:latin typeface="Calibri"/>
+                        </a:rPr>
+                        <a:t>4.788</a:t>
+                      </a:r>
+                    </a:p>
+                  </a:txBody>
+                  <a:tcPr>
+                    <a:solidFill>
+                      <a:srgbClr val="FFFFFF"/>
+                    </a:solidFill>
+                  </a:tcPr>
+                </a:tc>
+                <a:tc>
+                  <a:txBody>
+                    <a:bodyPr/>
+                    <a:lstStyle/>
+                    <a:p>
+                      <a:pPr algn="ctr"/>
+                      <a:r>
+                        <a:rPr sz="1600" b="1">
+                          <a:solidFill>
+                            <a:srgbClr val="2CA02C"/>
+                          </a:solidFill>
+                          <a:latin typeface="Calibri"/>
+                        </a:rPr>
+                        <a:t>4.835</a:t>
+                      </a:r>
+                    </a:p>
+                  </a:txBody>
+                  <a:tcPr>
+                    <a:solidFill>
+                      <a:srgbClr val="FFFFFF"/>
+                    </a:solidFill>
+                  </a:tcPr>
+                </a:tc>
+                <a:tc>
+                  <a:txBody>
+                    <a:bodyPr/>
+                    <a:lstStyle/>
+                    <a:p>
+                      <a:pPr algn="ctr"/>
+                      <a:r>
+                        <a:rPr sz="1500" b="1">
+                          <a:solidFill>
+                            <a:srgbClr val="1F4E79"/>
+                          </a:solidFill>
+                          <a:latin typeface="Calibri"/>
+                        </a:rPr>
+                        <a:t>+0.047</a:t>
+                      </a:r>
+                    </a:p>
+                  </a:txBody>
+                  <a:tcPr>
+                    <a:solidFill>
+                      <a:srgbClr val="FFFFFF"/>
+                    </a:solidFill>
+                  </a:tcPr>
+                </a:tc>
+              </a:tr>
+              <a:tr h="594360">
+                <a:tc>
+                  <a:txBody>
+                    <a:bodyPr/>
+                    <a:lstStyle/>
+                    <a:p>
+                      <a:pPr algn="l"/>
+                      <a:r>
+                        <a:rPr sz="1300">
+                          <a:solidFill>
+                            <a:srgbClr val="1A1A1A"/>
+                          </a:solidFill>
+                          <a:latin typeface="Calibri"/>
+                        </a:rPr>
+                        <a:t>Nt = 8,  SNR = 15 dB,  κ = 0.4</a:t>
+                      </a:r>
+                    </a:p>
+                  </a:txBody>
+                  <a:tcPr>
+                    <a:solidFill>
+                      <a:srgbClr val="F4F4F6"/>
+                    </a:solidFill>
+                  </a:tcPr>
+                </a:tc>
+                <a:tc>
+                  <a:txBody>
+                    <a:bodyPr/>
+                    <a:lstStyle/>
+                    <a:p>
+                      <a:pPr algn="ctr"/>
+                      <a:r>
+                        <a:rPr sz="1500">
+                          <a:solidFill>
+                            <a:srgbClr val="1A1A1A"/>
+                          </a:solidFill>
+                          <a:latin typeface="Calibri"/>
+                        </a:rPr>
+                        <a:t>6.026</a:t>
+                      </a:r>
+                    </a:p>
+                  </a:txBody>
+                  <a:tcPr>
+                    <a:solidFill>
+                      <a:srgbClr val="F4F4F6"/>
+                    </a:solidFill>
+                  </a:tcPr>
+                </a:tc>
+                <a:tc>
+                  <a:txBody>
+                    <a:bodyPr/>
+                    <a:lstStyle/>
+                    <a:p>
+                      <a:pPr algn="ctr"/>
+                      <a:r>
+                        <a:rPr sz="1500">
+                          <a:solidFill>
+                            <a:srgbClr val="1A1A1A"/>
+                          </a:solidFill>
+                          <a:latin typeface="Calibri"/>
+                        </a:rPr>
+                        <a:t>5.992</a:t>
+                      </a:r>
+                    </a:p>
+                  </a:txBody>
+                  <a:tcPr>
+                    <a:solidFill>
+                      <a:srgbClr val="F4F4F6"/>
+                    </a:solidFill>
+                  </a:tcPr>
+                </a:tc>
+                <a:tc>
+                  <a:txBody>
+                    <a:bodyPr/>
+                    <a:lstStyle/>
+                    <a:p>
+                      <a:pPr algn="ctr"/>
+                      <a:r>
+                        <a:rPr sz="1600" b="1">
+                          <a:solidFill>
+                            <a:srgbClr val="2CA02C"/>
+                          </a:solidFill>
+                          <a:latin typeface="Calibri"/>
+                        </a:rPr>
+                        <a:t>6.048</a:t>
+                      </a:r>
+                    </a:p>
+                  </a:txBody>
+                  <a:tcPr>
+                    <a:solidFill>
+                      <a:srgbClr val="F4F4F6"/>
+                    </a:solidFill>
+                  </a:tcPr>
+                </a:tc>
+                <a:tc>
+                  <a:txBody>
+                    <a:bodyPr/>
+                    <a:lstStyle/>
+                    <a:p>
+                      <a:pPr algn="ctr"/>
+                      <a:r>
+                        <a:rPr sz="1500" b="1">
+                          <a:solidFill>
+                            <a:srgbClr val="1F4E79"/>
+                          </a:solidFill>
+                          <a:latin typeface="Calibri"/>
+                        </a:rPr>
+                        <a:t>+0.057</a:t>
+                      </a:r>
+                    </a:p>
+                  </a:txBody>
+                  <a:tcPr>
+                    <a:solidFill>
+                      <a:srgbClr val="F4F4F6"/>
+                    </a:solidFill>
+                  </a:tcPr>
+                </a:tc>
+              </a:tr>
+              <a:tr h="594360">
+                <a:tc>
+                  <a:txBody>
+                    <a:bodyPr/>
+                    <a:lstStyle/>
+                    <a:p>
+                      <a:pPr algn="l"/>
+                      <a:r>
+                        <a:rPr sz="1300">
+                          <a:solidFill>
+                            <a:srgbClr val="1A1A1A"/>
+                          </a:solidFill>
+                          <a:latin typeface="Calibri"/>
+                        </a:rPr>
+                        <a:t>Nt = 8,  SNR = 15 dB,  κ = 0.2  (worst case)</a:t>
+                      </a:r>
+                    </a:p>
+                  </a:txBody>
+                  <a:tcPr>
+                    <a:solidFill>
+                      <a:srgbClr val="FFFFFF"/>
+                    </a:solidFill>
+                  </a:tcPr>
+                </a:tc>
+                <a:tc>
+                  <a:txBody>
+                    <a:bodyPr/>
+                    <a:lstStyle/>
+                    <a:p>
+                      <a:pPr algn="ctr"/>
+                      <a:r>
+                        <a:rPr sz="1500">
+                          <a:solidFill>
+                            <a:srgbClr val="1A1A1A"/>
+                          </a:solidFill>
+                          <a:latin typeface="Calibri"/>
+                        </a:rPr>
+                        <a:t>6.026</a:t>
+                      </a:r>
+                    </a:p>
+                  </a:txBody>
+                  <a:tcPr>
+                    <a:solidFill>
+                      <a:srgbClr val="FFFFFF"/>
+                    </a:solidFill>
+                  </a:tcPr>
+                </a:tc>
+                <a:tc>
+                  <a:txBody>
+                    <a:bodyPr/>
+                    <a:lstStyle/>
+                    <a:p>
+                      <a:pPr algn="ctr"/>
+                      <a:r>
+                        <a:rPr sz="1500">
+                          <a:solidFill>
+                            <a:srgbClr val="1A1A1A"/>
+                          </a:solidFill>
+                          <a:latin typeface="Calibri"/>
+                        </a:rPr>
+                        <a:t>5.964</a:t>
+                      </a:r>
+                    </a:p>
+                  </a:txBody>
+                  <a:tcPr>
+                    <a:solidFill>
+                      <a:srgbClr val="FFFFFF"/>
+                    </a:solidFill>
+                  </a:tcPr>
+                </a:tc>
+                <a:tc>
+                  <a:txBody>
+                    <a:bodyPr/>
+                    <a:lstStyle/>
+                    <a:p>
+                      <a:pPr algn="ctr"/>
+                      <a:r>
+                        <a:rPr sz="1600" b="1">
+                          <a:solidFill>
+                            <a:srgbClr val="2CA02C"/>
+                          </a:solidFill>
+                          <a:latin typeface="Calibri"/>
+                        </a:rPr>
+                        <a:t>6.043</a:t>
+                      </a:r>
+                    </a:p>
+                  </a:txBody>
+                  <a:tcPr>
+                    <a:solidFill>
+                      <a:srgbClr val="FFFFFF"/>
+                    </a:solidFill>
+                  </a:tcPr>
+                </a:tc>
+                <a:tc>
+                  <a:txBody>
+                    <a:bodyPr/>
+                    <a:lstStyle/>
+                    <a:p>
+                      <a:pPr algn="ctr"/>
+                      <a:r>
+                        <a:rPr sz="1500" b="1">
+                          <a:solidFill>
+                            <a:srgbClr val="1F4E79"/>
+                          </a:solidFill>
+                          <a:latin typeface="Calibri"/>
+                        </a:rPr>
+                        <a:t>+0.079</a:t>
+                      </a:r>
+                    </a:p>
+                  </a:txBody>
+                  <a:tcPr>
+                    <a:solidFill>
+                      <a:srgbClr val="FFFFFF"/>
+                    </a:solidFill>
+                  </a:tcPr>
+                </a:tc>
+              </a:tr>
+              <a:tr h="777240">
+                <a:tc>
+                  <a:txBody>
+                    <a:bodyPr/>
+                    <a:lstStyle/>
+                    <a:p>
+                      <a:pPr algn="l"/>
+                      <a:r>
+                        <a:rPr sz="1300">
+                          <a:solidFill>
+                            <a:srgbClr val="1A1A1A"/>
+                          </a:solidFill>
+                          <a:latin typeface="Calibri"/>
+                        </a:rPr>
+                        <a:t>Outage Pr[Rs &lt; 4]  at  Nt = 4, SNR = 15, κ = 0.4</a:t>
+                      </a:r>
+                    </a:p>
+                  </a:txBody>
+                  <a:tcPr>
+                    <a:solidFill>
+                      <a:srgbClr val="FAE7E6"/>
+                    </a:solidFill>
+                  </a:tcPr>
+                </a:tc>
+                <a:tc>
+                  <a:txBody>
+                    <a:bodyPr/>
+                    <a:lstStyle/>
+                    <a:p>
+                      <a:pPr algn="ctr"/>
+                      <a:r>
+                        <a:rPr sz="1500">
+                          <a:solidFill>
+                            <a:srgbClr val="1A1A1A"/>
+                          </a:solidFill>
+                          <a:latin typeface="Calibri"/>
+                        </a:rPr>
+                        <a:t>≈ 22 %</a:t>
+                      </a:r>
+                    </a:p>
+                  </a:txBody>
+                  <a:tcPr>
+                    <a:solidFill>
+                      <a:srgbClr val="FAE7E6"/>
+                    </a:solidFill>
+                  </a:tcPr>
+                </a:tc>
+                <a:tc>
+                  <a:txBody>
+                    <a:bodyPr/>
+                    <a:lstStyle/>
+                    <a:p>
+                      <a:pPr algn="ctr"/>
+                      <a:r>
+                        <a:rPr sz="1500">
+                          <a:solidFill>
+                            <a:srgbClr val="1A1A1A"/>
+                          </a:solidFill>
+                          <a:latin typeface="Calibri"/>
+                        </a:rPr>
+                        <a:t>≈ 26 %</a:t>
+                      </a:r>
+                    </a:p>
+                  </a:txBody>
+                  <a:tcPr>
+                    <a:solidFill>
+                      <a:srgbClr val="FAE7E6"/>
+                    </a:solidFill>
+                  </a:tcPr>
+                </a:tc>
+                <a:tc>
+                  <a:txBody>
+                    <a:bodyPr/>
+                    <a:lstStyle/>
+                    <a:p>
+                      <a:pPr algn="ctr"/>
+                      <a:r>
+                        <a:rPr sz="1600" b="1">
+                          <a:solidFill>
+                            <a:srgbClr val="2CA02C"/>
+                          </a:solidFill>
+                          <a:latin typeface="Calibri"/>
+                        </a:rPr>
+                        <a:t>≈ 18 %</a:t>
+                      </a:r>
+                    </a:p>
+                  </a:txBody>
+                  <a:tcPr>
+                    <a:solidFill>
+                      <a:srgbClr val="FAE7E6"/>
+                    </a:solidFill>
+                  </a:tcPr>
+                </a:tc>
+                <a:tc>
+                  <a:txBody>
+                    <a:bodyPr/>
+                    <a:lstStyle/>
+                    <a:p>
+                      <a:pPr algn="ctr"/>
+                      <a:r>
+                        <a:rPr sz="1500" b="1">
+                          <a:solidFill>
+                            <a:srgbClr val="1F4E79"/>
+                          </a:solidFill>
+                          <a:latin typeface="Calibri"/>
+                        </a:rPr>
+                        <a:t>30 % relative ↓</a:t>
+                      </a:r>
+                    </a:p>
+                  </a:txBody>
+                  <a:tcPr>
+                    <a:solidFill>
+                      <a:srgbClr val="FAE7E6"/>
+                    </a:solidFill>
+                  </a:tcPr>
+                </a:tc>
+              </a:tr>
+            </a:tbl>
+          </a:graphicData>
+        </a:graphic>
+      </p:graphicFrame>
+      <p:sp>
+        <p:nvSpPr>
+          <p:cNvPr id="5" name="TextBox 4"/>
+          <p:cNvSpPr txBox="1"/>
+          <p:nvPr/>
+        </p:nvSpPr>
+        <p:spPr>
+          <a:xfrm>
+            <a:off x="457200" y="5486400"/>
+            <a:ext cx="11247120" cy="457200"/>
           </a:xfrm>
           <a:prstGeom prst="rect">
             <a:avLst/>
@@ -3757,94 +4504,48 @@
           <a:p>
             <a:pPr algn="ctr"/>
             <a:r>
-              <a:rPr sz="2000" b="0" i="1">
-                <a:solidFill>
-                  <a:srgbClr val="1F4E79"/>
-                </a:solidFill>
-                <a:latin typeface="Calibri"/>
-              </a:rPr>
-              <a:t>Switching to the browser  —  same model, you drag the sliders.</a:t>
-            </a:r>
-          </a:p>
-        </p:txBody>
-      </p:sp>
-      <p:sp>
-        <p:nvSpPr>
-          <p:cNvPr id="5" name="Rounded Rectangle 4"/>
-          <p:cNvSpPr/>
-          <p:nvPr/>
-        </p:nvSpPr>
-        <p:spPr>
-          <a:xfrm>
-            <a:off x="457200" y="2103120"/>
-            <a:ext cx="2240280" cy="4023360"/>
-          </a:xfrm>
-          <a:prstGeom prst="roundRect">
-            <a:avLst/>
-          </a:prstGeom>
-          <a:solidFill>
-            <a:srgbClr val="E5ECF3"/>
-          </a:solidFill>
-          <a:ln w="15875">
-            <a:solidFill>
-              <a:srgbClr val="1F4E79"/>
-            </a:solidFill>
-          </a:ln>
-          <a:effectLst/>
-        </p:spPr>
-        <p:style>
-          <a:lnRef idx="1">
-            <a:schemeClr val="accent1"/>
-          </a:lnRef>
-          <a:fillRef idx="3">
-            <a:schemeClr val="accent1"/>
-          </a:fillRef>
-          <a:effectRef idx="2">
-            <a:schemeClr val="accent1"/>
-          </a:effectRef>
-          <a:fontRef idx="minor">
-            <a:schemeClr val="lt1"/>
-          </a:fontRef>
-        </p:style>
-        <p:txBody>
-          <a:bodyPr rtlCol="0" anchor="ctr"/>
+              <a:rPr sz="1500" b="1" i="1">
+                <a:solidFill>
+                  <a:srgbClr val="2CA02C"/>
+                </a:solidFill>
+                <a:latin typeface="Calibri"/>
+              </a:rPr>
+              <a:t>DQN beats the Traditional (noisy-CSI) optimiser at every scenario in the test set  —  by 0.03 to 0.08 bits/s/Hz.</a:t>
+            </a:r>
+          </a:p>
+        </p:txBody>
+      </p:sp>
+      <p:sp>
+        <p:nvSpPr>
+          <p:cNvPr id="6" name="TextBox 5"/>
+          <p:cNvSpPr txBox="1"/>
+          <p:nvPr/>
+        </p:nvSpPr>
+        <p:spPr>
+          <a:xfrm>
+            <a:off x="457200" y="5989320"/>
+            <a:ext cx="11247120" cy="365760"/>
+          </a:xfrm>
+          <a:prstGeom prst="rect">
+            <a:avLst/>
+          </a:prstGeom>
+          <a:noFill/>
+        </p:spPr>
+        <p:txBody>
+          <a:bodyPr wrap="square" anchor="t" lIns="45720" rIns="45720" tIns="18288" bIns="18288">
+            <a:spAutoFit/>
+          </a:bodyPr>
           <a:lstStyle/>
           <a:p>
             <a:pPr algn="ctr"/>
-          </a:p>
-        </p:txBody>
-      </p:sp>
-      <p:sp>
-        <p:nvSpPr>
-          <p:cNvPr id="6" name="TextBox 5"/>
-          <p:cNvSpPr txBox="1"/>
-          <p:nvPr/>
-        </p:nvSpPr>
-        <p:spPr>
-          <a:xfrm>
-            <a:off x="457200" y="2240280"/>
-            <a:ext cx="2240280" cy="457200"/>
-          </a:xfrm>
-          <a:prstGeom prst="rect">
-            <a:avLst/>
-          </a:prstGeom>
-          <a:noFill/>
-        </p:spPr>
-        <p:txBody>
-          <a:bodyPr wrap="square" anchor="t" lIns="45720" rIns="45720" tIns="18288" bIns="18288">
-            <a:spAutoFit/>
-          </a:bodyPr>
-          <a:lstStyle/>
-          <a:p>
-            <a:pPr algn="ctr"/>
-            <a:r>
-              <a:rPr sz="2400" b="1" i="0">
-                <a:solidFill>
-                  <a:srgbClr val="E5C107"/>
-                </a:solidFill>
-                <a:latin typeface="Calibri"/>
-              </a:rPr>
-              <a:t>1.</a:t>
+            <a:r>
+              <a:rPr sz="1100" b="0" i="1">
+                <a:solidFill>
+                  <a:srgbClr val="7F7F7F"/>
+                </a:solidFill>
+                <a:latin typeface="Calibri"/>
+              </a:rPr>
+              <a:t>All four scenarios use 400 unseen Monte Carlo channels.  Outage row uses 1000 channels.</a:t>
             </a:r>
           </a:p>
         </p:txBody>
@@ -3852,715 +4553,6 @@
       <p:sp>
         <p:nvSpPr>
           <p:cNvPr id="7" name="TextBox 6"/>
-          <p:cNvSpPr txBox="1"/>
-          <p:nvPr/>
-        </p:nvSpPr>
-        <p:spPr>
-          <a:xfrm>
-            <a:off x="457200" y="2697480"/>
-            <a:ext cx="2240280" cy="457200"/>
-          </a:xfrm>
-          <a:prstGeom prst="rect">
-            <a:avLst/>
-          </a:prstGeom>
-          <a:noFill/>
-        </p:spPr>
-        <p:txBody>
-          <a:bodyPr wrap="square" anchor="t" lIns="45720" rIns="45720" tIns="18288" bIns="18288">
-            <a:spAutoFit/>
-          </a:bodyPr>
-          <a:lstStyle/>
-          <a:p>
-            <a:pPr algn="ctr"/>
-            <a:r>
-              <a:rPr sz="1800" b="1" i="0">
-                <a:solidFill>
-                  <a:srgbClr val="1F4E79"/>
-                </a:solidFill>
-                <a:latin typeface="Calibri"/>
-              </a:rPr>
-              <a:t>Live test</a:t>
-            </a:r>
-          </a:p>
-        </p:txBody>
-      </p:sp>
-      <p:sp>
-        <p:nvSpPr>
-          <p:cNvPr id="8" name="TextBox 7"/>
-          <p:cNvSpPr txBox="1"/>
-          <p:nvPr/>
-        </p:nvSpPr>
-        <p:spPr>
-          <a:xfrm>
-            <a:off x="594360" y="3246120"/>
-            <a:ext cx="1965960" cy="2743200"/>
-          </a:xfrm>
-          <a:prstGeom prst="rect">
-            <a:avLst/>
-          </a:prstGeom>
-          <a:noFill/>
-        </p:spPr>
-        <p:txBody>
-          <a:bodyPr wrap="square" anchor="t" lIns="45720" rIns="45720" tIns="18288" bIns="18288">
-            <a:spAutoFit/>
-          </a:bodyPr>
-          <a:lstStyle/>
-          <a:p>
-            <a:pPr algn="ctr"/>
-            <a:r>
-              <a:rPr sz="1200" b="0" i="0">
-                <a:solidFill>
-                  <a:srgbClr val="1A1A1A"/>
-                </a:solidFill>
-                <a:latin typeface="Calibri"/>
-              </a:rPr>
-              <a:t>Pick (Nt, SNR, κ).  See three schemes compete side-by-side.</a:t>
-            </a:r>
-          </a:p>
-        </p:txBody>
-      </p:sp>
-      <p:sp>
-        <p:nvSpPr>
-          <p:cNvPr id="9" name="Rounded Rectangle 8"/>
-          <p:cNvSpPr/>
-          <p:nvPr/>
-        </p:nvSpPr>
-        <p:spPr>
-          <a:xfrm>
-            <a:off x="2788920" y="2103120"/>
-            <a:ext cx="2240280" cy="4023360"/>
-          </a:xfrm>
-          <a:prstGeom prst="roundRect">
-            <a:avLst/>
-          </a:prstGeom>
-          <a:solidFill>
-            <a:srgbClr val="E5ECF3"/>
-          </a:solidFill>
-          <a:ln w="15875">
-            <a:solidFill>
-              <a:srgbClr val="1F4E79"/>
-            </a:solidFill>
-          </a:ln>
-          <a:effectLst/>
-        </p:spPr>
-        <p:style>
-          <a:lnRef idx="1">
-            <a:schemeClr val="accent1"/>
-          </a:lnRef>
-          <a:fillRef idx="3">
-            <a:schemeClr val="accent1"/>
-          </a:fillRef>
-          <a:effectRef idx="2">
-            <a:schemeClr val="accent1"/>
-          </a:effectRef>
-          <a:fontRef idx="minor">
-            <a:schemeClr val="lt1"/>
-          </a:fontRef>
-        </p:style>
-        <p:txBody>
-          <a:bodyPr rtlCol="0" anchor="ctr"/>
-          <a:lstStyle/>
-          <a:p>
-            <a:pPr algn="ctr"/>
-          </a:p>
-        </p:txBody>
-      </p:sp>
-      <p:sp>
-        <p:nvSpPr>
-          <p:cNvPr id="10" name="TextBox 9"/>
-          <p:cNvSpPr txBox="1"/>
-          <p:nvPr/>
-        </p:nvSpPr>
-        <p:spPr>
-          <a:xfrm>
-            <a:off x="2788920" y="2240280"/>
-            <a:ext cx="2240280" cy="457200"/>
-          </a:xfrm>
-          <a:prstGeom prst="rect">
-            <a:avLst/>
-          </a:prstGeom>
-          <a:noFill/>
-        </p:spPr>
-        <p:txBody>
-          <a:bodyPr wrap="square" anchor="t" lIns="45720" rIns="45720" tIns="18288" bIns="18288">
-            <a:spAutoFit/>
-          </a:bodyPr>
-          <a:lstStyle/>
-          <a:p>
-            <a:pPr algn="ctr"/>
-            <a:r>
-              <a:rPr sz="2400" b="1" i="0">
-                <a:solidFill>
-                  <a:srgbClr val="E5C107"/>
-                </a:solidFill>
-                <a:latin typeface="Calibri"/>
-              </a:rPr>
-              <a:t>2.</a:t>
-            </a:r>
-          </a:p>
-        </p:txBody>
-      </p:sp>
-      <p:sp>
-        <p:nvSpPr>
-          <p:cNvPr id="11" name="TextBox 10"/>
-          <p:cNvSpPr txBox="1"/>
-          <p:nvPr/>
-        </p:nvSpPr>
-        <p:spPr>
-          <a:xfrm>
-            <a:off x="2788920" y="2697480"/>
-            <a:ext cx="2240280" cy="457200"/>
-          </a:xfrm>
-          <a:prstGeom prst="rect">
-            <a:avLst/>
-          </a:prstGeom>
-          <a:noFill/>
-        </p:spPr>
-        <p:txBody>
-          <a:bodyPr wrap="square" anchor="t" lIns="45720" rIns="45720" tIns="18288" bIns="18288">
-            <a:spAutoFit/>
-          </a:bodyPr>
-          <a:lstStyle/>
-          <a:p>
-            <a:pPr algn="ctr"/>
-            <a:r>
-              <a:rPr sz="1800" b="1" i="0">
-                <a:solidFill>
-                  <a:srgbClr val="1F4E79"/>
-                </a:solidFill>
-                <a:latin typeface="Calibri"/>
-              </a:rPr>
-              <a:t>SNR sweep</a:t>
-            </a:r>
-          </a:p>
-        </p:txBody>
-      </p:sp>
-      <p:sp>
-        <p:nvSpPr>
-          <p:cNvPr id="12" name="TextBox 11"/>
-          <p:cNvSpPr txBox="1"/>
-          <p:nvPr/>
-        </p:nvSpPr>
-        <p:spPr>
-          <a:xfrm>
-            <a:off x="2926079" y="3246120"/>
-            <a:ext cx="1965960" cy="2743200"/>
-          </a:xfrm>
-          <a:prstGeom prst="rect">
-            <a:avLst/>
-          </a:prstGeom>
-          <a:noFill/>
-        </p:spPr>
-        <p:txBody>
-          <a:bodyPr wrap="square" anchor="t" lIns="45720" rIns="45720" tIns="18288" bIns="18288">
-            <a:spAutoFit/>
-          </a:bodyPr>
-          <a:lstStyle/>
-          <a:p>
-            <a:pPr algn="ctr"/>
-            <a:r>
-              <a:rPr sz="1200" b="0" i="0">
-                <a:solidFill>
-                  <a:srgbClr val="1A1A1A"/>
-                </a:solidFill>
-                <a:latin typeface="Calibri"/>
-              </a:rPr>
-              <a:t>Hold κ, vary SNR.  Watch the curves spread or converge.</a:t>
-            </a:r>
-          </a:p>
-        </p:txBody>
-      </p:sp>
-      <p:sp>
-        <p:nvSpPr>
-          <p:cNvPr id="13" name="Rounded Rectangle 12"/>
-          <p:cNvSpPr/>
-          <p:nvPr/>
-        </p:nvSpPr>
-        <p:spPr>
-          <a:xfrm>
-            <a:off x="5120640" y="2103120"/>
-            <a:ext cx="2240280" cy="4023360"/>
-          </a:xfrm>
-          <a:prstGeom prst="roundRect">
-            <a:avLst/>
-          </a:prstGeom>
-          <a:solidFill>
-            <a:srgbClr val="E5ECF3"/>
-          </a:solidFill>
-          <a:ln w="15875">
-            <a:solidFill>
-              <a:srgbClr val="1F4E79"/>
-            </a:solidFill>
-          </a:ln>
-          <a:effectLst/>
-        </p:spPr>
-        <p:style>
-          <a:lnRef idx="1">
-            <a:schemeClr val="accent1"/>
-          </a:lnRef>
-          <a:fillRef idx="3">
-            <a:schemeClr val="accent1"/>
-          </a:fillRef>
-          <a:effectRef idx="2">
-            <a:schemeClr val="accent1"/>
-          </a:effectRef>
-          <a:fontRef idx="minor">
-            <a:schemeClr val="lt1"/>
-          </a:fontRef>
-        </p:style>
-        <p:txBody>
-          <a:bodyPr rtlCol="0" anchor="ctr"/>
-          <a:lstStyle/>
-          <a:p>
-            <a:pPr algn="ctr"/>
-          </a:p>
-        </p:txBody>
-      </p:sp>
-      <p:sp>
-        <p:nvSpPr>
-          <p:cNvPr id="14" name="TextBox 13"/>
-          <p:cNvSpPr txBox="1"/>
-          <p:nvPr/>
-        </p:nvSpPr>
-        <p:spPr>
-          <a:xfrm>
-            <a:off x="5120640" y="2240280"/>
-            <a:ext cx="2240280" cy="457200"/>
-          </a:xfrm>
-          <a:prstGeom prst="rect">
-            <a:avLst/>
-          </a:prstGeom>
-          <a:noFill/>
-        </p:spPr>
-        <p:txBody>
-          <a:bodyPr wrap="square" anchor="t" lIns="45720" rIns="45720" tIns="18288" bIns="18288">
-            <a:spAutoFit/>
-          </a:bodyPr>
-          <a:lstStyle/>
-          <a:p>
-            <a:pPr algn="ctr"/>
-            <a:r>
-              <a:rPr sz="2400" b="1" i="0">
-                <a:solidFill>
-                  <a:srgbClr val="E5C107"/>
-                </a:solidFill>
-                <a:latin typeface="Calibri"/>
-              </a:rPr>
-              <a:t>3.</a:t>
-            </a:r>
-          </a:p>
-        </p:txBody>
-      </p:sp>
-      <p:sp>
-        <p:nvSpPr>
-          <p:cNvPr id="15" name="TextBox 14"/>
-          <p:cNvSpPr txBox="1"/>
-          <p:nvPr/>
-        </p:nvSpPr>
-        <p:spPr>
-          <a:xfrm>
-            <a:off x="5120640" y="2697480"/>
-            <a:ext cx="2240280" cy="457200"/>
-          </a:xfrm>
-          <a:prstGeom prst="rect">
-            <a:avLst/>
-          </a:prstGeom>
-          <a:noFill/>
-        </p:spPr>
-        <p:txBody>
-          <a:bodyPr wrap="square" anchor="t" lIns="45720" rIns="45720" tIns="18288" bIns="18288">
-            <a:spAutoFit/>
-          </a:bodyPr>
-          <a:lstStyle/>
-          <a:p>
-            <a:pPr algn="ctr"/>
-            <a:r>
-              <a:rPr sz="1800" b="1" i="0">
-                <a:solidFill>
-                  <a:srgbClr val="1F4E79"/>
-                </a:solidFill>
-                <a:latin typeface="Calibri"/>
-              </a:rPr>
-              <a:t>κ sweep</a:t>
-            </a:r>
-          </a:p>
-        </p:txBody>
-      </p:sp>
-      <p:sp>
-        <p:nvSpPr>
-          <p:cNvPr id="16" name="TextBox 15"/>
-          <p:cNvSpPr txBox="1"/>
-          <p:nvPr/>
-        </p:nvSpPr>
-        <p:spPr>
-          <a:xfrm>
-            <a:off x="5257800" y="3246120"/>
-            <a:ext cx="1965960" cy="2743200"/>
-          </a:xfrm>
-          <a:prstGeom prst="rect">
-            <a:avLst/>
-          </a:prstGeom>
-          <a:noFill/>
-        </p:spPr>
-        <p:txBody>
-          <a:bodyPr wrap="square" anchor="t" lIns="45720" rIns="45720" tIns="18288" bIns="18288">
-            <a:spAutoFit/>
-          </a:bodyPr>
-          <a:lstStyle/>
-          <a:p>
-            <a:pPr algn="ctr"/>
-            <a:r>
-              <a:rPr sz="1200" b="0" i="0">
-                <a:solidFill>
-                  <a:srgbClr val="1A1A1A"/>
-                </a:solidFill>
-                <a:latin typeface="Calibri"/>
-              </a:rPr>
-              <a:t>Hold SNR, slide κ from 1 → 0.  The headline story, live.</a:t>
-            </a:r>
-          </a:p>
-        </p:txBody>
-      </p:sp>
-      <p:sp>
-        <p:nvSpPr>
-          <p:cNvPr id="17" name="Rounded Rectangle 16"/>
-          <p:cNvSpPr/>
-          <p:nvPr/>
-        </p:nvSpPr>
-        <p:spPr>
-          <a:xfrm>
-            <a:off x="7452359" y="2103120"/>
-            <a:ext cx="2240280" cy="4023360"/>
-          </a:xfrm>
-          <a:prstGeom prst="roundRect">
-            <a:avLst/>
-          </a:prstGeom>
-          <a:solidFill>
-            <a:srgbClr val="E5ECF3"/>
-          </a:solidFill>
-          <a:ln w="15875">
-            <a:solidFill>
-              <a:srgbClr val="1F4E79"/>
-            </a:solidFill>
-          </a:ln>
-          <a:effectLst/>
-        </p:spPr>
-        <p:style>
-          <a:lnRef idx="1">
-            <a:schemeClr val="accent1"/>
-          </a:lnRef>
-          <a:fillRef idx="3">
-            <a:schemeClr val="accent1"/>
-          </a:fillRef>
-          <a:effectRef idx="2">
-            <a:schemeClr val="accent1"/>
-          </a:effectRef>
-          <a:fontRef idx="minor">
-            <a:schemeClr val="lt1"/>
-          </a:fontRef>
-        </p:style>
-        <p:txBody>
-          <a:bodyPr rtlCol="0" anchor="ctr"/>
-          <a:lstStyle/>
-          <a:p>
-            <a:pPr algn="ctr"/>
-          </a:p>
-        </p:txBody>
-      </p:sp>
-      <p:sp>
-        <p:nvSpPr>
-          <p:cNvPr id="18" name="TextBox 17"/>
-          <p:cNvSpPr txBox="1"/>
-          <p:nvPr/>
-        </p:nvSpPr>
-        <p:spPr>
-          <a:xfrm>
-            <a:off x="7452359" y="2240280"/>
-            <a:ext cx="2240280" cy="457200"/>
-          </a:xfrm>
-          <a:prstGeom prst="rect">
-            <a:avLst/>
-          </a:prstGeom>
-          <a:noFill/>
-        </p:spPr>
-        <p:txBody>
-          <a:bodyPr wrap="square" anchor="t" lIns="45720" rIns="45720" tIns="18288" bIns="18288">
-            <a:spAutoFit/>
-          </a:bodyPr>
-          <a:lstStyle/>
-          <a:p>
-            <a:pPr algn="ctr"/>
-            <a:r>
-              <a:rPr sz="2400" b="1" i="0">
-                <a:solidFill>
-                  <a:srgbClr val="E5C107"/>
-                </a:solidFill>
-                <a:latin typeface="Calibri"/>
-              </a:rPr>
-              <a:t>4.</a:t>
-            </a:r>
-          </a:p>
-        </p:txBody>
-      </p:sp>
-      <p:sp>
-        <p:nvSpPr>
-          <p:cNvPr id="19" name="TextBox 18"/>
-          <p:cNvSpPr txBox="1"/>
-          <p:nvPr/>
-        </p:nvSpPr>
-        <p:spPr>
-          <a:xfrm>
-            <a:off x="7452359" y="2697480"/>
-            <a:ext cx="2240280" cy="457200"/>
-          </a:xfrm>
-          <a:prstGeom prst="rect">
-            <a:avLst/>
-          </a:prstGeom>
-          <a:noFill/>
-        </p:spPr>
-        <p:txBody>
-          <a:bodyPr wrap="square" anchor="t" lIns="45720" rIns="45720" tIns="18288" bIns="18288">
-            <a:spAutoFit/>
-          </a:bodyPr>
-          <a:lstStyle/>
-          <a:p>
-            <a:pPr algn="ctr"/>
-            <a:r>
-              <a:rPr sz="1800" b="1" i="0">
-                <a:solidFill>
-                  <a:srgbClr val="1F4E79"/>
-                </a:solidFill>
-                <a:latin typeface="Calibri"/>
-              </a:rPr>
-              <a:t>Outage</a:t>
-            </a:r>
-          </a:p>
-        </p:txBody>
-      </p:sp>
-      <p:sp>
-        <p:nvSpPr>
-          <p:cNvPr id="20" name="TextBox 19"/>
-          <p:cNvSpPr txBox="1"/>
-          <p:nvPr/>
-        </p:nvSpPr>
-        <p:spPr>
-          <a:xfrm>
-            <a:off x="7589519" y="3246120"/>
-            <a:ext cx="1965960" cy="2743200"/>
-          </a:xfrm>
-          <a:prstGeom prst="rect">
-            <a:avLst/>
-          </a:prstGeom>
-          <a:noFill/>
-        </p:spPr>
-        <p:txBody>
-          <a:bodyPr wrap="square" anchor="t" lIns="45720" rIns="45720" tIns="18288" bIns="18288">
-            <a:spAutoFit/>
-          </a:bodyPr>
-          <a:lstStyle/>
-          <a:p>
-            <a:pPr algn="ctr"/>
-            <a:r>
-              <a:rPr sz="1200" b="0" i="0">
-                <a:solidFill>
-                  <a:srgbClr val="1A1A1A"/>
-                </a:solidFill>
-                <a:latin typeface="Calibri"/>
-              </a:rPr>
-              <a:t>Empirical CDF.  How often each scheme misses the target rate.</a:t>
-            </a:r>
-          </a:p>
-        </p:txBody>
-      </p:sp>
-      <p:sp>
-        <p:nvSpPr>
-          <p:cNvPr id="21" name="Rounded Rectangle 20"/>
-          <p:cNvSpPr/>
-          <p:nvPr/>
-        </p:nvSpPr>
-        <p:spPr>
-          <a:xfrm>
-            <a:off x="9784080" y="2103120"/>
-            <a:ext cx="2240280" cy="4023360"/>
-          </a:xfrm>
-          <a:prstGeom prst="roundRect">
-            <a:avLst/>
-          </a:prstGeom>
-          <a:solidFill>
-            <a:srgbClr val="E5ECF3"/>
-          </a:solidFill>
-          <a:ln w="15875">
-            <a:solidFill>
-              <a:srgbClr val="1F4E79"/>
-            </a:solidFill>
-          </a:ln>
-          <a:effectLst/>
-        </p:spPr>
-        <p:style>
-          <a:lnRef idx="1">
-            <a:schemeClr val="accent1"/>
-          </a:lnRef>
-          <a:fillRef idx="3">
-            <a:schemeClr val="accent1"/>
-          </a:fillRef>
-          <a:effectRef idx="2">
-            <a:schemeClr val="accent1"/>
-          </a:effectRef>
-          <a:fontRef idx="minor">
-            <a:schemeClr val="lt1"/>
-          </a:fontRef>
-        </p:style>
-        <p:txBody>
-          <a:bodyPr rtlCol="0" anchor="ctr"/>
-          <a:lstStyle/>
-          <a:p>
-            <a:pPr algn="ctr"/>
-          </a:p>
-        </p:txBody>
-      </p:sp>
-      <p:sp>
-        <p:nvSpPr>
-          <p:cNvPr id="22" name="TextBox 21"/>
-          <p:cNvSpPr txBox="1"/>
-          <p:nvPr/>
-        </p:nvSpPr>
-        <p:spPr>
-          <a:xfrm>
-            <a:off x="9784080" y="2240280"/>
-            <a:ext cx="2240280" cy="457200"/>
-          </a:xfrm>
-          <a:prstGeom prst="rect">
-            <a:avLst/>
-          </a:prstGeom>
-          <a:noFill/>
-        </p:spPr>
-        <p:txBody>
-          <a:bodyPr wrap="square" anchor="t" lIns="45720" rIns="45720" tIns="18288" bIns="18288">
-            <a:spAutoFit/>
-          </a:bodyPr>
-          <a:lstStyle/>
-          <a:p>
-            <a:pPr algn="ctr"/>
-            <a:r>
-              <a:rPr sz="2400" b="1" i="0">
-                <a:solidFill>
-                  <a:srgbClr val="E5C107"/>
-                </a:solidFill>
-                <a:latin typeface="Calibri"/>
-              </a:rPr>
-              <a:t>5.</a:t>
-            </a:r>
-          </a:p>
-        </p:txBody>
-      </p:sp>
-      <p:sp>
-        <p:nvSpPr>
-          <p:cNvPr id="23" name="TextBox 22"/>
-          <p:cNvSpPr txBox="1"/>
-          <p:nvPr/>
-        </p:nvSpPr>
-        <p:spPr>
-          <a:xfrm>
-            <a:off x="9784080" y="2697480"/>
-            <a:ext cx="2240280" cy="457200"/>
-          </a:xfrm>
-          <a:prstGeom prst="rect">
-            <a:avLst/>
-          </a:prstGeom>
-          <a:noFill/>
-        </p:spPr>
-        <p:txBody>
-          <a:bodyPr wrap="square" anchor="t" lIns="45720" rIns="45720" tIns="18288" bIns="18288">
-            <a:spAutoFit/>
-          </a:bodyPr>
-          <a:lstStyle/>
-          <a:p>
-            <a:pPr algn="ctr"/>
-            <a:r>
-              <a:rPr sz="1800" b="1" i="0">
-                <a:solidFill>
-                  <a:srgbClr val="1F4E79"/>
-                </a:solidFill>
-                <a:latin typeface="Calibri"/>
-              </a:rPr>
-              <a:t>Geometry</a:t>
-            </a:r>
-          </a:p>
-        </p:txBody>
-      </p:sp>
-      <p:sp>
-        <p:nvSpPr>
-          <p:cNvPr id="24" name="TextBox 23"/>
-          <p:cNvSpPr txBox="1"/>
-          <p:nvPr/>
-        </p:nvSpPr>
-        <p:spPr>
-          <a:xfrm>
-            <a:off x="9921240" y="3246120"/>
-            <a:ext cx="1965960" cy="2743200"/>
-          </a:xfrm>
-          <a:prstGeom prst="rect">
-            <a:avLst/>
-          </a:prstGeom>
-          <a:noFill/>
-        </p:spPr>
-        <p:txBody>
-          <a:bodyPr wrap="square" anchor="t" lIns="45720" rIns="45720" tIns="18288" bIns="18288">
-            <a:spAutoFit/>
-          </a:bodyPr>
-          <a:lstStyle/>
-          <a:p>
-            <a:pPr algn="ctr"/>
-            <a:r>
-              <a:rPr sz="1200" b="0" i="0">
-                <a:solidFill>
-                  <a:srgbClr val="1A1A1A"/>
-                </a:solidFill>
-                <a:latin typeface="Calibri"/>
-              </a:rPr>
-              <a:t>Conceptual sketch  —  Alice's beam, AN, Bob, Eve.</a:t>
-            </a:r>
-          </a:p>
-        </p:txBody>
-      </p:sp>
-      <p:sp>
-        <p:nvSpPr>
-          <p:cNvPr id="25" name="TextBox 24"/>
-          <p:cNvSpPr txBox="1"/>
-          <p:nvPr/>
-        </p:nvSpPr>
-        <p:spPr>
-          <a:xfrm>
-            <a:off x="548640" y="6355080"/>
-            <a:ext cx="11247120" cy="365760"/>
-          </a:xfrm>
-          <a:prstGeom prst="rect">
-            <a:avLst/>
-          </a:prstGeom>
-          <a:noFill/>
-        </p:spPr>
-        <p:txBody>
-          <a:bodyPr wrap="square" anchor="t" lIns="45720" rIns="45720" tIns="18288" bIns="18288">
-            <a:spAutoFit/>
-          </a:bodyPr>
-          <a:lstStyle/>
-          <a:p>
-            <a:pPr algn="ctr"/>
-            <a:r>
-              <a:rPr sz="1300" b="0" i="1">
-                <a:solidFill>
-                  <a:srgbClr val="7F7F7F"/>
-                </a:solidFill>
-                <a:latin typeface="Calibri"/>
-              </a:rPr>
-              <a:t>▶  streamlit run app/streamlit_app.py     (default Nt = 8 — where the win is biggest)</a:t>
-            </a:r>
-          </a:p>
-        </p:txBody>
-      </p:sp>
-      <p:sp>
-        <p:nvSpPr>
-          <p:cNvPr id="26" name="TextBox 25"/>
           <p:cNvSpPr txBox="1"/>
           <p:nvPr/>
         </p:nvSpPr>
@@ -4684,6 +4676,962 @@
                 </a:solidFill>
                 <a:latin typeface="Calibri"/>
               </a:rPr>
+              <a:t>Live demo  —  Streamlit GUI</a:t>
+            </a:r>
+          </a:p>
+        </p:txBody>
+      </p:sp>
+      <p:sp>
+        <p:nvSpPr>
+          <p:cNvPr id="4" name="TextBox 3"/>
+          <p:cNvSpPr txBox="1"/>
+          <p:nvPr/>
+        </p:nvSpPr>
+        <p:spPr>
+          <a:xfrm>
+            <a:off x="1371600" y="1280160"/>
+            <a:ext cx="9418320" cy="457200"/>
+          </a:xfrm>
+          <a:prstGeom prst="rect">
+            <a:avLst/>
+          </a:prstGeom>
+          <a:noFill/>
+        </p:spPr>
+        <p:txBody>
+          <a:bodyPr wrap="square" anchor="t" lIns="45720" rIns="45720" tIns="18288" bIns="18288">
+            <a:spAutoFit/>
+          </a:bodyPr>
+          <a:lstStyle/>
+          <a:p>
+            <a:pPr algn="ctr"/>
+            <a:r>
+              <a:rPr sz="2000" b="0" i="1">
+                <a:solidFill>
+                  <a:srgbClr val="1F4E79"/>
+                </a:solidFill>
+                <a:latin typeface="Calibri"/>
+              </a:rPr>
+              <a:t>Switching to the browser  —  same model, you drag the sliders.</a:t>
+            </a:r>
+          </a:p>
+        </p:txBody>
+      </p:sp>
+      <p:sp>
+        <p:nvSpPr>
+          <p:cNvPr id="5" name="Rounded Rectangle 4"/>
+          <p:cNvSpPr/>
+          <p:nvPr/>
+        </p:nvSpPr>
+        <p:spPr>
+          <a:xfrm>
+            <a:off x="457200" y="2103120"/>
+            <a:ext cx="2240280" cy="4023360"/>
+          </a:xfrm>
+          <a:prstGeom prst="roundRect">
+            <a:avLst/>
+          </a:prstGeom>
+          <a:solidFill>
+            <a:srgbClr val="E5ECF3"/>
+          </a:solidFill>
+          <a:ln w="15875">
+            <a:solidFill>
+              <a:srgbClr val="1F4E79"/>
+            </a:solidFill>
+          </a:ln>
+          <a:effectLst/>
+        </p:spPr>
+        <p:style>
+          <a:lnRef idx="1">
+            <a:schemeClr val="accent1"/>
+          </a:lnRef>
+          <a:fillRef idx="3">
+            <a:schemeClr val="accent1"/>
+          </a:fillRef>
+          <a:effectRef idx="2">
+            <a:schemeClr val="accent1"/>
+          </a:effectRef>
+          <a:fontRef idx="minor">
+            <a:schemeClr val="lt1"/>
+          </a:fontRef>
+        </p:style>
+        <p:txBody>
+          <a:bodyPr rtlCol="0" anchor="ctr"/>
+          <a:lstStyle/>
+          <a:p>
+            <a:pPr algn="ctr"/>
+          </a:p>
+        </p:txBody>
+      </p:sp>
+      <p:sp>
+        <p:nvSpPr>
+          <p:cNvPr id="6" name="TextBox 5"/>
+          <p:cNvSpPr txBox="1"/>
+          <p:nvPr/>
+        </p:nvSpPr>
+        <p:spPr>
+          <a:xfrm>
+            <a:off x="457200" y="2240280"/>
+            <a:ext cx="2240280" cy="457200"/>
+          </a:xfrm>
+          <a:prstGeom prst="rect">
+            <a:avLst/>
+          </a:prstGeom>
+          <a:noFill/>
+        </p:spPr>
+        <p:txBody>
+          <a:bodyPr wrap="square" anchor="t" lIns="45720" rIns="45720" tIns="18288" bIns="18288">
+            <a:spAutoFit/>
+          </a:bodyPr>
+          <a:lstStyle/>
+          <a:p>
+            <a:pPr algn="ctr"/>
+            <a:r>
+              <a:rPr sz="2400" b="1" i="0">
+                <a:solidFill>
+                  <a:srgbClr val="E5C107"/>
+                </a:solidFill>
+                <a:latin typeface="Calibri"/>
+              </a:rPr>
+              <a:t>1.</a:t>
+            </a:r>
+          </a:p>
+        </p:txBody>
+      </p:sp>
+      <p:sp>
+        <p:nvSpPr>
+          <p:cNvPr id="7" name="TextBox 6"/>
+          <p:cNvSpPr txBox="1"/>
+          <p:nvPr/>
+        </p:nvSpPr>
+        <p:spPr>
+          <a:xfrm>
+            <a:off x="457200" y="2697480"/>
+            <a:ext cx="2240280" cy="457200"/>
+          </a:xfrm>
+          <a:prstGeom prst="rect">
+            <a:avLst/>
+          </a:prstGeom>
+          <a:noFill/>
+        </p:spPr>
+        <p:txBody>
+          <a:bodyPr wrap="square" anchor="t" lIns="45720" rIns="45720" tIns="18288" bIns="18288">
+            <a:spAutoFit/>
+          </a:bodyPr>
+          <a:lstStyle/>
+          <a:p>
+            <a:pPr algn="ctr"/>
+            <a:r>
+              <a:rPr sz="1800" b="1" i="0">
+                <a:solidFill>
+                  <a:srgbClr val="1F4E79"/>
+                </a:solidFill>
+                <a:latin typeface="Calibri"/>
+              </a:rPr>
+              <a:t>Live test</a:t>
+            </a:r>
+          </a:p>
+        </p:txBody>
+      </p:sp>
+      <p:sp>
+        <p:nvSpPr>
+          <p:cNvPr id="8" name="TextBox 7"/>
+          <p:cNvSpPr txBox="1"/>
+          <p:nvPr/>
+        </p:nvSpPr>
+        <p:spPr>
+          <a:xfrm>
+            <a:off x="594360" y="3246120"/>
+            <a:ext cx="1965960" cy="2743200"/>
+          </a:xfrm>
+          <a:prstGeom prst="rect">
+            <a:avLst/>
+          </a:prstGeom>
+          <a:noFill/>
+        </p:spPr>
+        <p:txBody>
+          <a:bodyPr wrap="square" anchor="t" lIns="45720" rIns="45720" tIns="18288" bIns="18288">
+            <a:spAutoFit/>
+          </a:bodyPr>
+          <a:lstStyle/>
+          <a:p>
+            <a:pPr algn="ctr"/>
+            <a:r>
+              <a:rPr sz="1200" b="0" i="0">
+                <a:solidFill>
+                  <a:srgbClr val="1A1A1A"/>
+                </a:solidFill>
+                <a:latin typeface="Calibri"/>
+              </a:rPr>
+              <a:t>Pick (Nt, SNR, κ).  See three schemes compete side-by-side.</a:t>
+            </a:r>
+          </a:p>
+        </p:txBody>
+      </p:sp>
+      <p:sp>
+        <p:nvSpPr>
+          <p:cNvPr id="9" name="Rounded Rectangle 8"/>
+          <p:cNvSpPr/>
+          <p:nvPr/>
+        </p:nvSpPr>
+        <p:spPr>
+          <a:xfrm>
+            <a:off x="2788920" y="2103120"/>
+            <a:ext cx="2240280" cy="4023360"/>
+          </a:xfrm>
+          <a:prstGeom prst="roundRect">
+            <a:avLst/>
+          </a:prstGeom>
+          <a:solidFill>
+            <a:srgbClr val="E5ECF3"/>
+          </a:solidFill>
+          <a:ln w="15875">
+            <a:solidFill>
+              <a:srgbClr val="1F4E79"/>
+            </a:solidFill>
+          </a:ln>
+          <a:effectLst/>
+        </p:spPr>
+        <p:style>
+          <a:lnRef idx="1">
+            <a:schemeClr val="accent1"/>
+          </a:lnRef>
+          <a:fillRef idx="3">
+            <a:schemeClr val="accent1"/>
+          </a:fillRef>
+          <a:effectRef idx="2">
+            <a:schemeClr val="accent1"/>
+          </a:effectRef>
+          <a:fontRef idx="minor">
+            <a:schemeClr val="lt1"/>
+          </a:fontRef>
+        </p:style>
+        <p:txBody>
+          <a:bodyPr rtlCol="0" anchor="ctr"/>
+          <a:lstStyle/>
+          <a:p>
+            <a:pPr algn="ctr"/>
+          </a:p>
+        </p:txBody>
+      </p:sp>
+      <p:sp>
+        <p:nvSpPr>
+          <p:cNvPr id="10" name="TextBox 9"/>
+          <p:cNvSpPr txBox="1"/>
+          <p:nvPr/>
+        </p:nvSpPr>
+        <p:spPr>
+          <a:xfrm>
+            <a:off x="2788920" y="2240280"/>
+            <a:ext cx="2240280" cy="457200"/>
+          </a:xfrm>
+          <a:prstGeom prst="rect">
+            <a:avLst/>
+          </a:prstGeom>
+          <a:noFill/>
+        </p:spPr>
+        <p:txBody>
+          <a:bodyPr wrap="square" anchor="t" lIns="45720" rIns="45720" tIns="18288" bIns="18288">
+            <a:spAutoFit/>
+          </a:bodyPr>
+          <a:lstStyle/>
+          <a:p>
+            <a:pPr algn="ctr"/>
+            <a:r>
+              <a:rPr sz="2400" b="1" i="0">
+                <a:solidFill>
+                  <a:srgbClr val="E5C107"/>
+                </a:solidFill>
+                <a:latin typeface="Calibri"/>
+              </a:rPr>
+              <a:t>2.</a:t>
+            </a:r>
+          </a:p>
+        </p:txBody>
+      </p:sp>
+      <p:sp>
+        <p:nvSpPr>
+          <p:cNvPr id="11" name="TextBox 10"/>
+          <p:cNvSpPr txBox="1"/>
+          <p:nvPr/>
+        </p:nvSpPr>
+        <p:spPr>
+          <a:xfrm>
+            <a:off x="2788920" y="2697480"/>
+            <a:ext cx="2240280" cy="457200"/>
+          </a:xfrm>
+          <a:prstGeom prst="rect">
+            <a:avLst/>
+          </a:prstGeom>
+          <a:noFill/>
+        </p:spPr>
+        <p:txBody>
+          <a:bodyPr wrap="square" anchor="t" lIns="45720" rIns="45720" tIns="18288" bIns="18288">
+            <a:spAutoFit/>
+          </a:bodyPr>
+          <a:lstStyle/>
+          <a:p>
+            <a:pPr algn="ctr"/>
+            <a:r>
+              <a:rPr sz="1800" b="1" i="0">
+                <a:solidFill>
+                  <a:srgbClr val="1F4E79"/>
+                </a:solidFill>
+                <a:latin typeface="Calibri"/>
+              </a:rPr>
+              <a:t>SNR sweep</a:t>
+            </a:r>
+          </a:p>
+        </p:txBody>
+      </p:sp>
+      <p:sp>
+        <p:nvSpPr>
+          <p:cNvPr id="12" name="TextBox 11"/>
+          <p:cNvSpPr txBox="1"/>
+          <p:nvPr/>
+        </p:nvSpPr>
+        <p:spPr>
+          <a:xfrm>
+            <a:off x="2926079" y="3246120"/>
+            <a:ext cx="1965960" cy="2743200"/>
+          </a:xfrm>
+          <a:prstGeom prst="rect">
+            <a:avLst/>
+          </a:prstGeom>
+          <a:noFill/>
+        </p:spPr>
+        <p:txBody>
+          <a:bodyPr wrap="square" anchor="t" lIns="45720" rIns="45720" tIns="18288" bIns="18288">
+            <a:spAutoFit/>
+          </a:bodyPr>
+          <a:lstStyle/>
+          <a:p>
+            <a:pPr algn="ctr"/>
+            <a:r>
+              <a:rPr sz="1200" b="0" i="0">
+                <a:solidFill>
+                  <a:srgbClr val="1A1A1A"/>
+                </a:solidFill>
+                <a:latin typeface="Calibri"/>
+              </a:rPr>
+              <a:t>Hold κ, vary SNR.  Watch the curves spread or converge.</a:t>
+            </a:r>
+          </a:p>
+        </p:txBody>
+      </p:sp>
+      <p:sp>
+        <p:nvSpPr>
+          <p:cNvPr id="13" name="Rounded Rectangle 12"/>
+          <p:cNvSpPr/>
+          <p:nvPr/>
+        </p:nvSpPr>
+        <p:spPr>
+          <a:xfrm>
+            <a:off x="5120640" y="2103120"/>
+            <a:ext cx="2240280" cy="4023360"/>
+          </a:xfrm>
+          <a:prstGeom prst="roundRect">
+            <a:avLst/>
+          </a:prstGeom>
+          <a:solidFill>
+            <a:srgbClr val="E5ECF3"/>
+          </a:solidFill>
+          <a:ln w="15875">
+            <a:solidFill>
+              <a:srgbClr val="1F4E79"/>
+            </a:solidFill>
+          </a:ln>
+          <a:effectLst/>
+        </p:spPr>
+        <p:style>
+          <a:lnRef idx="1">
+            <a:schemeClr val="accent1"/>
+          </a:lnRef>
+          <a:fillRef idx="3">
+            <a:schemeClr val="accent1"/>
+          </a:fillRef>
+          <a:effectRef idx="2">
+            <a:schemeClr val="accent1"/>
+          </a:effectRef>
+          <a:fontRef idx="minor">
+            <a:schemeClr val="lt1"/>
+          </a:fontRef>
+        </p:style>
+        <p:txBody>
+          <a:bodyPr rtlCol="0" anchor="ctr"/>
+          <a:lstStyle/>
+          <a:p>
+            <a:pPr algn="ctr"/>
+          </a:p>
+        </p:txBody>
+      </p:sp>
+      <p:sp>
+        <p:nvSpPr>
+          <p:cNvPr id="14" name="TextBox 13"/>
+          <p:cNvSpPr txBox="1"/>
+          <p:nvPr/>
+        </p:nvSpPr>
+        <p:spPr>
+          <a:xfrm>
+            <a:off x="5120640" y="2240280"/>
+            <a:ext cx="2240280" cy="457200"/>
+          </a:xfrm>
+          <a:prstGeom prst="rect">
+            <a:avLst/>
+          </a:prstGeom>
+          <a:noFill/>
+        </p:spPr>
+        <p:txBody>
+          <a:bodyPr wrap="square" anchor="t" lIns="45720" rIns="45720" tIns="18288" bIns="18288">
+            <a:spAutoFit/>
+          </a:bodyPr>
+          <a:lstStyle/>
+          <a:p>
+            <a:pPr algn="ctr"/>
+            <a:r>
+              <a:rPr sz="2400" b="1" i="0">
+                <a:solidFill>
+                  <a:srgbClr val="E5C107"/>
+                </a:solidFill>
+                <a:latin typeface="Calibri"/>
+              </a:rPr>
+              <a:t>3.</a:t>
+            </a:r>
+          </a:p>
+        </p:txBody>
+      </p:sp>
+      <p:sp>
+        <p:nvSpPr>
+          <p:cNvPr id="15" name="TextBox 14"/>
+          <p:cNvSpPr txBox="1"/>
+          <p:nvPr/>
+        </p:nvSpPr>
+        <p:spPr>
+          <a:xfrm>
+            <a:off x="5120640" y="2697480"/>
+            <a:ext cx="2240280" cy="457200"/>
+          </a:xfrm>
+          <a:prstGeom prst="rect">
+            <a:avLst/>
+          </a:prstGeom>
+          <a:noFill/>
+        </p:spPr>
+        <p:txBody>
+          <a:bodyPr wrap="square" anchor="t" lIns="45720" rIns="45720" tIns="18288" bIns="18288">
+            <a:spAutoFit/>
+          </a:bodyPr>
+          <a:lstStyle/>
+          <a:p>
+            <a:pPr algn="ctr"/>
+            <a:r>
+              <a:rPr sz="1800" b="1" i="0">
+                <a:solidFill>
+                  <a:srgbClr val="1F4E79"/>
+                </a:solidFill>
+                <a:latin typeface="Calibri"/>
+              </a:rPr>
+              <a:t>κ sweep</a:t>
+            </a:r>
+          </a:p>
+        </p:txBody>
+      </p:sp>
+      <p:sp>
+        <p:nvSpPr>
+          <p:cNvPr id="16" name="TextBox 15"/>
+          <p:cNvSpPr txBox="1"/>
+          <p:nvPr/>
+        </p:nvSpPr>
+        <p:spPr>
+          <a:xfrm>
+            <a:off x="5257800" y="3246120"/>
+            <a:ext cx="1965960" cy="2743200"/>
+          </a:xfrm>
+          <a:prstGeom prst="rect">
+            <a:avLst/>
+          </a:prstGeom>
+          <a:noFill/>
+        </p:spPr>
+        <p:txBody>
+          <a:bodyPr wrap="square" anchor="t" lIns="45720" rIns="45720" tIns="18288" bIns="18288">
+            <a:spAutoFit/>
+          </a:bodyPr>
+          <a:lstStyle/>
+          <a:p>
+            <a:pPr algn="ctr"/>
+            <a:r>
+              <a:rPr sz="1200" b="0" i="0">
+                <a:solidFill>
+                  <a:srgbClr val="1A1A1A"/>
+                </a:solidFill>
+                <a:latin typeface="Calibri"/>
+              </a:rPr>
+              <a:t>Hold SNR, slide κ from 1 → 0.  The headline story, live.</a:t>
+            </a:r>
+          </a:p>
+        </p:txBody>
+      </p:sp>
+      <p:sp>
+        <p:nvSpPr>
+          <p:cNvPr id="17" name="Rounded Rectangle 16"/>
+          <p:cNvSpPr/>
+          <p:nvPr/>
+        </p:nvSpPr>
+        <p:spPr>
+          <a:xfrm>
+            <a:off x="7452359" y="2103120"/>
+            <a:ext cx="2240280" cy="4023360"/>
+          </a:xfrm>
+          <a:prstGeom prst="roundRect">
+            <a:avLst/>
+          </a:prstGeom>
+          <a:solidFill>
+            <a:srgbClr val="E5ECF3"/>
+          </a:solidFill>
+          <a:ln w="15875">
+            <a:solidFill>
+              <a:srgbClr val="1F4E79"/>
+            </a:solidFill>
+          </a:ln>
+          <a:effectLst/>
+        </p:spPr>
+        <p:style>
+          <a:lnRef idx="1">
+            <a:schemeClr val="accent1"/>
+          </a:lnRef>
+          <a:fillRef idx="3">
+            <a:schemeClr val="accent1"/>
+          </a:fillRef>
+          <a:effectRef idx="2">
+            <a:schemeClr val="accent1"/>
+          </a:effectRef>
+          <a:fontRef idx="minor">
+            <a:schemeClr val="lt1"/>
+          </a:fontRef>
+        </p:style>
+        <p:txBody>
+          <a:bodyPr rtlCol="0" anchor="ctr"/>
+          <a:lstStyle/>
+          <a:p>
+            <a:pPr algn="ctr"/>
+          </a:p>
+        </p:txBody>
+      </p:sp>
+      <p:sp>
+        <p:nvSpPr>
+          <p:cNvPr id="18" name="TextBox 17"/>
+          <p:cNvSpPr txBox="1"/>
+          <p:nvPr/>
+        </p:nvSpPr>
+        <p:spPr>
+          <a:xfrm>
+            <a:off x="7452359" y="2240280"/>
+            <a:ext cx="2240280" cy="457200"/>
+          </a:xfrm>
+          <a:prstGeom prst="rect">
+            <a:avLst/>
+          </a:prstGeom>
+          <a:noFill/>
+        </p:spPr>
+        <p:txBody>
+          <a:bodyPr wrap="square" anchor="t" lIns="45720" rIns="45720" tIns="18288" bIns="18288">
+            <a:spAutoFit/>
+          </a:bodyPr>
+          <a:lstStyle/>
+          <a:p>
+            <a:pPr algn="ctr"/>
+            <a:r>
+              <a:rPr sz="2400" b="1" i="0">
+                <a:solidFill>
+                  <a:srgbClr val="E5C107"/>
+                </a:solidFill>
+                <a:latin typeface="Calibri"/>
+              </a:rPr>
+              <a:t>4.</a:t>
+            </a:r>
+          </a:p>
+        </p:txBody>
+      </p:sp>
+      <p:sp>
+        <p:nvSpPr>
+          <p:cNvPr id="19" name="TextBox 18"/>
+          <p:cNvSpPr txBox="1"/>
+          <p:nvPr/>
+        </p:nvSpPr>
+        <p:spPr>
+          <a:xfrm>
+            <a:off x="7452359" y="2697480"/>
+            <a:ext cx="2240280" cy="457200"/>
+          </a:xfrm>
+          <a:prstGeom prst="rect">
+            <a:avLst/>
+          </a:prstGeom>
+          <a:noFill/>
+        </p:spPr>
+        <p:txBody>
+          <a:bodyPr wrap="square" anchor="t" lIns="45720" rIns="45720" tIns="18288" bIns="18288">
+            <a:spAutoFit/>
+          </a:bodyPr>
+          <a:lstStyle/>
+          <a:p>
+            <a:pPr algn="ctr"/>
+            <a:r>
+              <a:rPr sz="1800" b="1" i="0">
+                <a:solidFill>
+                  <a:srgbClr val="1F4E79"/>
+                </a:solidFill>
+                <a:latin typeface="Calibri"/>
+              </a:rPr>
+              <a:t>Outage</a:t>
+            </a:r>
+          </a:p>
+        </p:txBody>
+      </p:sp>
+      <p:sp>
+        <p:nvSpPr>
+          <p:cNvPr id="20" name="TextBox 19"/>
+          <p:cNvSpPr txBox="1"/>
+          <p:nvPr/>
+        </p:nvSpPr>
+        <p:spPr>
+          <a:xfrm>
+            <a:off x="7589519" y="3246120"/>
+            <a:ext cx="1965960" cy="2743200"/>
+          </a:xfrm>
+          <a:prstGeom prst="rect">
+            <a:avLst/>
+          </a:prstGeom>
+          <a:noFill/>
+        </p:spPr>
+        <p:txBody>
+          <a:bodyPr wrap="square" anchor="t" lIns="45720" rIns="45720" tIns="18288" bIns="18288">
+            <a:spAutoFit/>
+          </a:bodyPr>
+          <a:lstStyle/>
+          <a:p>
+            <a:pPr algn="ctr"/>
+            <a:r>
+              <a:rPr sz="1200" b="0" i="0">
+                <a:solidFill>
+                  <a:srgbClr val="1A1A1A"/>
+                </a:solidFill>
+                <a:latin typeface="Calibri"/>
+              </a:rPr>
+              <a:t>Empirical CDF.  How often each scheme misses the target rate.</a:t>
+            </a:r>
+          </a:p>
+        </p:txBody>
+      </p:sp>
+      <p:sp>
+        <p:nvSpPr>
+          <p:cNvPr id="21" name="Rounded Rectangle 20"/>
+          <p:cNvSpPr/>
+          <p:nvPr/>
+        </p:nvSpPr>
+        <p:spPr>
+          <a:xfrm>
+            <a:off x="9784080" y="2103120"/>
+            <a:ext cx="2240280" cy="4023360"/>
+          </a:xfrm>
+          <a:prstGeom prst="roundRect">
+            <a:avLst/>
+          </a:prstGeom>
+          <a:solidFill>
+            <a:srgbClr val="E5ECF3"/>
+          </a:solidFill>
+          <a:ln w="15875">
+            <a:solidFill>
+              <a:srgbClr val="1F4E79"/>
+            </a:solidFill>
+          </a:ln>
+          <a:effectLst/>
+        </p:spPr>
+        <p:style>
+          <a:lnRef idx="1">
+            <a:schemeClr val="accent1"/>
+          </a:lnRef>
+          <a:fillRef idx="3">
+            <a:schemeClr val="accent1"/>
+          </a:fillRef>
+          <a:effectRef idx="2">
+            <a:schemeClr val="accent1"/>
+          </a:effectRef>
+          <a:fontRef idx="minor">
+            <a:schemeClr val="lt1"/>
+          </a:fontRef>
+        </p:style>
+        <p:txBody>
+          <a:bodyPr rtlCol="0" anchor="ctr"/>
+          <a:lstStyle/>
+          <a:p>
+            <a:pPr algn="ctr"/>
+          </a:p>
+        </p:txBody>
+      </p:sp>
+      <p:sp>
+        <p:nvSpPr>
+          <p:cNvPr id="22" name="TextBox 21"/>
+          <p:cNvSpPr txBox="1"/>
+          <p:nvPr/>
+        </p:nvSpPr>
+        <p:spPr>
+          <a:xfrm>
+            <a:off x="9784080" y="2240280"/>
+            <a:ext cx="2240280" cy="457200"/>
+          </a:xfrm>
+          <a:prstGeom prst="rect">
+            <a:avLst/>
+          </a:prstGeom>
+          <a:noFill/>
+        </p:spPr>
+        <p:txBody>
+          <a:bodyPr wrap="square" anchor="t" lIns="45720" rIns="45720" tIns="18288" bIns="18288">
+            <a:spAutoFit/>
+          </a:bodyPr>
+          <a:lstStyle/>
+          <a:p>
+            <a:pPr algn="ctr"/>
+            <a:r>
+              <a:rPr sz="2400" b="1" i="0">
+                <a:solidFill>
+                  <a:srgbClr val="E5C107"/>
+                </a:solidFill>
+                <a:latin typeface="Calibri"/>
+              </a:rPr>
+              <a:t>5.</a:t>
+            </a:r>
+          </a:p>
+        </p:txBody>
+      </p:sp>
+      <p:sp>
+        <p:nvSpPr>
+          <p:cNvPr id="23" name="TextBox 22"/>
+          <p:cNvSpPr txBox="1"/>
+          <p:nvPr/>
+        </p:nvSpPr>
+        <p:spPr>
+          <a:xfrm>
+            <a:off x="9784080" y="2697480"/>
+            <a:ext cx="2240280" cy="457200"/>
+          </a:xfrm>
+          <a:prstGeom prst="rect">
+            <a:avLst/>
+          </a:prstGeom>
+          <a:noFill/>
+        </p:spPr>
+        <p:txBody>
+          <a:bodyPr wrap="square" anchor="t" lIns="45720" rIns="45720" tIns="18288" bIns="18288">
+            <a:spAutoFit/>
+          </a:bodyPr>
+          <a:lstStyle/>
+          <a:p>
+            <a:pPr algn="ctr"/>
+            <a:r>
+              <a:rPr sz="1800" b="1" i="0">
+                <a:solidFill>
+                  <a:srgbClr val="1F4E79"/>
+                </a:solidFill>
+                <a:latin typeface="Calibri"/>
+              </a:rPr>
+              <a:t>Geometry</a:t>
+            </a:r>
+          </a:p>
+        </p:txBody>
+      </p:sp>
+      <p:sp>
+        <p:nvSpPr>
+          <p:cNvPr id="24" name="TextBox 23"/>
+          <p:cNvSpPr txBox="1"/>
+          <p:nvPr/>
+        </p:nvSpPr>
+        <p:spPr>
+          <a:xfrm>
+            <a:off x="9921240" y="3246120"/>
+            <a:ext cx="1965960" cy="2743200"/>
+          </a:xfrm>
+          <a:prstGeom prst="rect">
+            <a:avLst/>
+          </a:prstGeom>
+          <a:noFill/>
+        </p:spPr>
+        <p:txBody>
+          <a:bodyPr wrap="square" anchor="t" lIns="45720" rIns="45720" tIns="18288" bIns="18288">
+            <a:spAutoFit/>
+          </a:bodyPr>
+          <a:lstStyle/>
+          <a:p>
+            <a:pPr algn="ctr"/>
+            <a:r>
+              <a:rPr sz="1200" b="0" i="0">
+                <a:solidFill>
+                  <a:srgbClr val="1A1A1A"/>
+                </a:solidFill>
+                <a:latin typeface="Calibri"/>
+              </a:rPr>
+              <a:t>Conceptual sketch  —  Alice's beam, AN, Bob, Eve.</a:t>
+            </a:r>
+          </a:p>
+        </p:txBody>
+      </p:sp>
+      <p:sp>
+        <p:nvSpPr>
+          <p:cNvPr id="25" name="TextBox 24"/>
+          <p:cNvSpPr txBox="1"/>
+          <p:nvPr/>
+        </p:nvSpPr>
+        <p:spPr>
+          <a:xfrm>
+            <a:off x="548640" y="6355080"/>
+            <a:ext cx="11247120" cy="365760"/>
+          </a:xfrm>
+          <a:prstGeom prst="rect">
+            <a:avLst/>
+          </a:prstGeom>
+          <a:noFill/>
+        </p:spPr>
+        <p:txBody>
+          <a:bodyPr wrap="square" anchor="t" lIns="45720" rIns="45720" tIns="18288" bIns="18288">
+            <a:spAutoFit/>
+          </a:bodyPr>
+          <a:lstStyle/>
+          <a:p>
+            <a:pPr algn="ctr"/>
+            <a:r>
+              <a:rPr sz="1300" b="0" i="1">
+                <a:solidFill>
+                  <a:srgbClr val="7F7F7F"/>
+                </a:solidFill>
+                <a:latin typeface="Calibri"/>
+              </a:rPr>
+              <a:t>▶  streamlit run app/streamlit_app.py     (default Nt = 8 — where the win is biggest)</a:t>
+            </a:r>
+          </a:p>
+        </p:txBody>
+      </p:sp>
+      <p:sp>
+        <p:nvSpPr>
+          <p:cNvPr id="26" name="TextBox 25"/>
+          <p:cNvSpPr txBox="1"/>
+          <p:nvPr/>
+        </p:nvSpPr>
+        <p:spPr>
+          <a:xfrm>
+            <a:off x="10058400" y="6492240"/>
+            <a:ext cx="2011680" cy="274320"/>
+          </a:xfrm>
+          <a:prstGeom prst="rect">
+            <a:avLst/>
+          </a:prstGeom>
+          <a:noFill/>
+        </p:spPr>
+        <p:txBody>
+          <a:bodyPr wrap="square" anchor="t" lIns="45720" rIns="45720" tIns="18288" bIns="18288">
+            <a:spAutoFit/>
+          </a:bodyPr>
+          <a:lstStyle/>
+          <a:p>
+            <a:pPr algn="r"/>
+            <a:r>
+              <a:rPr sz="1000" b="0" i="0">
+                <a:solidFill>
+                  <a:srgbClr val="7F7F7F"/>
+                </a:solidFill>
+                <a:latin typeface="Calibri"/>
+              </a:rPr>
+              <a:t>Slide 12 / 13</a:t>
+            </a:r>
+          </a:p>
+        </p:txBody>
+      </p:sp>
+    </p:spTree>
+  </p:cSld>
+  <p:clrMapOvr>
+    <a:masterClrMapping/>
+  </p:clrMapOvr>
+</p:sld>
+</file>
+
+<file path=ppt/slides/slide13.xml><?xml version="1.0" encoding="utf-8"?>
+<p:sld xmlns:a="http://schemas.openxmlformats.org/drawingml/2006/main" xmlns:p="http://schemas.openxmlformats.org/presentationml/2006/main" xmlns:r="http://schemas.openxmlformats.org/officeDocument/2006/relationships">
+  <p:cSld>
+    <p:spTree>
+      <p:nvGrpSpPr>
+        <p:cNvPr id="1" name=""/>
+        <p:cNvGrpSpPr/>
+        <p:nvPr/>
+      </p:nvGrpSpPr>
+      <p:grpSpPr/>
+      <p:sp>
+        <p:nvSpPr>
+          <p:cNvPr id="2" name="Rectangle 1"/>
+          <p:cNvSpPr/>
+          <p:nvPr/>
+        </p:nvSpPr>
+        <p:spPr>
+          <a:xfrm>
+            <a:off x="0" y="0"/>
+            <a:ext cx="12191695" cy="868680"/>
+          </a:xfrm>
+          <a:prstGeom prst="rect">
+            <a:avLst/>
+          </a:prstGeom>
+          <a:solidFill>
+            <a:srgbClr val="1F4E79"/>
+          </a:solidFill>
+          <a:ln>
+            <a:noFill/>
+          </a:ln>
+          <a:effectLst/>
+        </p:spPr>
+        <p:style>
+          <a:lnRef idx="1">
+            <a:schemeClr val="accent1"/>
+          </a:lnRef>
+          <a:fillRef idx="3">
+            <a:schemeClr val="accent1"/>
+          </a:fillRef>
+          <a:effectRef idx="2">
+            <a:schemeClr val="accent1"/>
+          </a:effectRef>
+          <a:fontRef idx="minor">
+            <a:schemeClr val="lt1"/>
+          </a:fontRef>
+        </p:style>
+        <p:txBody>
+          <a:bodyPr rtlCol="0" anchor="ctr"/>
+          <a:lstStyle/>
+          <a:p>
+            <a:pPr algn="ctr"/>
+          </a:p>
+        </p:txBody>
+      </p:sp>
+      <p:sp>
+        <p:nvSpPr>
+          <p:cNvPr id="3" name="TextBox 2"/>
+          <p:cNvSpPr txBox="1"/>
+          <p:nvPr/>
+        </p:nvSpPr>
+        <p:spPr>
+          <a:xfrm>
+            <a:off x="457200" y="91440"/>
+            <a:ext cx="11247120" cy="640080"/>
+          </a:xfrm>
+          <a:prstGeom prst="rect">
+            <a:avLst/>
+          </a:prstGeom>
+          <a:noFill/>
+        </p:spPr>
+        <p:txBody>
+          <a:bodyPr wrap="none">
+            <a:spAutoFit/>
+          </a:bodyPr>
+          <a:lstStyle/>
+          <a:p>
+            <a:r>
+              <a:rPr sz="3000" b="1">
+                <a:solidFill>
+                  <a:srgbClr val="FFFFFF"/>
+                </a:solidFill>
+                <a:latin typeface="Calibri"/>
+              </a:rPr>
               <a:t>Takeaways</a:t>
             </a:r>
           </a:p>
@@ -5071,7 +6019,7 @@
                 </a:solidFill>
                 <a:latin typeface="Calibri"/>
               </a:rPr>
-              <a:t>Slide 12 / 13</a:t>
+              <a:t>Slide 13 / 13</a:t>
             </a:r>
           </a:p>
         </p:txBody>
@@ -5084,7 +6032,7 @@
 </p:sld>
 </file>
 
-<file path=ppt/slides/slide13.xml><?xml version="1.0" encoding="utf-8"?>
+<file path=ppt/slides/slide14.xml><?xml version="1.0" encoding="utf-8"?>
 <p:sld xmlns:a="http://schemas.openxmlformats.org/drawingml/2006/main" xmlns:p="http://schemas.openxmlformats.org/presentationml/2006/main" xmlns:r="http://schemas.openxmlformats.org/officeDocument/2006/relationships">
   <p:cSld>
     <p:spTree>
